--- a/meetings/我/5-22.pptx
+++ b/meetings/我/5-22.pptx
@@ -1,19 +1,19 @@
 
 <file path=ppt/presentation.xml><?xml version="1.0" encoding="utf-8"?>
-<p:presentation xmlns:a="http://schemas.openxmlformats.org/drawingml/2006/main" xmlns:r="http://schemas.openxmlformats.org/officeDocument/2006/relationships" xmlns:p="http://schemas.openxmlformats.org/presentationml/2006/main" saveSubsetFonts="1" autoCompressPictures="0">
+<p:presentation xmlns:a="http://schemas.openxmlformats.org/drawingml/2006/main" xmlns:r="http://schemas.openxmlformats.org/officeDocument/2006/relationships" xmlns:p="http://schemas.openxmlformats.org/presentationml/2006/main" autoCompressPictures="0">
   <p:sldMasterIdLst>
     <p:sldMasterId id="2147483648" r:id="rId1"/>
   </p:sldMasterIdLst>
   <p:sldIdLst>
-    <p:sldId id="256" r:id="rId2"/>
-    <p:sldId id="257" r:id="rId3"/>
-    <p:sldId id="258" r:id="rId4"/>
-    <p:sldId id="259" r:id="rId5"/>
-    <p:sldId id="260" r:id="rId6"/>
-    <p:sldId id="261" r:id="rId7"/>
-    <p:sldId id="262" r:id="rId8"/>
-    <p:sldId id="265" r:id="rId9"/>
-    <p:sldId id="266" r:id="rId10"/>
+    <p:sldId id="256" r:id="rId3"/>
+    <p:sldId id="257" r:id="rId4"/>
+    <p:sldId id="258" r:id="rId5"/>
+    <p:sldId id="259" r:id="rId6"/>
+    <p:sldId id="260" r:id="rId7"/>
+    <p:sldId id="261" r:id="rId8"/>
+    <p:sldId id="262" r:id="rId9"/>
+    <p:sldId id="265" r:id="rId10"/>
+    <p:sldId id="266" r:id="rId11"/>
   </p:sldIdLst>
   <p:sldSz cx="12192000" cy="6858000"/>
   <p:notesSz cx="6858000" cy="9144000"/>
@@ -134,13 +134,7 @@
       </p:grpSpPr>
       <p:sp>
         <p:nvSpPr>
-          <p:cNvPr id="2" name="标题 1">
-            <a:extLst>
-              <a:ext uri="{FF2B5EF4-FFF2-40B4-BE49-F238E27FC236}">
-                <a16:creationId xmlns:a16="http://schemas.microsoft.com/office/drawing/2014/main" id="{D5387F33-16EB-3639-3408-ACFE2A7D24E5}"/>
-              </a:ext>
-            </a:extLst>
-          </p:cNvPr>
+          <p:cNvPr id="2" name="标题 1"/>
           <p:cNvSpPr>
             <a:spLocks noGrp="1"/>
           </p:cNvSpPr>
@@ -166,18 +160,13 @@
               <a:rPr kumimoji="1" lang="zh-CN" altLang="en-US"/>
               <a:t>单击此处编辑母版标题样式</a:t>
             </a:r>
-          </a:p>
-        </p:txBody>
-      </p:sp>
-      <p:sp>
-        <p:nvSpPr>
-          <p:cNvPr id="3" name="副标题 2">
-            <a:extLst>
-              <a:ext uri="{FF2B5EF4-FFF2-40B4-BE49-F238E27FC236}">
-                <a16:creationId xmlns:a16="http://schemas.microsoft.com/office/drawing/2014/main" id="{D0893FA3-3231-F1B3-01FB-A65CD8CB845F}"/>
-              </a:ext>
-            </a:extLst>
-          </p:cNvPr>
+            <a:endParaRPr kumimoji="1" lang="zh-CN" altLang="en-US"/>
+          </a:p>
+        </p:txBody>
+      </p:sp>
+      <p:sp>
+        <p:nvSpPr>
+          <p:cNvPr id="3" name="副标题 2"/>
           <p:cNvSpPr>
             <a:spLocks noGrp="1"/>
           </p:cNvSpPr>
@@ -236,18 +225,13 @@
               <a:rPr kumimoji="1" lang="zh-CN" altLang="en-US"/>
               <a:t>单击此处编辑母版副标题样式</a:t>
             </a:r>
-          </a:p>
-        </p:txBody>
-      </p:sp>
-      <p:sp>
-        <p:nvSpPr>
-          <p:cNvPr id="4" name="日期占位符 3">
-            <a:extLst>
-              <a:ext uri="{FF2B5EF4-FFF2-40B4-BE49-F238E27FC236}">
-                <a16:creationId xmlns:a16="http://schemas.microsoft.com/office/drawing/2014/main" id="{94B3D1BE-4164-15FF-506B-C753BF781041}"/>
-              </a:ext>
-            </a:extLst>
-          </p:cNvPr>
+            <a:endParaRPr kumimoji="1" lang="zh-CN" altLang="en-US"/>
+          </a:p>
+        </p:txBody>
+      </p:sp>
+      <p:sp>
+        <p:nvSpPr>
+          <p:cNvPr id="4" name="日期占位符 3"/>
           <p:cNvSpPr>
             <a:spLocks noGrp="1"/>
           </p:cNvSpPr>
@@ -262,7 +246,6 @@
           <a:p>
             <a:fld id="{37475CA1-6F9A-C543-9726-5DEBB049FFBF}" type="datetimeFigureOut">
               <a:rPr kumimoji="1" lang="zh-CN" altLang="en-US" smtClean="0"/>
-              <a:t>2026/5/21</a:t>
             </a:fld>
             <a:endParaRPr kumimoji="1" lang="zh-CN" altLang="en-US"/>
           </a:p>
@@ -270,13 +253,7 @@
       </p:sp>
       <p:sp>
         <p:nvSpPr>
-          <p:cNvPr id="5" name="页脚占位符 4">
-            <a:extLst>
-              <a:ext uri="{FF2B5EF4-FFF2-40B4-BE49-F238E27FC236}">
-                <a16:creationId xmlns:a16="http://schemas.microsoft.com/office/drawing/2014/main" id="{A146B540-CB81-673B-1CDD-4976F22649C3}"/>
-              </a:ext>
-            </a:extLst>
-          </p:cNvPr>
+          <p:cNvPr id="5" name="页脚占位符 4"/>
           <p:cNvSpPr>
             <a:spLocks noGrp="1"/>
           </p:cNvSpPr>
@@ -295,13 +272,7 @@
       </p:sp>
       <p:sp>
         <p:nvSpPr>
-          <p:cNvPr id="6" name="灯片编号占位符 5">
-            <a:extLst>
-              <a:ext uri="{FF2B5EF4-FFF2-40B4-BE49-F238E27FC236}">
-                <a16:creationId xmlns:a16="http://schemas.microsoft.com/office/drawing/2014/main" id="{01D2D12B-46C9-7B57-874B-DFA023CF61FD}"/>
-              </a:ext>
-            </a:extLst>
-          </p:cNvPr>
+          <p:cNvPr id="6" name="灯片编号占位符 5"/>
           <p:cNvSpPr>
             <a:spLocks noGrp="1"/>
           </p:cNvSpPr>
@@ -316,18 +287,12 @@
           <a:p>
             <a:fld id="{6658316B-B7F2-F042-B6C0-2231261321F3}" type="slidenum">
               <a:rPr kumimoji="1" lang="zh-CN" altLang="en-US" smtClean="0"/>
-              <a:t>‹#›</a:t>
             </a:fld>
             <a:endParaRPr kumimoji="1" lang="zh-CN" altLang="en-US"/>
           </a:p>
         </p:txBody>
       </p:sp>
     </p:spTree>
-    <p:extLst>
-      <p:ext uri="{BB962C8B-B14F-4D97-AF65-F5344CB8AC3E}">
-        <p14:creationId xmlns:p14="http://schemas.microsoft.com/office/powerpoint/2010/main" val="1906216991"/>
-      </p:ext>
-    </p:extLst>
   </p:cSld>
   <p:clrMapOvr>
     <a:masterClrMapping/>
@@ -354,13 +319,7 @@
       </p:grpSpPr>
       <p:sp>
         <p:nvSpPr>
-          <p:cNvPr id="2" name="标题 1">
-            <a:extLst>
-              <a:ext uri="{FF2B5EF4-FFF2-40B4-BE49-F238E27FC236}">
-                <a16:creationId xmlns:a16="http://schemas.microsoft.com/office/drawing/2014/main" id="{72855517-1324-FBB2-39BE-595595B7A04E}"/>
-              </a:ext>
-            </a:extLst>
-          </p:cNvPr>
+          <p:cNvPr id="2" name="标题 1"/>
           <p:cNvSpPr>
             <a:spLocks noGrp="1"/>
           </p:cNvSpPr>
@@ -377,18 +336,13 @@
               <a:rPr kumimoji="1" lang="zh-CN" altLang="en-US"/>
               <a:t>单击此处编辑母版标题样式</a:t>
             </a:r>
-          </a:p>
-        </p:txBody>
-      </p:sp>
-      <p:sp>
-        <p:nvSpPr>
-          <p:cNvPr id="3" name="竖排文字占位符 2">
-            <a:extLst>
-              <a:ext uri="{FF2B5EF4-FFF2-40B4-BE49-F238E27FC236}">
-                <a16:creationId xmlns:a16="http://schemas.microsoft.com/office/drawing/2014/main" id="{7723C1D1-E827-3F2E-720C-43D0BCDF129F}"/>
-              </a:ext>
-            </a:extLst>
-          </p:cNvPr>
+            <a:endParaRPr kumimoji="1" lang="zh-CN" altLang="en-US"/>
+          </a:p>
+        </p:txBody>
+      </p:sp>
+      <p:sp>
+        <p:nvSpPr>
+          <p:cNvPr id="3" name="竖排文字占位符 2"/>
           <p:cNvSpPr>
             <a:spLocks noGrp="1"/>
           </p:cNvSpPr>
@@ -406,6 +360,7 @@
               <a:rPr kumimoji="1" lang="zh-CN" altLang="en-US"/>
               <a:t>单击此处编辑母版文本样式</a:t>
             </a:r>
+            <a:endParaRPr kumimoji="1" lang="zh-CN" altLang="en-US"/>
           </a:p>
           <a:p>
             <a:pPr lvl="1"/>
@@ -413,6 +368,7 @@
               <a:rPr kumimoji="1" lang="zh-CN" altLang="en-US"/>
               <a:t>二级</a:t>
             </a:r>
+            <a:endParaRPr kumimoji="1" lang="zh-CN" altLang="en-US"/>
           </a:p>
           <a:p>
             <a:pPr lvl="2"/>
@@ -420,6 +376,7 @@
               <a:rPr kumimoji="1" lang="zh-CN" altLang="en-US"/>
               <a:t>三级</a:t>
             </a:r>
+            <a:endParaRPr kumimoji="1" lang="zh-CN" altLang="en-US"/>
           </a:p>
           <a:p>
             <a:pPr lvl="3"/>
@@ -427,6 +384,7 @@
               <a:rPr kumimoji="1" lang="zh-CN" altLang="en-US"/>
               <a:t>四级</a:t>
             </a:r>
+            <a:endParaRPr kumimoji="1" lang="zh-CN" altLang="en-US"/>
           </a:p>
           <a:p>
             <a:pPr lvl="4"/>
@@ -434,18 +392,13 @@
               <a:rPr kumimoji="1" lang="zh-CN" altLang="en-US"/>
               <a:t>五级</a:t>
             </a:r>
-          </a:p>
-        </p:txBody>
-      </p:sp>
-      <p:sp>
-        <p:nvSpPr>
-          <p:cNvPr id="4" name="日期占位符 3">
-            <a:extLst>
-              <a:ext uri="{FF2B5EF4-FFF2-40B4-BE49-F238E27FC236}">
-                <a16:creationId xmlns:a16="http://schemas.microsoft.com/office/drawing/2014/main" id="{908D8043-8E8C-5A63-1F0B-DBFB1E26187D}"/>
-              </a:ext>
-            </a:extLst>
-          </p:cNvPr>
+            <a:endParaRPr kumimoji="1" lang="zh-CN" altLang="en-US"/>
+          </a:p>
+        </p:txBody>
+      </p:sp>
+      <p:sp>
+        <p:nvSpPr>
+          <p:cNvPr id="4" name="日期占位符 3"/>
           <p:cNvSpPr>
             <a:spLocks noGrp="1"/>
           </p:cNvSpPr>
@@ -460,7 +413,6 @@
           <a:p>
             <a:fld id="{37475CA1-6F9A-C543-9726-5DEBB049FFBF}" type="datetimeFigureOut">
               <a:rPr kumimoji="1" lang="zh-CN" altLang="en-US" smtClean="0"/>
-              <a:t>2026/5/21</a:t>
             </a:fld>
             <a:endParaRPr kumimoji="1" lang="zh-CN" altLang="en-US"/>
           </a:p>
@@ -468,13 +420,7 @@
       </p:sp>
       <p:sp>
         <p:nvSpPr>
-          <p:cNvPr id="5" name="页脚占位符 4">
-            <a:extLst>
-              <a:ext uri="{FF2B5EF4-FFF2-40B4-BE49-F238E27FC236}">
-                <a16:creationId xmlns:a16="http://schemas.microsoft.com/office/drawing/2014/main" id="{D0164E11-1539-FCE3-1C6A-1261BA0C55EE}"/>
-              </a:ext>
-            </a:extLst>
-          </p:cNvPr>
+          <p:cNvPr id="5" name="页脚占位符 4"/>
           <p:cNvSpPr>
             <a:spLocks noGrp="1"/>
           </p:cNvSpPr>
@@ -493,13 +439,7 @@
       </p:sp>
       <p:sp>
         <p:nvSpPr>
-          <p:cNvPr id="6" name="灯片编号占位符 5">
-            <a:extLst>
-              <a:ext uri="{FF2B5EF4-FFF2-40B4-BE49-F238E27FC236}">
-                <a16:creationId xmlns:a16="http://schemas.microsoft.com/office/drawing/2014/main" id="{D90296EC-7EC6-22A7-5186-D106E3810AF2}"/>
-              </a:ext>
-            </a:extLst>
-          </p:cNvPr>
+          <p:cNvPr id="6" name="灯片编号占位符 5"/>
           <p:cNvSpPr>
             <a:spLocks noGrp="1"/>
           </p:cNvSpPr>
@@ -514,18 +454,12 @@
           <a:p>
             <a:fld id="{6658316B-B7F2-F042-B6C0-2231261321F3}" type="slidenum">
               <a:rPr kumimoji="1" lang="zh-CN" altLang="en-US" smtClean="0"/>
-              <a:t>‹#›</a:t>
             </a:fld>
             <a:endParaRPr kumimoji="1" lang="zh-CN" altLang="en-US"/>
           </a:p>
         </p:txBody>
       </p:sp>
     </p:spTree>
-    <p:extLst>
-      <p:ext uri="{BB962C8B-B14F-4D97-AF65-F5344CB8AC3E}">
-        <p14:creationId xmlns:p14="http://schemas.microsoft.com/office/powerpoint/2010/main" val="4130875137"/>
-      </p:ext>
-    </p:extLst>
   </p:cSld>
   <p:clrMapOvr>
     <a:masterClrMapping/>
@@ -552,13 +486,7 @@
       </p:grpSpPr>
       <p:sp>
         <p:nvSpPr>
-          <p:cNvPr id="2" name="竖排标题 1">
-            <a:extLst>
-              <a:ext uri="{FF2B5EF4-FFF2-40B4-BE49-F238E27FC236}">
-                <a16:creationId xmlns:a16="http://schemas.microsoft.com/office/drawing/2014/main" id="{BEFFE0A0-640B-9BE5-4517-22E989C19F46}"/>
-              </a:ext>
-            </a:extLst>
-          </p:cNvPr>
+          <p:cNvPr id="2" name="竖排标题 1"/>
           <p:cNvSpPr>
             <a:spLocks noGrp="1"/>
           </p:cNvSpPr>
@@ -580,18 +508,13 @@
               <a:rPr kumimoji="1" lang="zh-CN" altLang="en-US"/>
               <a:t>单击此处编辑母版标题样式</a:t>
             </a:r>
-          </a:p>
-        </p:txBody>
-      </p:sp>
-      <p:sp>
-        <p:nvSpPr>
-          <p:cNvPr id="3" name="竖排文字占位符 2">
-            <a:extLst>
-              <a:ext uri="{FF2B5EF4-FFF2-40B4-BE49-F238E27FC236}">
-                <a16:creationId xmlns:a16="http://schemas.microsoft.com/office/drawing/2014/main" id="{D582A891-A12D-A316-5FF9-3CA403AC7109}"/>
-              </a:ext>
-            </a:extLst>
-          </p:cNvPr>
+            <a:endParaRPr kumimoji="1" lang="zh-CN" altLang="en-US"/>
+          </a:p>
+        </p:txBody>
+      </p:sp>
+      <p:sp>
+        <p:nvSpPr>
+          <p:cNvPr id="3" name="竖排文字占位符 2"/>
           <p:cNvSpPr>
             <a:spLocks noGrp="1"/>
           </p:cNvSpPr>
@@ -614,6 +537,7 @@
               <a:rPr kumimoji="1" lang="zh-CN" altLang="en-US"/>
               <a:t>单击此处编辑母版文本样式</a:t>
             </a:r>
+            <a:endParaRPr kumimoji="1" lang="zh-CN" altLang="en-US"/>
           </a:p>
           <a:p>
             <a:pPr lvl="1"/>
@@ -621,6 +545,7 @@
               <a:rPr kumimoji="1" lang="zh-CN" altLang="en-US"/>
               <a:t>二级</a:t>
             </a:r>
+            <a:endParaRPr kumimoji="1" lang="zh-CN" altLang="en-US"/>
           </a:p>
           <a:p>
             <a:pPr lvl="2"/>
@@ -628,6 +553,7 @@
               <a:rPr kumimoji="1" lang="zh-CN" altLang="en-US"/>
               <a:t>三级</a:t>
             </a:r>
+            <a:endParaRPr kumimoji="1" lang="zh-CN" altLang="en-US"/>
           </a:p>
           <a:p>
             <a:pPr lvl="3"/>
@@ -635,6 +561,7 @@
               <a:rPr kumimoji="1" lang="zh-CN" altLang="en-US"/>
               <a:t>四级</a:t>
             </a:r>
+            <a:endParaRPr kumimoji="1" lang="zh-CN" altLang="en-US"/>
           </a:p>
           <a:p>
             <a:pPr lvl="4"/>
@@ -642,18 +569,13 @@
               <a:rPr kumimoji="1" lang="zh-CN" altLang="en-US"/>
               <a:t>五级</a:t>
             </a:r>
-          </a:p>
-        </p:txBody>
-      </p:sp>
-      <p:sp>
-        <p:nvSpPr>
-          <p:cNvPr id="4" name="日期占位符 3">
-            <a:extLst>
-              <a:ext uri="{FF2B5EF4-FFF2-40B4-BE49-F238E27FC236}">
-                <a16:creationId xmlns:a16="http://schemas.microsoft.com/office/drawing/2014/main" id="{09814A98-9BC4-85AC-3A7F-A73A8ADA2CB8}"/>
-              </a:ext>
-            </a:extLst>
-          </p:cNvPr>
+            <a:endParaRPr kumimoji="1" lang="zh-CN" altLang="en-US"/>
+          </a:p>
+        </p:txBody>
+      </p:sp>
+      <p:sp>
+        <p:nvSpPr>
+          <p:cNvPr id="4" name="日期占位符 3"/>
           <p:cNvSpPr>
             <a:spLocks noGrp="1"/>
           </p:cNvSpPr>
@@ -668,7 +590,6 @@
           <a:p>
             <a:fld id="{37475CA1-6F9A-C543-9726-5DEBB049FFBF}" type="datetimeFigureOut">
               <a:rPr kumimoji="1" lang="zh-CN" altLang="en-US" smtClean="0"/>
-              <a:t>2026/5/21</a:t>
             </a:fld>
             <a:endParaRPr kumimoji="1" lang="zh-CN" altLang="en-US"/>
           </a:p>
@@ -676,13 +597,7 @@
       </p:sp>
       <p:sp>
         <p:nvSpPr>
-          <p:cNvPr id="5" name="页脚占位符 4">
-            <a:extLst>
-              <a:ext uri="{FF2B5EF4-FFF2-40B4-BE49-F238E27FC236}">
-                <a16:creationId xmlns:a16="http://schemas.microsoft.com/office/drawing/2014/main" id="{7C86343B-A5CF-78E0-62E1-525656847EFC}"/>
-              </a:ext>
-            </a:extLst>
-          </p:cNvPr>
+          <p:cNvPr id="5" name="页脚占位符 4"/>
           <p:cNvSpPr>
             <a:spLocks noGrp="1"/>
           </p:cNvSpPr>
@@ -701,13 +616,7 @@
       </p:sp>
       <p:sp>
         <p:nvSpPr>
-          <p:cNvPr id="6" name="灯片编号占位符 5">
-            <a:extLst>
-              <a:ext uri="{FF2B5EF4-FFF2-40B4-BE49-F238E27FC236}">
-                <a16:creationId xmlns:a16="http://schemas.microsoft.com/office/drawing/2014/main" id="{C2B2CB23-84D3-5E39-FCD6-65972162509B}"/>
-              </a:ext>
-            </a:extLst>
-          </p:cNvPr>
+          <p:cNvPr id="6" name="灯片编号占位符 5"/>
           <p:cNvSpPr>
             <a:spLocks noGrp="1"/>
           </p:cNvSpPr>
@@ -722,18 +631,12 @@
           <a:p>
             <a:fld id="{6658316B-B7F2-F042-B6C0-2231261321F3}" type="slidenum">
               <a:rPr kumimoji="1" lang="zh-CN" altLang="en-US" smtClean="0"/>
-              <a:t>‹#›</a:t>
             </a:fld>
             <a:endParaRPr kumimoji="1" lang="zh-CN" altLang="en-US"/>
           </a:p>
         </p:txBody>
       </p:sp>
     </p:spTree>
-    <p:extLst>
-      <p:ext uri="{BB962C8B-B14F-4D97-AF65-F5344CB8AC3E}">
-        <p14:creationId xmlns:p14="http://schemas.microsoft.com/office/powerpoint/2010/main" val="3850497097"/>
-      </p:ext>
-    </p:extLst>
   </p:cSld>
   <p:clrMapOvr>
     <a:masterClrMapping/>
@@ -760,13 +663,7 @@
       </p:grpSpPr>
       <p:sp>
         <p:nvSpPr>
-          <p:cNvPr id="2" name="标题 1">
-            <a:extLst>
-              <a:ext uri="{FF2B5EF4-FFF2-40B4-BE49-F238E27FC236}">
-                <a16:creationId xmlns:a16="http://schemas.microsoft.com/office/drawing/2014/main" id="{F96740C3-AB16-F1A5-4190-EDD9C9836357}"/>
-              </a:ext>
-            </a:extLst>
-          </p:cNvPr>
+          <p:cNvPr id="2" name="标题 1"/>
           <p:cNvSpPr>
             <a:spLocks noGrp="1"/>
           </p:cNvSpPr>
@@ -783,18 +680,13 @@
               <a:rPr kumimoji="1" lang="zh-CN" altLang="en-US"/>
               <a:t>单击此处编辑母版标题样式</a:t>
             </a:r>
-          </a:p>
-        </p:txBody>
-      </p:sp>
-      <p:sp>
-        <p:nvSpPr>
-          <p:cNvPr id="3" name="内容占位符 2">
-            <a:extLst>
-              <a:ext uri="{FF2B5EF4-FFF2-40B4-BE49-F238E27FC236}">
-                <a16:creationId xmlns:a16="http://schemas.microsoft.com/office/drawing/2014/main" id="{C85EB034-DA11-A253-7AF7-79D882BD8897}"/>
-              </a:ext>
-            </a:extLst>
-          </p:cNvPr>
+            <a:endParaRPr kumimoji="1" lang="zh-CN" altLang="en-US"/>
+          </a:p>
+        </p:txBody>
+      </p:sp>
+      <p:sp>
+        <p:nvSpPr>
+          <p:cNvPr id="3" name="内容占位符 2"/>
           <p:cNvSpPr>
             <a:spLocks noGrp="1"/>
           </p:cNvSpPr>
@@ -812,6 +704,7 @@
               <a:rPr kumimoji="1" lang="zh-CN" altLang="en-US"/>
               <a:t>单击此处编辑母版文本样式</a:t>
             </a:r>
+            <a:endParaRPr kumimoji="1" lang="zh-CN" altLang="en-US"/>
           </a:p>
           <a:p>
             <a:pPr lvl="1"/>
@@ -819,6 +712,7 @@
               <a:rPr kumimoji="1" lang="zh-CN" altLang="en-US"/>
               <a:t>二级</a:t>
             </a:r>
+            <a:endParaRPr kumimoji="1" lang="zh-CN" altLang="en-US"/>
           </a:p>
           <a:p>
             <a:pPr lvl="2"/>
@@ -826,6 +720,7 @@
               <a:rPr kumimoji="1" lang="zh-CN" altLang="en-US"/>
               <a:t>三级</a:t>
             </a:r>
+            <a:endParaRPr kumimoji="1" lang="zh-CN" altLang="en-US"/>
           </a:p>
           <a:p>
             <a:pPr lvl="3"/>
@@ -833,6 +728,7 @@
               <a:rPr kumimoji="1" lang="zh-CN" altLang="en-US"/>
               <a:t>四级</a:t>
             </a:r>
+            <a:endParaRPr kumimoji="1" lang="zh-CN" altLang="en-US"/>
           </a:p>
           <a:p>
             <a:pPr lvl="4"/>
@@ -840,18 +736,13 @@
               <a:rPr kumimoji="1" lang="zh-CN" altLang="en-US"/>
               <a:t>五级</a:t>
             </a:r>
-          </a:p>
-        </p:txBody>
-      </p:sp>
-      <p:sp>
-        <p:nvSpPr>
-          <p:cNvPr id="4" name="日期占位符 3">
-            <a:extLst>
-              <a:ext uri="{FF2B5EF4-FFF2-40B4-BE49-F238E27FC236}">
-                <a16:creationId xmlns:a16="http://schemas.microsoft.com/office/drawing/2014/main" id="{1AFC8A65-488E-7F7B-C63B-1F30808A9AB4}"/>
-              </a:ext>
-            </a:extLst>
-          </p:cNvPr>
+            <a:endParaRPr kumimoji="1" lang="zh-CN" altLang="en-US"/>
+          </a:p>
+        </p:txBody>
+      </p:sp>
+      <p:sp>
+        <p:nvSpPr>
+          <p:cNvPr id="4" name="日期占位符 3"/>
           <p:cNvSpPr>
             <a:spLocks noGrp="1"/>
           </p:cNvSpPr>
@@ -866,7 +757,6 @@
           <a:p>
             <a:fld id="{37475CA1-6F9A-C543-9726-5DEBB049FFBF}" type="datetimeFigureOut">
               <a:rPr kumimoji="1" lang="zh-CN" altLang="en-US" smtClean="0"/>
-              <a:t>2026/5/21</a:t>
             </a:fld>
             <a:endParaRPr kumimoji="1" lang="zh-CN" altLang="en-US"/>
           </a:p>
@@ -874,13 +764,7 @@
       </p:sp>
       <p:sp>
         <p:nvSpPr>
-          <p:cNvPr id="5" name="页脚占位符 4">
-            <a:extLst>
-              <a:ext uri="{FF2B5EF4-FFF2-40B4-BE49-F238E27FC236}">
-                <a16:creationId xmlns:a16="http://schemas.microsoft.com/office/drawing/2014/main" id="{87B2D828-3A70-C8BA-2AC5-CF8CF93472AF}"/>
-              </a:ext>
-            </a:extLst>
-          </p:cNvPr>
+          <p:cNvPr id="5" name="页脚占位符 4"/>
           <p:cNvSpPr>
             <a:spLocks noGrp="1"/>
           </p:cNvSpPr>
@@ -899,13 +783,7 @@
       </p:sp>
       <p:sp>
         <p:nvSpPr>
-          <p:cNvPr id="6" name="灯片编号占位符 5">
-            <a:extLst>
-              <a:ext uri="{FF2B5EF4-FFF2-40B4-BE49-F238E27FC236}">
-                <a16:creationId xmlns:a16="http://schemas.microsoft.com/office/drawing/2014/main" id="{36704E3E-DB41-CE94-0655-2CB059C32B86}"/>
-              </a:ext>
-            </a:extLst>
-          </p:cNvPr>
+          <p:cNvPr id="6" name="灯片编号占位符 5"/>
           <p:cNvSpPr>
             <a:spLocks noGrp="1"/>
           </p:cNvSpPr>
@@ -920,18 +798,12 @@
           <a:p>
             <a:fld id="{6658316B-B7F2-F042-B6C0-2231261321F3}" type="slidenum">
               <a:rPr kumimoji="1" lang="zh-CN" altLang="en-US" smtClean="0"/>
-              <a:t>‹#›</a:t>
             </a:fld>
             <a:endParaRPr kumimoji="1" lang="zh-CN" altLang="en-US"/>
           </a:p>
         </p:txBody>
       </p:sp>
     </p:spTree>
-    <p:extLst>
-      <p:ext uri="{BB962C8B-B14F-4D97-AF65-F5344CB8AC3E}">
-        <p14:creationId xmlns:p14="http://schemas.microsoft.com/office/powerpoint/2010/main" val="2730399259"/>
-      </p:ext>
-    </p:extLst>
   </p:cSld>
   <p:clrMapOvr>
     <a:masterClrMapping/>
@@ -958,13 +830,7 @@
       </p:grpSpPr>
       <p:sp>
         <p:nvSpPr>
-          <p:cNvPr id="2" name="标题 1">
-            <a:extLst>
-              <a:ext uri="{FF2B5EF4-FFF2-40B4-BE49-F238E27FC236}">
-                <a16:creationId xmlns:a16="http://schemas.microsoft.com/office/drawing/2014/main" id="{DA8F003C-9022-F233-1E46-ED18690E91DC}"/>
-              </a:ext>
-            </a:extLst>
-          </p:cNvPr>
+          <p:cNvPr id="2" name="标题 1"/>
           <p:cNvSpPr>
             <a:spLocks noGrp="1"/>
           </p:cNvSpPr>
@@ -990,18 +856,13 @@
               <a:rPr kumimoji="1" lang="zh-CN" altLang="en-US"/>
               <a:t>单击此处编辑母版标题样式</a:t>
             </a:r>
-          </a:p>
-        </p:txBody>
-      </p:sp>
-      <p:sp>
-        <p:nvSpPr>
-          <p:cNvPr id="3" name="文本占位符 2">
-            <a:extLst>
-              <a:ext uri="{FF2B5EF4-FFF2-40B4-BE49-F238E27FC236}">
-                <a16:creationId xmlns:a16="http://schemas.microsoft.com/office/drawing/2014/main" id="{5275242B-02E3-D2A0-740A-A915EA7F1FAD}"/>
-              </a:ext>
-            </a:extLst>
-          </p:cNvPr>
+            <a:endParaRPr kumimoji="1" lang="zh-CN" altLang="en-US"/>
+          </a:p>
+        </p:txBody>
+      </p:sp>
+      <p:sp>
+        <p:nvSpPr>
+          <p:cNvPr id="3" name="文本占位符 2"/>
           <p:cNvSpPr>
             <a:spLocks noGrp="1"/>
           </p:cNvSpPr>
@@ -1115,18 +976,13 @@
               <a:rPr kumimoji="1" lang="zh-CN" altLang="en-US"/>
               <a:t>单击此处编辑母版文本样式</a:t>
             </a:r>
-          </a:p>
-        </p:txBody>
-      </p:sp>
-      <p:sp>
-        <p:nvSpPr>
-          <p:cNvPr id="4" name="日期占位符 3">
-            <a:extLst>
-              <a:ext uri="{FF2B5EF4-FFF2-40B4-BE49-F238E27FC236}">
-                <a16:creationId xmlns:a16="http://schemas.microsoft.com/office/drawing/2014/main" id="{857721DC-4EDD-26C2-C209-EBD2105888B2}"/>
-              </a:ext>
-            </a:extLst>
-          </p:cNvPr>
+            <a:endParaRPr kumimoji="1" lang="zh-CN" altLang="en-US"/>
+          </a:p>
+        </p:txBody>
+      </p:sp>
+      <p:sp>
+        <p:nvSpPr>
+          <p:cNvPr id="4" name="日期占位符 3"/>
           <p:cNvSpPr>
             <a:spLocks noGrp="1"/>
           </p:cNvSpPr>
@@ -1141,7 +997,6 @@
           <a:p>
             <a:fld id="{37475CA1-6F9A-C543-9726-5DEBB049FFBF}" type="datetimeFigureOut">
               <a:rPr kumimoji="1" lang="zh-CN" altLang="en-US" smtClean="0"/>
-              <a:t>2026/5/21</a:t>
             </a:fld>
             <a:endParaRPr kumimoji="1" lang="zh-CN" altLang="en-US"/>
           </a:p>
@@ -1149,13 +1004,7 @@
       </p:sp>
       <p:sp>
         <p:nvSpPr>
-          <p:cNvPr id="5" name="页脚占位符 4">
-            <a:extLst>
-              <a:ext uri="{FF2B5EF4-FFF2-40B4-BE49-F238E27FC236}">
-                <a16:creationId xmlns:a16="http://schemas.microsoft.com/office/drawing/2014/main" id="{CC503FDD-5DA2-7346-F21E-9846F23571CC}"/>
-              </a:ext>
-            </a:extLst>
-          </p:cNvPr>
+          <p:cNvPr id="5" name="页脚占位符 4"/>
           <p:cNvSpPr>
             <a:spLocks noGrp="1"/>
           </p:cNvSpPr>
@@ -1174,13 +1023,7 @@
       </p:sp>
       <p:sp>
         <p:nvSpPr>
-          <p:cNvPr id="6" name="灯片编号占位符 5">
-            <a:extLst>
-              <a:ext uri="{FF2B5EF4-FFF2-40B4-BE49-F238E27FC236}">
-                <a16:creationId xmlns:a16="http://schemas.microsoft.com/office/drawing/2014/main" id="{C65BE022-0211-3027-692B-4A05381F4681}"/>
-              </a:ext>
-            </a:extLst>
-          </p:cNvPr>
+          <p:cNvPr id="6" name="灯片编号占位符 5"/>
           <p:cNvSpPr>
             <a:spLocks noGrp="1"/>
           </p:cNvSpPr>
@@ -1195,18 +1038,12 @@
           <a:p>
             <a:fld id="{6658316B-B7F2-F042-B6C0-2231261321F3}" type="slidenum">
               <a:rPr kumimoji="1" lang="zh-CN" altLang="en-US" smtClean="0"/>
-              <a:t>‹#›</a:t>
             </a:fld>
             <a:endParaRPr kumimoji="1" lang="zh-CN" altLang="en-US"/>
           </a:p>
         </p:txBody>
       </p:sp>
     </p:spTree>
-    <p:extLst>
-      <p:ext uri="{BB962C8B-B14F-4D97-AF65-F5344CB8AC3E}">
-        <p14:creationId xmlns:p14="http://schemas.microsoft.com/office/powerpoint/2010/main" val="320612827"/>
-      </p:ext>
-    </p:extLst>
   </p:cSld>
   <p:clrMapOvr>
     <a:masterClrMapping/>
@@ -1233,13 +1070,7 @@
       </p:grpSpPr>
       <p:sp>
         <p:nvSpPr>
-          <p:cNvPr id="2" name="标题 1">
-            <a:extLst>
-              <a:ext uri="{FF2B5EF4-FFF2-40B4-BE49-F238E27FC236}">
-                <a16:creationId xmlns:a16="http://schemas.microsoft.com/office/drawing/2014/main" id="{6EF1F6CC-A38D-2C71-EDCF-7370DD8493A5}"/>
-              </a:ext>
-            </a:extLst>
-          </p:cNvPr>
+          <p:cNvPr id="2" name="标题 1"/>
           <p:cNvSpPr>
             <a:spLocks noGrp="1"/>
           </p:cNvSpPr>
@@ -1256,18 +1087,13 @@
               <a:rPr kumimoji="1" lang="zh-CN" altLang="en-US"/>
               <a:t>单击此处编辑母版标题样式</a:t>
             </a:r>
-          </a:p>
-        </p:txBody>
-      </p:sp>
-      <p:sp>
-        <p:nvSpPr>
-          <p:cNvPr id="3" name="内容占位符 2">
-            <a:extLst>
-              <a:ext uri="{FF2B5EF4-FFF2-40B4-BE49-F238E27FC236}">
-                <a16:creationId xmlns:a16="http://schemas.microsoft.com/office/drawing/2014/main" id="{09D1FFA7-0D59-F94D-4818-2497CFB26B39}"/>
-              </a:ext>
-            </a:extLst>
-          </p:cNvPr>
+            <a:endParaRPr kumimoji="1" lang="zh-CN" altLang="en-US"/>
+          </a:p>
+        </p:txBody>
+      </p:sp>
+      <p:sp>
+        <p:nvSpPr>
+          <p:cNvPr id="3" name="内容占位符 2"/>
           <p:cNvSpPr>
             <a:spLocks noGrp="1"/>
           </p:cNvSpPr>
@@ -1290,6 +1116,7 @@
               <a:rPr kumimoji="1" lang="zh-CN" altLang="en-US"/>
               <a:t>单击此处编辑母版文本样式</a:t>
             </a:r>
+            <a:endParaRPr kumimoji="1" lang="zh-CN" altLang="en-US"/>
           </a:p>
           <a:p>
             <a:pPr lvl="1"/>
@@ -1297,6 +1124,7 @@
               <a:rPr kumimoji="1" lang="zh-CN" altLang="en-US"/>
               <a:t>二级</a:t>
             </a:r>
+            <a:endParaRPr kumimoji="1" lang="zh-CN" altLang="en-US"/>
           </a:p>
           <a:p>
             <a:pPr lvl="2"/>
@@ -1304,6 +1132,7 @@
               <a:rPr kumimoji="1" lang="zh-CN" altLang="en-US"/>
               <a:t>三级</a:t>
             </a:r>
+            <a:endParaRPr kumimoji="1" lang="zh-CN" altLang="en-US"/>
           </a:p>
           <a:p>
             <a:pPr lvl="3"/>
@@ -1311,6 +1140,7 @@
               <a:rPr kumimoji="1" lang="zh-CN" altLang="en-US"/>
               <a:t>四级</a:t>
             </a:r>
+            <a:endParaRPr kumimoji="1" lang="zh-CN" altLang="en-US"/>
           </a:p>
           <a:p>
             <a:pPr lvl="4"/>
@@ -1318,18 +1148,13 @@
               <a:rPr kumimoji="1" lang="zh-CN" altLang="en-US"/>
               <a:t>五级</a:t>
             </a:r>
-          </a:p>
-        </p:txBody>
-      </p:sp>
-      <p:sp>
-        <p:nvSpPr>
-          <p:cNvPr id="4" name="内容占位符 3">
-            <a:extLst>
-              <a:ext uri="{FF2B5EF4-FFF2-40B4-BE49-F238E27FC236}">
-                <a16:creationId xmlns:a16="http://schemas.microsoft.com/office/drawing/2014/main" id="{34FAE907-2D55-8506-2093-87170B6F4D02}"/>
-              </a:ext>
-            </a:extLst>
-          </p:cNvPr>
+            <a:endParaRPr kumimoji="1" lang="zh-CN" altLang="en-US"/>
+          </a:p>
+        </p:txBody>
+      </p:sp>
+      <p:sp>
+        <p:nvSpPr>
+          <p:cNvPr id="4" name="内容占位符 3"/>
           <p:cNvSpPr>
             <a:spLocks noGrp="1"/>
           </p:cNvSpPr>
@@ -1352,6 +1177,7 @@
               <a:rPr kumimoji="1" lang="zh-CN" altLang="en-US"/>
               <a:t>单击此处编辑母版文本样式</a:t>
             </a:r>
+            <a:endParaRPr kumimoji="1" lang="zh-CN" altLang="en-US"/>
           </a:p>
           <a:p>
             <a:pPr lvl="1"/>
@@ -1359,6 +1185,7 @@
               <a:rPr kumimoji="1" lang="zh-CN" altLang="en-US"/>
               <a:t>二级</a:t>
             </a:r>
+            <a:endParaRPr kumimoji="1" lang="zh-CN" altLang="en-US"/>
           </a:p>
           <a:p>
             <a:pPr lvl="2"/>
@@ -1366,6 +1193,7 @@
               <a:rPr kumimoji="1" lang="zh-CN" altLang="en-US"/>
               <a:t>三级</a:t>
             </a:r>
+            <a:endParaRPr kumimoji="1" lang="zh-CN" altLang="en-US"/>
           </a:p>
           <a:p>
             <a:pPr lvl="3"/>
@@ -1373,6 +1201,7 @@
               <a:rPr kumimoji="1" lang="zh-CN" altLang="en-US"/>
               <a:t>四级</a:t>
             </a:r>
+            <a:endParaRPr kumimoji="1" lang="zh-CN" altLang="en-US"/>
           </a:p>
           <a:p>
             <a:pPr lvl="4"/>
@@ -1380,18 +1209,13 @@
               <a:rPr kumimoji="1" lang="zh-CN" altLang="en-US"/>
               <a:t>五级</a:t>
             </a:r>
-          </a:p>
-        </p:txBody>
-      </p:sp>
-      <p:sp>
-        <p:nvSpPr>
-          <p:cNvPr id="5" name="日期占位符 4">
-            <a:extLst>
-              <a:ext uri="{FF2B5EF4-FFF2-40B4-BE49-F238E27FC236}">
-                <a16:creationId xmlns:a16="http://schemas.microsoft.com/office/drawing/2014/main" id="{E559DF83-C694-2D39-38A2-B09B4BE67FC3}"/>
-              </a:ext>
-            </a:extLst>
-          </p:cNvPr>
+            <a:endParaRPr kumimoji="1" lang="zh-CN" altLang="en-US"/>
+          </a:p>
+        </p:txBody>
+      </p:sp>
+      <p:sp>
+        <p:nvSpPr>
+          <p:cNvPr id="5" name="日期占位符 4"/>
           <p:cNvSpPr>
             <a:spLocks noGrp="1"/>
           </p:cNvSpPr>
@@ -1406,7 +1230,6 @@
           <a:p>
             <a:fld id="{37475CA1-6F9A-C543-9726-5DEBB049FFBF}" type="datetimeFigureOut">
               <a:rPr kumimoji="1" lang="zh-CN" altLang="en-US" smtClean="0"/>
-              <a:t>2026/5/21</a:t>
             </a:fld>
             <a:endParaRPr kumimoji="1" lang="zh-CN" altLang="en-US"/>
           </a:p>
@@ -1414,13 +1237,7 @@
       </p:sp>
       <p:sp>
         <p:nvSpPr>
-          <p:cNvPr id="6" name="页脚占位符 5">
-            <a:extLst>
-              <a:ext uri="{FF2B5EF4-FFF2-40B4-BE49-F238E27FC236}">
-                <a16:creationId xmlns:a16="http://schemas.microsoft.com/office/drawing/2014/main" id="{7A22BB86-3B6E-E4E3-34C0-5B7FEAFFBD94}"/>
-              </a:ext>
-            </a:extLst>
-          </p:cNvPr>
+          <p:cNvPr id="6" name="页脚占位符 5"/>
           <p:cNvSpPr>
             <a:spLocks noGrp="1"/>
           </p:cNvSpPr>
@@ -1439,13 +1256,7 @@
       </p:sp>
       <p:sp>
         <p:nvSpPr>
-          <p:cNvPr id="7" name="灯片编号占位符 6">
-            <a:extLst>
-              <a:ext uri="{FF2B5EF4-FFF2-40B4-BE49-F238E27FC236}">
-                <a16:creationId xmlns:a16="http://schemas.microsoft.com/office/drawing/2014/main" id="{4AD47DFD-00C3-3168-34DA-DF6CCD0988D8}"/>
-              </a:ext>
-            </a:extLst>
-          </p:cNvPr>
+          <p:cNvPr id="7" name="灯片编号占位符 6"/>
           <p:cNvSpPr>
             <a:spLocks noGrp="1"/>
           </p:cNvSpPr>
@@ -1460,18 +1271,12 @@
           <a:p>
             <a:fld id="{6658316B-B7F2-F042-B6C0-2231261321F3}" type="slidenum">
               <a:rPr kumimoji="1" lang="zh-CN" altLang="en-US" smtClean="0"/>
-              <a:t>‹#›</a:t>
             </a:fld>
             <a:endParaRPr kumimoji="1" lang="zh-CN" altLang="en-US"/>
           </a:p>
         </p:txBody>
       </p:sp>
     </p:spTree>
-    <p:extLst>
-      <p:ext uri="{BB962C8B-B14F-4D97-AF65-F5344CB8AC3E}">
-        <p14:creationId xmlns:p14="http://schemas.microsoft.com/office/powerpoint/2010/main" val="3770261240"/>
-      </p:ext>
-    </p:extLst>
   </p:cSld>
   <p:clrMapOvr>
     <a:masterClrMapping/>
@@ -1498,13 +1303,7 @@
       </p:grpSpPr>
       <p:sp>
         <p:nvSpPr>
-          <p:cNvPr id="2" name="标题 1">
-            <a:extLst>
-              <a:ext uri="{FF2B5EF4-FFF2-40B4-BE49-F238E27FC236}">
-                <a16:creationId xmlns:a16="http://schemas.microsoft.com/office/drawing/2014/main" id="{C3D8BCB6-37A5-8580-81AE-B39316D6D3E2}"/>
-              </a:ext>
-            </a:extLst>
-          </p:cNvPr>
+          <p:cNvPr id="2" name="标题 1"/>
           <p:cNvSpPr>
             <a:spLocks noGrp="1"/>
           </p:cNvSpPr>
@@ -1526,18 +1325,13 @@
               <a:rPr kumimoji="1" lang="zh-CN" altLang="en-US"/>
               <a:t>单击此处编辑母版标题样式</a:t>
             </a:r>
-          </a:p>
-        </p:txBody>
-      </p:sp>
-      <p:sp>
-        <p:nvSpPr>
-          <p:cNvPr id="3" name="文本占位符 2">
-            <a:extLst>
-              <a:ext uri="{FF2B5EF4-FFF2-40B4-BE49-F238E27FC236}">
-                <a16:creationId xmlns:a16="http://schemas.microsoft.com/office/drawing/2014/main" id="{4BF38558-6203-1B85-9369-1DCE4716080C}"/>
-              </a:ext>
-            </a:extLst>
-          </p:cNvPr>
+            <a:endParaRPr kumimoji="1" lang="zh-CN" altLang="en-US"/>
+          </a:p>
+        </p:txBody>
+      </p:sp>
+      <p:sp>
+        <p:nvSpPr>
+          <p:cNvPr id="3" name="文本占位符 2"/>
           <p:cNvSpPr>
             <a:spLocks noGrp="1"/>
           </p:cNvSpPr>
@@ -1597,18 +1391,13 @@
               <a:rPr kumimoji="1" lang="zh-CN" altLang="en-US"/>
               <a:t>单击此处编辑母版文本样式</a:t>
             </a:r>
-          </a:p>
-        </p:txBody>
-      </p:sp>
-      <p:sp>
-        <p:nvSpPr>
-          <p:cNvPr id="4" name="内容占位符 3">
-            <a:extLst>
-              <a:ext uri="{FF2B5EF4-FFF2-40B4-BE49-F238E27FC236}">
-                <a16:creationId xmlns:a16="http://schemas.microsoft.com/office/drawing/2014/main" id="{04331A1C-02C0-84A6-9720-B76EC33BA30E}"/>
-              </a:ext>
-            </a:extLst>
-          </p:cNvPr>
+            <a:endParaRPr kumimoji="1" lang="zh-CN" altLang="en-US"/>
+          </a:p>
+        </p:txBody>
+      </p:sp>
+      <p:sp>
+        <p:nvSpPr>
+          <p:cNvPr id="4" name="内容占位符 3"/>
           <p:cNvSpPr>
             <a:spLocks noGrp="1"/>
           </p:cNvSpPr>
@@ -1631,6 +1420,7 @@
               <a:rPr kumimoji="1" lang="zh-CN" altLang="en-US"/>
               <a:t>单击此处编辑母版文本样式</a:t>
             </a:r>
+            <a:endParaRPr kumimoji="1" lang="zh-CN" altLang="en-US"/>
           </a:p>
           <a:p>
             <a:pPr lvl="1"/>
@@ -1638,6 +1428,7 @@
               <a:rPr kumimoji="1" lang="zh-CN" altLang="en-US"/>
               <a:t>二级</a:t>
             </a:r>
+            <a:endParaRPr kumimoji="1" lang="zh-CN" altLang="en-US"/>
           </a:p>
           <a:p>
             <a:pPr lvl="2"/>
@@ -1645,6 +1436,7 @@
               <a:rPr kumimoji="1" lang="zh-CN" altLang="en-US"/>
               <a:t>三级</a:t>
             </a:r>
+            <a:endParaRPr kumimoji="1" lang="zh-CN" altLang="en-US"/>
           </a:p>
           <a:p>
             <a:pPr lvl="3"/>
@@ -1652,6 +1444,7 @@
               <a:rPr kumimoji="1" lang="zh-CN" altLang="en-US"/>
               <a:t>四级</a:t>
             </a:r>
+            <a:endParaRPr kumimoji="1" lang="zh-CN" altLang="en-US"/>
           </a:p>
           <a:p>
             <a:pPr lvl="4"/>
@@ -1659,18 +1452,13 @@
               <a:rPr kumimoji="1" lang="zh-CN" altLang="en-US"/>
               <a:t>五级</a:t>
             </a:r>
-          </a:p>
-        </p:txBody>
-      </p:sp>
-      <p:sp>
-        <p:nvSpPr>
-          <p:cNvPr id="5" name="文本占位符 4">
-            <a:extLst>
-              <a:ext uri="{FF2B5EF4-FFF2-40B4-BE49-F238E27FC236}">
-                <a16:creationId xmlns:a16="http://schemas.microsoft.com/office/drawing/2014/main" id="{57722486-0BA3-9B1B-C370-10B9C4001C10}"/>
-              </a:ext>
-            </a:extLst>
-          </p:cNvPr>
+            <a:endParaRPr kumimoji="1" lang="zh-CN" altLang="en-US"/>
+          </a:p>
+        </p:txBody>
+      </p:sp>
+      <p:sp>
+        <p:nvSpPr>
+          <p:cNvPr id="5" name="文本占位符 4"/>
           <p:cNvSpPr>
             <a:spLocks noGrp="1"/>
           </p:cNvSpPr>
@@ -1730,18 +1518,13 @@
               <a:rPr kumimoji="1" lang="zh-CN" altLang="en-US"/>
               <a:t>单击此处编辑母版文本样式</a:t>
             </a:r>
-          </a:p>
-        </p:txBody>
-      </p:sp>
-      <p:sp>
-        <p:nvSpPr>
-          <p:cNvPr id="6" name="内容占位符 5">
-            <a:extLst>
-              <a:ext uri="{FF2B5EF4-FFF2-40B4-BE49-F238E27FC236}">
-                <a16:creationId xmlns:a16="http://schemas.microsoft.com/office/drawing/2014/main" id="{F64F5DB3-7D0E-91E1-C8B9-93F4AAB729F8}"/>
-              </a:ext>
-            </a:extLst>
-          </p:cNvPr>
+            <a:endParaRPr kumimoji="1" lang="zh-CN" altLang="en-US"/>
+          </a:p>
+        </p:txBody>
+      </p:sp>
+      <p:sp>
+        <p:nvSpPr>
+          <p:cNvPr id="6" name="内容占位符 5"/>
           <p:cNvSpPr>
             <a:spLocks noGrp="1"/>
           </p:cNvSpPr>
@@ -1764,6 +1547,7 @@
               <a:rPr kumimoji="1" lang="zh-CN" altLang="en-US"/>
               <a:t>单击此处编辑母版文本样式</a:t>
             </a:r>
+            <a:endParaRPr kumimoji="1" lang="zh-CN" altLang="en-US"/>
           </a:p>
           <a:p>
             <a:pPr lvl="1"/>
@@ -1771,6 +1555,7 @@
               <a:rPr kumimoji="1" lang="zh-CN" altLang="en-US"/>
               <a:t>二级</a:t>
             </a:r>
+            <a:endParaRPr kumimoji="1" lang="zh-CN" altLang="en-US"/>
           </a:p>
           <a:p>
             <a:pPr lvl="2"/>
@@ -1778,6 +1563,7 @@
               <a:rPr kumimoji="1" lang="zh-CN" altLang="en-US"/>
               <a:t>三级</a:t>
             </a:r>
+            <a:endParaRPr kumimoji="1" lang="zh-CN" altLang="en-US"/>
           </a:p>
           <a:p>
             <a:pPr lvl="3"/>
@@ -1785,6 +1571,7 @@
               <a:rPr kumimoji="1" lang="zh-CN" altLang="en-US"/>
               <a:t>四级</a:t>
             </a:r>
+            <a:endParaRPr kumimoji="1" lang="zh-CN" altLang="en-US"/>
           </a:p>
           <a:p>
             <a:pPr lvl="4"/>
@@ -1792,18 +1579,13 @@
               <a:rPr kumimoji="1" lang="zh-CN" altLang="en-US"/>
               <a:t>五级</a:t>
             </a:r>
-          </a:p>
-        </p:txBody>
-      </p:sp>
-      <p:sp>
-        <p:nvSpPr>
-          <p:cNvPr id="7" name="日期占位符 6">
-            <a:extLst>
-              <a:ext uri="{FF2B5EF4-FFF2-40B4-BE49-F238E27FC236}">
-                <a16:creationId xmlns:a16="http://schemas.microsoft.com/office/drawing/2014/main" id="{B5C8A3DA-C02D-1EBE-3A05-439AA233875F}"/>
-              </a:ext>
-            </a:extLst>
-          </p:cNvPr>
+            <a:endParaRPr kumimoji="1" lang="zh-CN" altLang="en-US"/>
+          </a:p>
+        </p:txBody>
+      </p:sp>
+      <p:sp>
+        <p:nvSpPr>
+          <p:cNvPr id="7" name="日期占位符 6"/>
           <p:cNvSpPr>
             <a:spLocks noGrp="1"/>
           </p:cNvSpPr>
@@ -1818,7 +1600,6 @@
           <a:p>
             <a:fld id="{37475CA1-6F9A-C543-9726-5DEBB049FFBF}" type="datetimeFigureOut">
               <a:rPr kumimoji="1" lang="zh-CN" altLang="en-US" smtClean="0"/>
-              <a:t>2026/5/21</a:t>
             </a:fld>
             <a:endParaRPr kumimoji="1" lang="zh-CN" altLang="en-US"/>
           </a:p>
@@ -1826,13 +1607,7 @@
       </p:sp>
       <p:sp>
         <p:nvSpPr>
-          <p:cNvPr id="8" name="页脚占位符 7">
-            <a:extLst>
-              <a:ext uri="{FF2B5EF4-FFF2-40B4-BE49-F238E27FC236}">
-                <a16:creationId xmlns:a16="http://schemas.microsoft.com/office/drawing/2014/main" id="{5528E972-32D7-BC8C-BC5A-ED6E95B46E07}"/>
-              </a:ext>
-            </a:extLst>
-          </p:cNvPr>
+          <p:cNvPr id="8" name="页脚占位符 7"/>
           <p:cNvSpPr>
             <a:spLocks noGrp="1"/>
           </p:cNvSpPr>
@@ -1851,13 +1626,7 @@
       </p:sp>
       <p:sp>
         <p:nvSpPr>
-          <p:cNvPr id="9" name="灯片编号占位符 8">
-            <a:extLst>
-              <a:ext uri="{FF2B5EF4-FFF2-40B4-BE49-F238E27FC236}">
-                <a16:creationId xmlns:a16="http://schemas.microsoft.com/office/drawing/2014/main" id="{BCEC0574-50BE-757F-F4C9-020901BE6ECC}"/>
-              </a:ext>
-            </a:extLst>
-          </p:cNvPr>
+          <p:cNvPr id="9" name="灯片编号占位符 8"/>
           <p:cNvSpPr>
             <a:spLocks noGrp="1"/>
           </p:cNvSpPr>
@@ -1872,18 +1641,12 @@
           <a:p>
             <a:fld id="{6658316B-B7F2-F042-B6C0-2231261321F3}" type="slidenum">
               <a:rPr kumimoji="1" lang="zh-CN" altLang="en-US" smtClean="0"/>
-              <a:t>‹#›</a:t>
             </a:fld>
             <a:endParaRPr kumimoji="1" lang="zh-CN" altLang="en-US"/>
           </a:p>
         </p:txBody>
       </p:sp>
     </p:spTree>
-    <p:extLst>
-      <p:ext uri="{BB962C8B-B14F-4D97-AF65-F5344CB8AC3E}">
-        <p14:creationId xmlns:p14="http://schemas.microsoft.com/office/powerpoint/2010/main" val="1606529372"/>
-      </p:ext>
-    </p:extLst>
   </p:cSld>
   <p:clrMapOvr>
     <a:masterClrMapping/>
@@ -1910,13 +1673,7 @@
       </p:grpSpPr>
       <p:sp>
         <p:nvSpPr>
-          <p:cNvPr id="2" name="标题 1">
-            <a:extLst>
-              <a:ext uri="{FF2B5EF4-FFF2-40B4-BE49-F238E27FC236}">
-                <a16:creationId xmlns:a16="http://schemas.microsoft.com/office/drawing/2014/main" id="{E6631C48-9558-DCBC-D1D3-DB6AF06F585F}"/>
-              </a:ext>
-            </a:extLst>
-          </p:cNvPr>
+          <p:cNvPr id="2" name="标题 1"/>
           <p:cNvSpPr>
             <a:spLocks noGrp="1"/>
           </p:cNvSpPr>
@@ -1933,18 +1690,13 @@
               <a:rPr kumimoji="1" lang="zh-CN" altLang="en-US"/>
               <a:t>单击此处编辑母版标题样式</a:t>
             </a:r>
-          </a:p>
-        </p:txBody>
-      </p:sp>
-      <p:sp>
-        <p:nvSpPr>
-          <p:cNvPr id="3" name="日期占位符 2">
-            <a:extLst>
-              <a:ext uri="{FF2B5EF4-FFF2-40B4-BE49-F238E27FC236}">
-                <a16:creationId xmlns:a16="http://schemas.microsoft.com/office/drawing/2014/main" id="{E43C85B0-8985-07F9-C378-243ADADCB23C}"/>
-              </a:ext>
-            </a:extLst>
-          </p:cNvPr>
+            <a:endParaRPr kumimoji="1" lang="zh-CN" altLang="en-US"/>
+          </a:p>
+        </p:txBody>
+      </p:sp>
+      <p:sp>
+        <p:nvSpPr>
+          <p:cNvPr id="3" name="日期占位符 2"/>
           <p:cNvSpPr>
             <a:spLocks noGrp="1"/>
           </p:cNvSpPr>
@@ -1959,7 +1711,6 @@
           <a:p>
             <a:fld id="{37475CA1-6F9A-C543-9726-5DEBB049FFBF}" type="datetimeFigureOut">
               <a:rPr kumimoji="1" lang="zh-CN" altLang="en-US" smtClean="0"/>
-              <a:t>2026/5/21</a:t>
             </a:fld>
             <a:endParaRPr kumimoji="1" lang="zh-CN" altLang="en-US"/>
           </a:p>
@@ -1967,13 +1718,7 @@
       </p:sp>
       <p:sp>
         <p:nvSpPr>
-          <p:cNvPr id="4" name="页脚占位符 3">
-            <a:extLst>
-              <a:ext uri="{FF2B5EF4-FFF2-40B4-BE49-F238E27FC236}">
-                <a16:creationId xmlns:a16="http://schemas.microsoft.com/office/drawing/2014/main" id="{7EBCDC15-34EE-E118-4044-13F6DEBEA726}"/>
-              </a:ext>
-            </a:extLst>
-          </p:cNvPr>
+          <p:cNvPr id="4" name="页脚占位符 3"/>
           <p:cNvSpPr>
             <a:spLocks noGrp="1"/>
           </p:cNvSpPr>
@@ -1992,13 +1737,7 @@
       </p:sp>
       <p:sp>
         <p:nvSpPr>
-          <p:cNvPr id="5" name="灯片编号占位符 4">
-            <a:extLst>
-              <a:ext uri="{FF2B5EF4-FFF2-40B4-BE49-F238E27FC236}">
-                <a16:creationId xmlns:a16="http://schemas.microsoft.com/office/drawing/2014/main" id="{5ED90C2B-F9D1-5886-F051-864365DE4962}"/>
-              </a:ext>
-            </a:extLst>
-          </p:cNvPr>
+          <p:cNvPr id="5" name="灯片编号占位符 4"/>
           <p:cNvSpPr>
             <a:spLocks noGrp="1"/>
           </p:cNvSpPr>
@@ -2013,18 +1752,12 @@
           <a:p>
             <a:fld id="{6658316B-B7F2-F042-B6C0-2231261321F3}" type="slidenum">
               <a:rPr kumimoji="1" lang="zh-CN" altLang="en-US" smtClean="0"/>
-              <a:t>‹#›</a:t>
             </a:fld>
             <a:endParaRPr kumimoji="1" lang="zh-CN" altLang="en-US"/>
           </a:p>
         </p:txBody>
       </p:sp>
     </p:spTree>
-    <p:extLst>
-      <p:ext uri="{BB962C8B-B14F-4D97-AF65-F5344CB8AC3E}">
-        <p14:creationId xmlns:p14="http://schemas.microsoft.com/office/powerpoint/2010/main" val="3453328090"/>
-      </p:ext>
-    </p:extLst>
   </p:cSld>
   <p:clrMapOvr>
     <a:masterClrMapping/>
@@ -2051,13 +1784,7 @@
       </p:grpSpPr>
       <p:sp>
         <p:nvSpPr>
-          <p:cNvPr id="2" name="日期占位符 1">
-            <a:extLst>
-              <a:ext uri="{FF2B5EF4-FFF2-40B4-BE49-F238E27FC236}">
-                <a16:creationId xmlns:a16="http://schemas.microsoft.com/office/drawing/2014/main" id="{E1239F73-00E4-5DFE-B4FF-96F00FFAD74F}"/>
-              </a:ext>
-            </a:extLst>
-          </p:cNvPr>
+          <p:cNvPr id="2" name="日期占位符 1"/>
           <p:cNvSpPr>
             <a:spLocks noGrp="1"/>
           </p:cNvSpPr>
@@ -2072,7 +1799,6 @@
           <a:p>
             <a:fld id="{37475CA1-6F9A-C543-9726-5DEBB049FFBF}" type="datetimeFigureOut">
               <a:rPr kumimoji="1" lang="zh-CN" altLang="en-US" smtClean="0"/>
-              <a:t>2026/5/21</a:t>
             </a:fld>
             <a:endParaRPr kumimoji="1" lang="zh-CN" altLang="en-US"/>
           </a:p>
@@ -2080,13 +1806,7 @@
       </p:sp>
       <p:sp>
         <p:nvSpPr>
-          <p:cNvPr id="3" name="页脚占位符 2">
-            <a:extLst>
-              <a:ext uri="{FF2B5EF4-FFF2-40B4-BE49-F238E27FC236}">
-                <a16:creationId xmlns:a16="http://schemas.microsoft.com/office/drawing/2014/main" id="{E957BF42-863B-EAA2-211A-B6F892FE2665}"/>
-              </a:ext>
-            </a:extLst>
-          </p:cNvPr>
+          <p:cNvPr id="3" name="页脚占位符 2"/>
           <p:cNvSpPr>
             <a:spLocks noGrp="1"/>
           </p:cNvSpPr>
@@ -2105,13 +1825,7 @@
       </p:sp>
       <p:sp>
         <p:nvSpPr>
-          <p:cNvPr id="4" name="灯片编号占位符 3">
-            <a:extLst>
-              <a:ext uri="{FF2B5EF4-FFF2-40B4-BE49-F238E27FC236}">
-                <a16:creationId xmlns:a16="http://schemas.microsoft.com/office/drawing/2014/main" id="{200F320A-592F-DCC0-170F-1F8D5A6B344A}"/>
-              </a:ext>
-            </a:extLst>
-          </p:cNvPr>
+          <p:cNvPr id="4" name="灯片编号占位符 3"/>
           <p:cNvSpPr>
             <a:spLocks noGrp="1"/>
           </p:cNvSpPr>
@@ -2126,18 +1840,12 @@
           <a:p>
             <a:fld id="{6658316B-B7F2-F042-B6C0-2231261321F3}" type="slidenum">
               <a:rPr kumimoji="1" lang="zh-CN" altLang="en-US" smtClean="0"/>
-              <a:t>‹#›</a:t>
             </a:fld>
             <a:endParaRPr kumimoji="1" lang="zh-CN" altLang="en-US"/>
           </a:p>
         </p:txBody>
       </p:sp>
     </p:spTree>
-    <p:extLst>
-      <p:ext uri="{BB962C8B-B14F-4D97-AF65-F5344CB8AC3E}">
-        <p14:creationId xmlns:p14="http://schemas.microsoft.com/office/powerpoint/2010/main" val="432700134"/>
-      </p:ext>
-    </p:extLst>
   </p:cSld>
   <p:clrMapOvr>
     <a:masterClrMapping/>
@@ -2164,13 +1872,7 @@
       </p:grpSpPr>
       <p:sp>
         <p:nvSpPr>
-          <p:cNvPr id="2" name="标题 1">
-            <a:extLst>
-              <a:ext uri="{FF2B5EF4-FFF2-40B4-BE49-F238E27FC236}">
-                <a16:creationId xmlns:a16="http://schemas.microsoft.com/office/drawing/2014/main" id="{7A30A1BD-E045-07BB-281E-519209DE8AB2}"/>
-              </a:ext>
-            </a:extLst>
-          </p:cNvPr>
+          <p:cNvPr id="2" name="标题 1"/>
           <p:cNvSpPr>
             <a:spLocks noGrp="1"/>
           </p:cNvSpPr>
@@ -2196,18 +1898,13 @@
               <a:rPr kumimoji="1" lang="zh-CN" altLang="en-US"/>
               <a:t>单击此处编辑母版标题样式</a:t>
             </a:r>
-          </a:p>
-        </p:txBody>
-      </p:sp>
-      <p:sp>
-        <p:nvSpPr>
-          <p:cNvPr id="3" name="内容占位符 2">
-            <a:extLst>
-              <a:ext uri="{FF2B5EF4-FFF2-40B4-BE49-F238E27FC236}">
-                <a16:creationId xmlns:a16="http://schemas.microsoft.com/office/drawing/2014/main" id="{FAECE792-6708-785C-6E74-1D11C9B806BE}"/>
-              </a:ext>
-            </a:extLst>
-          </p:cNvPr>
+            <a:endParaRPr kumimoji="1" lang="zh-CN" altLang="en-US"/>
+          </a:p>
+        </p:txBody>
+      </p:sp>
+      <p:sp>
+        <p:nvSpPr>
+          <p:cNvPr id="3" name="内容占位符 2"/>
           <p:cNvSpPr>
             <a:spLocks noGrp="1"/>
           </p:cNvSpPr>
@@ -2258,6 +1955,7 @@
               <a:rPr kumimoji="1" lang="zh-CN" altLang="en-US"/>
               <a:t>单击此处编辑母版文本样式</a:t>
             </a:r>
+            <a:endParaRPr kumimoji="1" lang="zh-CN" altLang="en-US"/>
           </a:p>
           <a:p>
             <a:pPr lvl="1"/>
@@ -2265,6 +1963,7 @@
               <a:rPr kumimoji="1" lang="zh-CN" altLang="en-US"/>
               <a:t>二级</a:t>
             </a:r>
+            <a:endParaRPr kumimoji="1" lang="zh-CN" altLang="en-US"/>
           </a:p>
           <a:p>
             <a:pPr lvl="2"/>
@@ -2272,6 +1971,7 @@
               <a:rPr kumimoji="1" lang="zh-CN" altLang="en-US"/>
               <a:t>三级</a:t>
             </a:r>
+            <a:endParaRPr kumimoji="1" lang="zh-CN" altLang="en-US"/>
           </a:p>
           <a:p>
             <a:pPr lvl="3"/>
@@ -2279,6 +1979,7 @@
               <a:rPr kumimoji="1" lang="zh-CN" altLang="en-US"/>
               <a:t>四级</a:t>
             </a:r>
+            <a:endParaRPr kumimoji="1" lang="zh-CN" altLang="en-US"/>
           </a:p>
           <a:p>
             <a:pPr lvl="4"/>
@@ -2286,18 +1987,13 @@
               <a:rPr kumimoji="1" lang="zh-CN" altLang="en-US"/>
               <a:t>五级</a:t>
             </a:r>
-          </a:p>
-        </p:txBody>
-      </p:sp>
-      <p:sp>
-        <p:nvSpPr>
-          <p:cNvPr id="4" name="文本占位符 3">
-            <a:extLst>
-              <a:ext uri="{FF2B5EF4-FFF2-40B4-BE49-F238E27FC236}">
-                <a16:creationId xmlns:a16="http://schemas.microsoft.com/office/drawing/2014/main" id="{39F8E777-68D0-B90B-4C3D-915FF1B22808}"/>
-              </a:ext>
-            </a:extLst>
-          </p:cNvPr>
+            <a:endParaRPr kumimoji="1" lang="zh-CN" altLang="en-US"/>
+          </a:p>
+        </p:txBody>
+      </p:sp>
+      <p:sp>
+        <p:nvSpPr>
+          <p:cNvPr id="4" name="文本占位符 3"/>
           <p:cNvSpPr>
             <a:spLocks noGrp="1"/>
           </p:cNvSpPr>
@@ -2357,18 +2053,13 @@
               <a:rPr kumimoji="1" lang="zh-CN" altLang="en-US"/>
               <a:t>单击此处编辑母版文本样式</a:t>
             </a:r>
-          </a:p>
-        </p:txBody>
-      </p:sp>
-      <p:sp>
-        <p:nvSpPr>
-          <p:cNvPr id="5" name="日期占位符 4">
-            <a:extLst>
-              <a:ext uri="{FF2B5EF4-FFF2-40B4-BE49-F238E27FC236}">
-                <a16:creationId xmlns:a16="http://schemas.microsoft.com/office/drawing/2014/main" id="{16FDA1C6-579A-C1DD-CC63-997D941DCED5}"/>
-              </a:ext>
-            </a:extLst>
-          </p:cNvPr>
+            <a:endParaRPr kumimoji="1" lang="zh-CN" altLang="en-US"/>
+          </a:p>
+        </p:txBody>
+      </p:sp>
+      <p:sp>
+        <p:nvSpPr>
+          <p:cNvPr id="5" name="日期占位符 4"/>
           <p:cNvSpPr>
             <a:spLocks noGrp="1"/>
           </p:cNvSpPr>
@@ -2383,7 +2074,6 @@
           <a:p>
             <a:fld id="{37475CA1-6F9A-C543-9726-5DEBB049FFBF}" type="datetimeFigureOut">
               <a:rPr kumimoji="1" lang="zh-CN" altLang="en-US" smtClean="0"/>
-              <a:t>2026/5/21</a:t>
             </a:fld>
             <a:endParaRPr kumimoji="1" lang="zh-CN" altLang="en-US"/>
           </a:p>
@@ -2391,13 +2081,7 @@
       </p:sp>
       <p:sp>
         <p:nvSpPr>
-          <p:cNvPr id="6" name="页脚占位符 5">
-            <a:extLst>
-              <a:ext uri="{FF2B5EF4-FFF2-40B4-BE49-F238E27FC236}">
-                <a16:creationId xmlns:a16="http://schemas.microsoft.com/office/drawing/2014/main" id="{F71F7B97-F821-0EDA-9247-C32C72E03258}"/>
-              </a:ext>
-            </a:extLst>
-          </p:cNvPr>
+          <p:cNvPr id="6" name="页脚占位符 5"/>
           <p:cNvSpPr>
             <a:spLocks noGrp="1"/>
           </p:cNvSpPr>
@@ -2416,13 +2100,7 @@
       </p:sp>
       <p:sp>
         <p:nvSpPr>
-          <p:cNvPr id="7" name="灯片编号占位符 6">
-            <a:extLst>
-              <a:ext uri="{FF2B5EF4-FFF2-40B4-BE49-F238E27FC236}">
-                <a16:creationId xmlns:a16="http://schemas.microsoft.com/office/drawing/2014/main" id="{169A3AFD-1703-D24C-0C08-69F4F9741715}"/>
-              </a:ext>
-            </a:extLst>
-          </p:cNvPr>
+          <p:cNvPr id="7" name="灯片编号占位符 6"/>
           <p:cNvSpPr>
             <a:spLocks noGrp="1"/>
           </p:cNvSpPr>
@@ -2437,18 +2115,12 @@
           <a:p>
             <a:fld id="{6658316B-B7F2-F042-B6C0-2231261321F3}" type="slidenum">
               <a:rPr kumimoji="1" lang="zh-CN" altLang="en-US" smtClean="0"/>
-              <a:t>‹#›</a:t>
             </a:fld>
             <a:endParaRPr kumimoji="1" lang="zh-CN" altLang="en-US"/>
           </a:p>
         </p:txBody>
       </p:sp>
     </p:spTree>
-    <p:extLst>
-      <p:ext uri="{BB962C8B-B14F-4D97-AF65-F5344CB8AC3E}">
-        <p14:creationId xmlns:p14="http://schemas.microsoft.com/office/powerpoint/2010/main" val="3907054842"/>
-      </p:ext>
-    </p:extLst>
   </p:cSld>
   <p:clrMapOvr>
     <a:masterClrMapping/>
@@ -2475,13 +2147,7 @@
       </p:grpSpPr>
       <p:sp>
         <p:nvSpPr>
-          <p:cNvPr id="2" name="标题 1">
-            <a:extLst>
-              <a:ext uri="{FF2B5EF4-FFF2-40B4-BE49-F238E27FC236}">
-                <a16:creationId xmlns:a16="http://schemas.microsoft.com/office/drawing/2014/main" id="{F9AFE2B4-B18D-394F-E877-14681E0790F3}"/>
-              </a:ext>
-            </a:extLst>
-          </p:cNvPr>
+          <p:cNvPr id="2" name="标题 1"/>
           <p:cNvSpPr>
             <a:spLocks noGrp="1"/>
           </p:cNvSpPr>
@@ -2507,18 +2173,13 @@
               <a:rPr kumimoji="1" lang="zh-CN" altLang="en-US"/>
               <a:t>单击此处编辑母版标题样式</a:t>
             </a:r>
-          </a:p>
-        </p:txBody>
-      </p:sp>
-      <p:sp>
-        <p:nvSpPr>
-          <p:cNvPr id="3" name="图片占位符 2">
-            <a:extLst>
-              <a:ext uri="{FF2B5EF4-FFF2-40B4-BE49-F238E27FC236}">
-                <a16:creationId xmlns:a16="http://schemas.microsoft.com/office/drawing/2014/main" id="{1D564B15-FF72-929F-6D25-7C36B1589278}"/>
-              </a:ext>
-            </a:extLst>
-          </p:cNvPr>
+            <a:endParaRPr kumimoji="1" lang="zh-CN" altLang="en-US"/>
+          </a:p>
+        </p:txBody>
+      </p:sp>
+      <p:sp>
+        <p:nvSpPr>
+          <p:cNvPr id="3" name="图片占位符 2"/>
           <p:cNvSpPr>
             <a:spLocks noGrp="1"/>
           </p:cNvSpPr>
@@ -2579,13 +2240,7 @@
       </p:sp>
       <p:sp>
         <p:nvSpPr>
-          <p:cNvPr id="4" name="文本占位符 3">
-            <a:extLst>
-              <a:ext uri="{FF2B5EF4-FFF2-40B4-BE49-F238E27FC236}">
-                <a16:creationId xmlns:a16="http://schemas.microsoft.com/office/drawing/2014/main" id="{BF88D361-88FD-FEBC-2A43-73D05370D919}"/>
-              </a:ext>
-            </a:extLst>
-          </p:cNvPr>
+          <p:cNvPr id="4" name="文本占位符 3"/>
           <p:cNvSpPr>
             <a:spLocks noGrp="1"/>
           </p:cNvSpPr>
@@ -2645,18 +2300,13 @@
               <a:rPr kumimoji="1" lang="zh-CN" altLang="en-US"/>
               <a:t>单击此处编辑母版文本样式</a:t>
             </a:r>
-          </a:p>
-        </p:txBody>
-      </p:sp>
-      <p:sp>
-        <p:nvSpPr>
-          <p:cNvPr id="5" name="日期占位符 4">
-            <a:extLst>
-              <a:ext uri="{FF2B5EF4-FFF2-40B4-BE49-F238E27FC236}">
-                <a16:creationId xmlns:a16="http://schemas.microsoft.com/office/drawing/2014/main" id="{FB0AF150-12BD-0C5F-477F-714E63A82383}"/>
-              </a:ext>
-            </a:extLst>
-          </p:cNvPr>
+            <a:endParaRPr kumimoji="1" lang="zh-CN" altLang="en-US"/>
+          </a:p>
+        </p:txBody>
+      </p:sp>
+      <p:sp>
+        <p:nvSpPr>
+          <p:cNvPr id="5" name="日期占位符 4"/>
           <p:cNvSpPr>
             <a:spLocks noGrp="1"/>
           </p:cNvSpPr>
@@ -2671,7 +2321,6 @@
           <a:p>
             <a:fld id="{37475CA1-6F9A-C543-9726-5DEBB049FFBF}" type="datetimeFigureOut">
               <a:rPr kumimoji="1" lang="zh-CN" altLang="en-US" smtClean="0"/>
-              <a:t>2026/5/21</a:t>
             </a:fld>
             <a:endParaRPr kumimoji="1" lang="zh-CN" altLang="en-US"/>
           </a:p>
@@ -2679,13 +2328,7 @@
       </p:sp>
       <p:sp>
         <p:nvSpPr>
-          <p:cNvPr id="6" name="页脚占位符 5">
-            <a:extLst>
-              <a:ext uri="{FF2B5EF4-FFF2-40B4-BE49-F238E27FC236}">
-                <a16:creationId xmlns:a16="http://schemas.microsoft.com/office/drawing/2014/main" id="{CA4D7255-25C1-AD70-7928-B71156605D53}"/>
-              </a:ext>
-            </a:extLst>
-          </p:cNvPr>
+          <p:cNvPr id="6" name="页脚占位符 5"/>
           <p:cNvSpPr>
             <a:spLocks noGrp="1"/>
           </p:cNvSpPr>
@@ -2704,13 +2347,7 @@
       </p:sp>
       <p:sp>
         <p:nvSpPr>
-          <p:cNvPr id="7" name="灯片编号占位符 6">
-            <a:extLst>
-              <a:ext uri="{FF2B5EF4-FFF2-40B4-BE49-F238E27FC236}">
-                <a16:creationId xmlns:a16="http://schemas.microsoft.com/office/drawing/2014/main" id="{05D03C27-CAEA-1EB6-5EEC-1028A5D9AEC5}"/>
-              </a:ext>
-            </a:extLst>
-          </p:cNvPr>
+          <p:cNvPr id="7" name="灯片编号占位符 6"/>
           <p:cNvSpPr>
             <a:spLocks noGrp="1"/>
           </p:cNvSpPr>
@@ -2725,18 +2362,12 @@
           <a:p>
             <a:fld id="{6658316B-B7F2-F042-B6C0-2231261321F3}" type="slidenum">
               <a:rPr kumimoji="1" lang="zh-CN" altLang="en-US" smtClean="0"/>
-              <a:t>‹#›</a:t>
             </a:fld>
             <a:endParaRPr kumimoji="1" lang="zh-CN" altLang="en-US"/>
           </a:p>
         </p:txBody>
       </p:sp>
     </p:spTree>
-    <p:extLst>
-      <p:ext uri="{BB962C8B-B14F-4D97-AF65-F5344CB8AC3E}">
-        <p14:creationId xmlns:p14="http://schemas.microsoft.com/office/powerpoint/2010/main" val="1387203338"/>
-      </p:ext>
-    </p:extLst>
   </p:cSld>
   <p:clrMapOvr>
     <a:masterClrMapping/>
@@ -2768,13 +2399,7 @@
       </p:grpSpPr>
       <p:sp>
         <p:nvSpPr>
-          <p:cNvPr id="2" name="标题占位符 1">
-            <a:extLst>
-              <a:ext uri="{FF2B5EF4-FFF2-40B4-BE49-F238E27FC236}">
-                <a16:creationId xmlns:a16="http://schemas.microsoft.com/office/drawing/2014/main" id="{DDFFB9A4-2DE3-B6CC-D431-6127BC1C9C9C}"/>
-              </a:ext>
-            </a:extLst>
-          </p:cNvPr>
+          <p:cNvPr id="2" name="标题占位符 1"/>
           <p:cNvSpPr>
             <a:spLocks noGrp="1"/>
           </p:cNvSpPr>
@@ -2801,18 +2426,13 @@
               <a:rPr kumimoji="1" lang="zh-CN" altLang="en-US"/>
               <a:t>单击此处编辑母版标题样式</a:t>
             </a:r>
-          </a:p>
-        </p:txBody>
-      </p:sp>
-      <p:sp>
-        <p:nvSpPr>
-          <p:cNvPr id="3" name="文本占位符 2">
-            <a:extLst>
-              <a:ext uri="{FF2B5EF4-FFF2-40B4-BE49-F238E27FC236}">
-                <a16:creationId xmlns:a16="http://schemas.microsoft.com/office/drawing/2014/main" id="{46B11AC4-4153-D039-D4D5-9CB225B406F2}"/>
-              </a:ext>
-            </a:extLst>
-          </p:cNvPr>
+            <a:endParaRPr kumimoji="1" lang="zh-CN" altLang="en-US"/>
+          </a:p>
+        </p:txBody>
+      </p:sp>
+      <p:sp>
+        <p:nvSpPr>
+          <p:cNvPr id="3" name="文本占位符 2"/>
           <p:cNvSpPr>
             <a:spLocks noGrp="1"/>
           </p:cNvSpPr>
@@ -2840,6 +2460,7 @@
               <a:rPr kumimoji="1" lang="zh-CN" altLang="en-US"/>
               <a:t>单击此处编辑母版文本样式</a:t>
             </a:r>
+            <a:endParaRPr kumimoji="1" lang="zh-CN" altLang="en-US"/>
           </a:p>
           <a:p>
             <a:pPr lvl="1"/>
@@ -2847,6 +2468,7 @@
               <a:rPr kumimoji="1" lang="zh-CN" altLang="en-US"/>
               <a:t>二级</a:t>
             </a:r>
+            <a:endParaRPr kumimoji="1" lang="zh-CN" altLang="en-US"/>
           </a:p>
           <a:p>
             <a:pPr lvl="2"/>
@@ -2854,6 +2476,7 @@
               <a:rPr kumimoji="1" lang="zh-CN" altLang="en-US"/>
               <a:t>三级</a:t>
             </a:r>
+            <a:endParaRPr kumimoji="1" lang="zh-CN" altLang="en-US"/>
           </a:p>
           <a:p>
             <a:pPr lvl="3"/>
@@ -2861,6 +2484,7 @@
               <a:rPr kumimoji="1" lang="zh-CN" altLang="en-US"/>
               <a:t>四级</a:t>
             </a:r>
+            <a:endParaRPr kumimoji="1" lang="zh-CN" altLang="en-US"/>
           </a:p>
           <a:p>
             <a:pPr lvl="4"/>
@@ -2868,18 +2492,13 @@
               <a:rPr kumimoji="1" lang="zh-CN" altLang="en-US"/>
               <a:t>五级</a:t>
             </a:r>
-          </a:p>
-        </p:txBody>
-      </p:sp>
-      <p:sp>
-        <p:nvSpPr>
-          <p:cNvPr id="4" name="日期占位符 3">
-            <a:extLst>
-              <a:ext uri="{FF2B5EF4-FFF2-40B4-BE49-F238E27FC236}">
-                <a16:creationId xmlns:a16="http://schemas.microsoft.com/office/drawing/2014/main" id="{D64B2C7B-E3C6-2DB0-7727-778CB0C19D5A}"/>
-              </a:ext>
-            </a:extLst>
-          </p:cNvPr>
+            <a:endParaRPr kumimoji="1" lang="zh-CN" altLang="en-US"/>
+          </a:p>
+        </p:txBody>
+      </p:sp>
+      <p:sp>
+        <p:nvSpPr>
+          <p:cNvPr id="4" name="日期占位符 3"/>
           <p:cNvSpPr>
             <a:spLocks noGrp="1"/>
           </p:cNvSpPr>
@@ -2912,7 +2531,6 @@
           <a:p>
             <a:fld id="{37475CA1-6F9A-C543-9726-5DEBB049FFBF}" type="datetimeFigureOut">
               <a:rPr kumimoji="1" lang="zh-CN" altLang="en-US" smtClean="0"/>
-              <a:t>2026/5/21</a:t>
             </a:fld>
             <a:endParaRPr kumimoji="1" lang="zh-CN" altLang="en-US"/>
           </a:p>
@@ -2920,13 +2538,7 @@
       </p:sp>
       <p:sp>
         <p:nvSpPr>
-          <p:cNvPr id="5" name="页脚占位符 4">
-            <a:extLst>
-              <a:ext uri="{FF2B5EF4-FFF2-40B4-BE49-F238E27FC236}">
-                <a16:creationId xmlns:a16="http://schemas.microsoft.com/office/drawing/2014/main" id="{369478A2-FE77-80DF-4C46-F6E981308F60}"/>
-              </a:ext>
-            </a:extLst>
-          </p:cNvPr>
+          <p:cNvPr id="5" name="页脚占位符 4"/>
           <p:cNvSpPr>
             <a:spLocks noGrp="1"/>
           </p:cNvSpPr>
@@ -2963,13 +2575,7 @@
       </p:sp>
       <p:sp>
         <p:nvSpPr>
-          <p:cNvPr id="6" name="灯片编号占位符 5">
-            <a:extLst>
-              <a:ext uri="{FF2B5EF4-FFF2-40B4-BE49-F238E27FC236}">
-                <a16:creationId xmlns:a16="http://schemas.microsoft.com/office/drawing/2014/main" id="{F537CDEA-44F5-0B9C-B9B0-A454126051A6}"/>
-              </a:ext>
-            </a:extLst>
-          </p:cNvPr>
+          <p:cNvPr id="6" name="灯片编号占位符 5"/>
           <p:cNvSpPr>
             <a:spLocks noGrp="1"/>
           </p:cNvSpPr>
@@ -3002,18 +2608,12 @@
           <a:p>
             <a:fld id="{6658316B-B7F2-F042-B6C0-2231261321F3}" type="slidenum">
               <a:rPr kumimoji="1" lang="zh-CN" altLang="en-US" smtClean="0"/>
-              <a:t>‹#›</a:t>
             </a:fld>
             <a:endParaRPr kumimoji="1" lang="zh-CN" altLang="en-US"/>
           </a:p>
         </p:txBody>
       </p:sp>
     </p:spTree>
-    <p:extLst>
-      <p:ext uri="{BB962C8B-B14F-4D97-AF65-F5344CB8AC3E}">
-        <p14:creationId xmlns:p14="http://schemas.microsoft.com/office/powerpoint/2010/main" val="819027389"/>
-      </p:ext>
-    </p:extLst>
   </p:cSld>
   <p:clrMap bg1="lt1" tx1="dk1" bg2="lt2" tx2="dk2" accent1="accent1" accent2="accent2" accent3="accent3" accent4="accent4" accent5="accent5" accent6="accent6" hlink="hlink" folHlink="folHlink"/>
   <p:sldLayoutIdLst>
@@ -3057,7 +2657,7 @@
         <a:spcBef>
           <a:spcPts val="1000"/>
         </a:spcBef>
-        <a:buFont typeface="Arial" panose="020B0604020202020204" pitchFamily="34" charset="0"/>
+        <a:buFont typeface="Arial" panose="020B0604020202090204" pitchFamily="34" charset="0"/>
         <a:buChar char="•"/>
         <a:defRPr sz="2800" kern="1200">
           <a:solidFill>
@@ -3075,7 +2675,7 @@
         <a:spcBef>
           <a:spcPts val="500"/>
         </a:spcBef>
-        <a:buFont typeface="Arial" panose="020B0604020202020204" pitchFamily="34" charset="0"/>
+        <a:buFont typeface="Arial" panose="020B0604020202090204" pitchFamily="34" charset="0"/>
         <a:buChar char="•"/>
         <a:defRPr sz="2400" kern="1200">
           <a:solidFill>
@@ -3093,7 +2693,7 @@
         <a:spcBef>
           <a:spcPts val="500"/>
         </a:spcBef>
-        <a:buFont typeface="Arial" panose="020B0604020202020204" pitchFamily="34" charset="0"/>
+        <a:buFont typeface="Arial" panose="020B0604020202090204" pitchFamily="34" charset="0"/>
         <a:buChar char="•"/>
         <a:defRPr sz="2000" kern="1200">
           <a:solidFill>
@@ -3111,7 +2711,7 @@
         <a:spcBef>
           <a:spcPts val="500"/>
         </a:spcBef>
-        <a:buFont typeface="Arial" panose="020B0604020202020204" pitchFamily="34" charset="0"/>
+        <a:buFont typeface="Arial" panose="020B0604020202090204" pitchFamily="34" charset="0"/>
         <a:buChar char="•"/>
         <a:defRPr sz="1800" kern="1200">
           <a:solidFill>
@@ -3129,7 +2729,7 @@
         <a:spcBef>
           <a:spcPts val="500"/>
         </a:spcBef>
-        <a:buFont typeface="Arial" panose="020B0604020202020204" pitchFamily="34" charset="0"/>
+        <a:buFont typeface="Arial" panose="020B0604020202090204" pitchFamily="34" charset="0"/>
         <a:buChar char="•"/>
         <a:defRPr sz="1800" kern="1200">
           <a:solidFill>
@@ -3147,7 +2747,7 @@
         <a:spcBef>
           <a:spcPts val="500"/>
         </a:spcBef>
-        <a:buFont typeface="Arial" panose="020B0604020202020204" pitchFamily="34" charset="0"/>
+        <a:buFont typeface="Arial" panose="020B0604020202090204" pitchFamily="34" charset="0"/>
         <a:buChar char="•"/>
         <a:defRPr sz="1800" kern="1200">
           <a:solidFill>
@@ -3165,7 +2765,7 @@
         <a:spcBef>
           <a:spcPts val="500"/>
         </a:spcBef>
-        <a:buFont typeface="Arial" panose="020B0604020202020204" pitchFamily="34" charset="0"/>
+        <a:buFont typeface="Arial" panose="020B0604020202090204" pitchFamily="34" charset="0"/>
         <a:buChar char="•"/>
         <a:defRPr sz="1800" kern="1200">
           <a:solidFill>
@@ -3183,7 +2783,7 @@
         <a:spcBef>
           <a:spcPts val="500"/>
         </a:spcBef>
-        <a:buFont typeface="Arial" panose="020B0604020202020204" pitchFamily="34" charset="0"/>
+        <a:buFont typeface="Arial" panose="020B0604020202090204" pitchFamily="34" charset="0"/>
         <a:buChar char="•"/>
         <a:defRPr sz="1800" kern="1200">
           <a:solidFill>
@@ -3201,7 +2801,7 @@
         <a:spcBef>
           <a:spcPts val="500"/>
         </a:spcBef>
-        <a:buFont typeface="Arial" panose="020B0604020202020204" pitchFamily="34" charset="0"/>
+        <a:buFont typeface="Arial" panose="020B0604020202090204" pitchFamily="34" charset="0"/>
         <a:buChar char="•"/>
         <a:defRPr sz="1800" kern="1200">
           <a:solidFill>
@@ -3331,13 +2931,7 @@
       </p:grpSpPr>
       <p:sp>
         <p:nvSpPr>
-          <p:cNvPr id="3" name="副标题 2">
-            <a:extLst>
-              <a:ext uri="{FF2B5EF4-FFF2-40B4-BE49-F238E27FC236}">
-                <a16:creationId xmlns:a16="http://schemas.microsoft.com/office/drawing/2014/main" id="{2C8C726C-4ABB-18E2-6521-A546C88E5754}"/>
-              </a:ext>
-            </a:extLst>
-          </p:cNvPr>
+          <p:cNvPr id="3" name="副标题 2"/>
           <p:cNvSpPr>
             <a:spLocks noGrp="1"/>
           </p:cNvSpPr>
@@ -3347,48 +2941,53 @@
         </p:nvSpPr>
         <p:spPr>
           <a:xfrm>
-            <a:off x="1797132" y="1416978"/>
-            <a:ext cx="9144000" cy="1655762"/>
+            <a:off x="1797050" y="1416685"/>
+            <a:ext cx="9144000" cy="1856105"/>
           </a:xfrm>
         </p:spPr>
         <p:txBody>
           <a:bodyPr>
-            <a:normAutofit lnSpcReduction="10000"/>
+            <a:normAutofit/>
           </a:bodyPr>
           <a:lstStyle/>
           <a:p>
             <a:r>
-              <a:rPr lang="en" altLang="zh-CN" sz="5400" b="1" dirty="0">
-                <a:latin typeface="+mn-ea"/>
+              <a:rPr lang="en-GB" altLang="zh-CN" sz="5400" b="1" dirty="0">
+                <a:latin typeface="Times New Roman" panose="02020503050405090304" charset="0"/>
+                <a:cs typeface="Times New Roman" panose="02020503050405090304" charset="0"/>
               </a:rPr>
               <a:t>Week 1 </a:t>
             </a:r>
-          </a:p>
-          <a:p>
-            <a:r>
-              <a:rPr lang="en" altLang="zh-CN" sz="5400" b="1" dirty="0">
-                <a:latin typeface="+mn-ea"/>
+            <a:endParaRPr lang="en-GB" altLang="zh-CN" sz="5400" b="1" dirty="0">
+              <a:latin typeface="Times New Roman" panose="02020503050405090304" charset="0"/>
+              <a:cs typeface="Times New Roman" panose="02020503050405090304" charset="0"/>
+            </a:endParaRPr>
+          </a:p>
+          <a:p>
+            <a:r>
+              <a:rPr lang="en-GB" altLang="zh-CN" sz="5400" b="1" dirty="0">
+                <a:latin typeface="Times New Roman" panose="02020503050405090304" charset="0"/>
+                <a:cs typeface="Times New Roman" panose="02020503050405090304" charset="0"/>
               </a:rPr>
               <a:t>Report</a:t>
             </a:r>
-          </a:p>
-          <a:p>
-            <a:endParaRPr lang="en" altLang="zh-CN" b="1" dirty="0"/>
-          </a:p>
-        </p:txBody>
-      </p:sp>
-      <p:sp>
-        <p:nvSpPr>
-          <p:cNvPr id="4" name="副标题 2">
-            <a:extLst>
-              <a:ext uri="{FF2B5EF4-FFF2-40B4-BE49-F238E27FC236}">
-                <a16:creationId xmlns:a16="http://schemas.microsoft.com/office/drawing/2014/main" id="{E62A3696-077A-F714-8965-4F16BC2A0D99}"/>
-              </a:ext>
-            </a:extLst>
-          </p:cNvPr>
-          <p:cNvSpPr txBox="1">
-            <a:spLocks/>
-          </p:cNvSpPr>
+            <a:endParaRPr lang="en-GB" altLang="zh-CN" sz="5400" b="1" dirty="0">
+              <a:latin typeface="Times New Roman" panose="02020503050405090304" charset="0"/>
+              <a:cs typeface="Times New Roman" panose="02020503050405090304" charset="0"/>
+            </a:endParaRPr>
+          </a:p>
+          <a:p>
+            <a:endParaRPr lang="en-GB" altLang="zh-CN" b="1" dirty="0">
+              <a:latin typeface="Times New Roman" panose="02020503050405090304" charset="0"/>
+              <a:cs typeface="Times New Roman" panose="02020503050405090304" charset="0"/>
+            </a:endParaRPr>
+          </a:p>
+        </p:txBody>
+      </p:sp>
+      <p:sp>
+        <p:nvSpPr>
+          <p:cNvPr id="4" name="副标题 2"/>
+          <p:cNvSpPr txBox="1"/>
           <p:nvPr/>
         </p:nvSpPr>
         <p:spPr>
@@ -3412,7 +3011,7 @@
               <a:spcBef>
                 <a:spcPts val="1000"/>
               </a:spcBef>
-              <a:buFont typeface="Arial" panose="020B0604020202020204" pitchFamily="34" charset="0"/>
+              <a:buFont typeface="Arial" panose="020B0604020202090204" pitchFamily="34" charset="0"/>
               <a:buNone/>
               <a:defRPr sz="2400" kern="1200">
                 <a:solidFill>
@@ -3430,7 +3029,7 @@
               <a:spcBef>
                 <a:spcPts val="500"/>
               </a:spcBef>
-              <a:buFont typeface="Arial" panose="020B0604020202020204" pitchFamily="34" charset="0"/>
+              <a:buFont typeface="Arial" panose="020B0604020202090204" pitchFamily="34" charset="0"/>
               <a:buNone/>
               <a:defRPr sz="2000" kern="1200">
                 <a:solidFill>
@@ -3448,7 +3047,7 @@
               <a:spcBef>
                 <a:spcPts val="500"/>
               </a:spcBef>
-              <a:buFont typeface="Arial" panose="020B0604020202020204" pitchFamily="34" charset="0"/>
+              <a:buFont typeface="Arial" panose="020B0604020202090204" pitchFamily="34" charset="0"/>
               <a:buNone/>
               <a:defRPr sz="1800" kern="1200">
                 <a:solidFill>
@@ -3466,7 +3065,7 @@
               <a:spcBef>
                 <a:spcPts val="500"/>
               </a:spcBef>
-              <a:buFont typeface="Arial" panose="020B0604020202020204" pitchFamily="34" charset="0"/>
+              <a:buFont typeface="Arial" panose="020B0604020202090204" pitchFamily="34" charset="0"/>
               <a:buNone/>
               <a:defRPr sz="1600" kern="1200">
                 <a:solidFill>
@@ -3484,7 +3083,7 @@
               <a:spcBef>
                 <a:spcPts val="500"/>
               </a:spcBef>
-              <a:buFont typeface="Arial" panose="020B0604020202020204" pitchFamily="34" charset="0"/>
+              <a:buFont typeface="Arial" panose="020B0604020202090204" pitchFamily="34" charset="0"/>
               <a:buNone/>
               <a:defRPr sz="1600" kern="1200">
                 <a:solidFill>
@@ -3502,7 +3101,7 @@
               <a:spcBef>
                 <a:spcPts val="500"/>
               </a:spcBef>
-              <a:buFont typeface="Arial" panose="020B0604020202020204" pitchFamily="34" charset="0"/>
+              <a:buFont typeface="Arial" panose="020B0604020202090204" pitchFamily="34" charset="0"/>
               <a:buNone/>
               <a:defRPr sz="1600" kern="1200">
                 <a:solidFill>
@@ -3520,7 +3119,7 @@
               <a:spcBef>
                 <a:spcPts val="500"/>
               </a:spcBef>
-              <a:buFont typeface="Arial" panose="020B0604020202020204" pitchFamily="34" charset="0"/>
+              <a:buFont typeface="Arial" panose="020B0604020202090204" pitchFamily="34" charset="0"/>
               <a:buNone/>
               <a:defRPr sz="1600" kern="1200">
                 <a:solidFill>
@@ -3538,7 +3137,7 @@
               <a:spcBef>
                 <a:spcPts val="500"/>
               </a:spcBef>
-              <a:buFont typeface="Arial" panose="020B0604020202020204" pitchFamily="34" charset="0"/>
+              <a:buFont typeface="Arial" panose="020B0604020202090204" pitchFamily="34" charset="0"/>
               <a:buNone/>
               <a:defRPr sz="1600" kern="1200">
                 <a:solidFill>
@@ -3556,7 +3155,7 @@
               <a:spcBef>
                 <a:spcPts val="500"/>
               </a:spcBef>
-              <a:buFont typeface="Arial" panose="020B0604020202020204" pitchFamily="34" charset="0"/>
+              <a:buFont typeface="Arial" panose="020B0604020202090204" pitchFamily="34" charset="0"/>
               <a:buNone/>
               <a:defRPr sz="1600" kern="1200">
                 <a:solidFill>
@@ -3571,39 +3170,46 @@
           <a:p>
             <a:r>
               <a:rPr lang="en-US" altLang="zh-CN" sz="1800" dirty="0" err="1">
-                <a:latin typeface="+mn-ea"/>
+                <a:latin typeface="Times New Roman" panose="02020503050405090304" charset="0"/>
+                <a:cs typeface="Times New Roman" panose="02020503050405090304" charset="0"/>
               </a:rPr>
               <a:t>Ruixin</a:t>
             </a:r>
             <a:r>
               <a:rPr lang="zh-CN" altLang="en-US" sz="1800" dirty="0">
-                <a:latin typeface="+mn-ea"/>
+                <a:latin typeface="Times New Roman" panose="02020503050405090304" charset="0"/>
+                <a:cs typeface="Times New Roman" panose="02020503050405090304" charset="0"/>
               </a:rPr>
               <a:t> </a:t>
             </a:r>
             <a:r>
               <a:rPr lang="en-US" altLang="zh-CN" sz="1800" dirty="0">
-                <a:latin typeface="+mn-ea"/>
+                <a:latin typeface="Times New Roman" panose="02020503050405090304" charset="0"/>
+                <a:cs typeface="Times New Roman" panose="02020503050405090304" charset="0"/>
               </a:rPr>
               <a:t>Peng</a:t>
             </a:r>
-          </a:p>
-          <a:p>
-            <a:r>
-              <a:rPr lang="en" altLang="zh-CN" sz="1800" dirty="0">
-                <a:latin typeface="+mn-ea"/>
+            <a:endParaRPr lang="en-US" altLang="zh-CN" sz="1800" dirty="0">
+              <a:latin typeface="Times New Roman" panose="02020503050405090304" charset="0"/>
+              <a:cs typeface="Times New Roman" panose="02020503050405090304" charset="0"/>
+            </a:endParaRPr>
+          </a:p>
+          <a:p>
+            <a:r>
+              <a:rPr lang="en-GB" altLang="zh-CN" sz="1800" dirty="0">
+                <a:latin typeface="Times New Roman" panose="02020503050405090304" charset="0"/>
+                <a:cs typeface="Times New Roman" panose="02020503050405090304" charset="0"/>
               </a:rPr>
               <a:t>May 22, 2026</a:t>
             </a:r>
+            <a:endParaRPr lang="en-GB" altLang="zh-CN" sz="1800" dirty="0">
+              <a:latin typeface="Times New Roman" panose="02020503050405090304" charset="0"/>
+              <a:cs typeface="Times New Roman" panose="02020503050405090304" charset="0"/>
+            </a:endParaRPr>
           </a:p>
         </p:txBody>
       </p:sp>
     </p:spTree>
-    <p:extLst>
-      <p:ext uri="{BB962C8B-B14F-4D97-AF65-F5344CB8AC3E}">
-        <p14:creationId xmlns:p14="http://schemas.microsoft.com/office/powerpoint/2010/main" val="206224287"/>
-      </p:ext>
-    </p:extLst>
   </p:cSld>
   <p:clrMapOvr>
     <a:masterClrMapping/>
@@ -3616,13 +3222,7 @@
   <p:cSld>
     <p:spTree>
       <p:nvGrpSpPr>
-        <p:cNvPr id="1" name="">
-          <a:extLst>
-            <a:ext uri="{FF2B5EF4-FFF2-40B4-BE49-F238E27FC236}">
-              <a16:creationId xmlns:a16="http://schemas.microsoft.com/office/drawing/2014/main" id="{3D15A653-FA9F-2137-9528-BF8CF5312434}"/>
-            </a:ext>
-          </a:extLst>
-        </p:cNvPr>
+        <p:cNvPr id="1" name=""/>
         <p:cNvGrpSpPr/>
         <p:nvPr/>
       </p:nvGrpSpPr>
@@ -3636,20 +3236,14 @@
       </p:grpSpPr>
       <p:sp>
         <p:nvSpPr>
-          <p:cNvPr id="5" name="文本框 4">
-            <a:extLst>
-              <a:ext uri="{FF2B5EF4-FFF2-40B4-BE49-F238E27FC236}">
-                <a16:creationId xmlns:a16="http://schemas.microsoft.com/office/drawing/2014/main" id="{96EA2A3B-7E5A-D67E-32E8-28BEC226ACA9}"/>
-              </a:ext>
-            </a:extLst>
-          </p:cNvPr>
+          <p:cNvPr id="5" name="文本框 4"/>
           <p:cNvSpPr txBox="1"/>
           <p:nvPr/>
         </p:nvSpPr>
         <p:spPr>
           <a:xfrm>
             <a:off x="700268" y="573475"/>
-            <a:ext cx="6099858" cy="523220"/>
+            <a:ext cx="6099858" cy="521970"/>
           </a:xfrm>
           <a:prstGeom prst="rect">
             <a:avLst/>
@@ -3663,28 +3257,29 @@
           <a:lstStyle/>
           <a:p>
             <a:r>
-              <a:rPr lang="en" altLang="zh-CN" sz="2800" b="1" dirty="0"/>
+              <a:rPr lang="en-GB" altLang="zh-CN" sz="2800" b="1" dirty="0">
+                <a:latin typeface="Times New Roman" panose="02020503050405090304" charset="0"/>
+                <a:cs typeface="Times New Roman" panose="02020503050405090304" charset="0"/>
+              </a:rPr>
               <a:t>1.1 Project Skeleton &amp; Toolchain</a:t>
             </a:r>
-          </a:p>
-        </p:txBody>
-      </p:sp>
-      <p:sp>
-        <p:nvSpPr>
-          <p:cNvPr id="7" name="文本框 6">
-            <a:extLst>
-              <a:ext uri="{FF2B5EF4-FFF2-40B4-BE49-F238E27FC236}">
-                <a16:creationId xmlns:a16="http://schemas.microsoft.com/office/drawing/2014/main" id="{650445AA-A4F0-7915-5950-5E10EDAB0121}"/>
-              </a:ext>
-            </a:extLst>
-          </p:cNvPr>
+            <a:endParaRPr lang="en-GB" altLang="zh-CN" sz="2800" b="1" dirty="0">
+              <a:latin typeface="Times New Roman" panose="02020503050405090304" charset="0"/>
+              <a:cs typeface="Times New Roman" panose="02020503050405090304" charset="0"/>
+            </a:endParaRPr>
+          </a:p>
+        </p:txBody>
+      </p:sp>
+      <p:sp>
+        <p:nvSpPr>
+          <p:cNvPr id="7" name="文本框 6"/>
           <p:cNvSpPr txBox="1"/>
           <p:nvPr/>
         </p:nvSpPr>
         <p:spPr>
           <a:xfrm>
             <a:off x="700268" y="2274838"/>
-            <a:ext cx="11380896" cy="3046988"/>
+            <a:ext cx="11380896" cy="2676525"/>
           </a:xfrm>
           <a:prstGeom prst="rect">
             <a:avLst/>
@@ -3698,111 +3293,133 @@
           <a:lstStyle/>
           <a:p>
             <a:pPr marL="342900" indent="-342900">
-              <a:buFont typeface="Arial" panose="020B0604020202020204" pitchFamily="34" charset="0"/>
+              <a:buFont typeface="Arial" panose="020B0604020202090204" pitchFamily="34" charset="0"/>
               <a:buChar char="•"/>
             </a:pPr>
             <a:r>
-              <a:rPr lang="en" altLang="zh-CN" sz="2400" dirty="0">
-                <a:latin typeface="+mn-ea"/>
+              <a:rPr lang="en-GB" altLang="zh-CN" sz="2400" dirty="0">
+                <a:latin typeface="Times New Roman" panose="02020503050405090304" charset="0"/>
+                <a:cs typeface="Times New Roman" panose="02020503050405090304" charset="0"/>
               </a:rPr>
               <a:t>Repo ready —</a:t>
             </a:r>
             <a:r>
               <a:rPr lang="zh-CN" altLang="en-US" sz="2400" dirty="0">
-                <a:latin typeface="+mn-ea"/>
+                <a:latin typeface="Times New Roman" panose="02020503050405090304" charset="0"/>
+                <a:cs typeface="Times New Roman" panose="02020503050405090304" charset="0"/>
               </a:rPr>
               <a:t> </a:t>
             </a:r>
             <a:r>
-              <a:rPr lang="en" altLang="zh-CN" sz="2400" dirty="0">
-                <a:latin typeface="+mn-ea"/>
-              </a:rPr>
-              <a:t>README + plan + Net1.inp + two demo scripts run end-to-end.</a:t>
-            </a:r>
+              <a:rPr lang="en-GB" altLang="zh-CN" sz="2400" dirty="0">
+                <a:latin typeface="Times New Roman" panose="02020503050405090304" charset="0"/>
+                <a:cs typeface="Times New Roman" panose="02020503050405090304" charset="0"/>
+              </a:rPr>
+              <a:t>README + plan + Net1.inp + two demo.</a:t>
+            </a:r>
+            <a:endParaRPr lang="en-GB" altLang="zh-CN" sz="2400" dirty="0">
+              <a:latin typeface="Times New Roman" panose="02020503050405090304" charset="0"/>
+              <a:cs typeface="Times New Roman" panose="02020503050405090304" charset="0"/>
+            </a:endParaRPr>
           </a:p>
           <a:p>
             <a:pPr marL="342900" indent="-342900">
-              <a:buFont typeface="Arial" panose="020B0604020202020204" pitchFamily="34" charset="0"/>
+              <a:buFont typeface="Arial" panose="020B0604020202090204" pitchFamily="34" charset="0"/>
               <a:buChar char="•"/>
             </a:pPr>
-            <a:endParaRPr lang="en" altLang="zh-CN" sz="2400" dirty="0">
-              <a:latin typeface="+mn-ea"/>
+            <a:endParaRPr lang="en-GB" altLang="zh-CN" sz="2400" dirty="0">
+              <a:latin typeface="Times New Roman" panose="02020503050405090304" charset="0"/>
+              <a:cs typeface="Times New Roman" panose="02020503050405090304" charset="0"/>
             </a:endParaRPr>
           </a:p>
           <a:p>
             <a:pPr marL="342900" indent="-342900">
-              <a:buFont typeface="Arial" panose="020B0604020202020204" pitchFamily="34" charset="0"/>
+              <a:buFont typeface="Arial" panose="020B0604020202090204" pitchFamily="34" charset="0"/>
               <a:buChar char="•"/>
             </a:pPr>
             <a:r>
-              <a:rPr lang="en" altLang="zh-CN" sz="2400" dirty="0">
-                <a:latin typeface="+mn-ea"/>
+              <a:rPr lang="en-GB" altLang="zh-CN" sz="2400" dirty="0">
+                <a:latin typeface="Times New Roman" panose="02020503050405090304" charset="0"/>
+                <a:cs typeface="Times New Roman" panose="02020503050405090304" charset="0"/>
               </a:rPr>
               <a:t>Environment ready — Cursor + </a:t>
             </a:r>
             <a:r>
-              <a:rPr lang="en" altLang="zh-CN" sz="2400" dirty="0" err="1">
-                <a:latin typeface="+mn-ea"/>
+              <a:rPr lang="en-GB" altLang="zh-CN" sz="2400" dirty="0" err="1">
+                <a:latin typeface="Times New Roman" panose="02020503050405090304" charset="0"/>
+                <a:cs typeface="Times New Roman" panose="02020503050405090304" charset="0"/>
               </a:rPr>
               <a:t>Conda</a:t>
             </a:r>
             <a:r>
-              <a:rPr lang="en" altLang="zh-CN" sz="2400" dirty="0">
-                <a:latin typeface="+mn-ea"/>
+              <a:rPr lang="en-GB" altLang="zh-CN" sz="2400" dirty="0">
+                <a:latin typeface="Times New Roman" panose="02020503050405090304" charset="0"/>
+                <a:cs typeface="Times New Roman" panose="02020503050405090304" charset="0"/>
               </a:rPr>
               <a:t> cive70058 (Python 3.11, WNTR 1.4, EPANET); </a:t>
             </a:r>
+            <a:endParaRPr lang="en-GB" altLang="zh-CN" sz="2400" dirty="0">
+              <a:latin typeface="Times New Roman" panose="02020503050405090304" charset="0"/>
+              <a:cs typeface="Times New Roman" panose="02020503050405090304" charset="0"/>
+            </a:endParaRPr>
           </a:p>
           <a:p>
             <a:pPr marL="342900" indent="-342900">
-              <a:buFont typeface="Arial" panose="020B0604020202020204" pitchFamily="34" charset="0"/>
+              <a:buFont typeface="Arial" panose="020B0604020202090204" pitchFamily="34" charset="0"/>
               <a:buChar char="•"/>
             </a:pPr>
-            <a:endParaRPr lang="en" altLang="zh-CN" sz="2400" dirty="0">
-              <a:latin typeface="+mn-ea"/>
+            <a:endParaRPr lang="en-GB" altLang="zh-CN" sz="2400" dirty="0">
+              <a:latin typeface="Times New Roman" panose="02020503050405090304" charset="0"/>
+              <a:cs typeface="Times New Roman" panose="02020503050405090304" charset="0"/>
             </a:endParaRPr>
           </a:p>
           <a:p>
             <a:pPr marL="342900" indent="-342900">
-              <a:buFont typeface="Arial" panose="020B0604020202020204" pitchFamily="34" charset="0"/>
+              <a:buFont typeface="Arial" panose="020B0604020202090204" pitchFamily="34" charset="0"/>
               <a:buChar char="•"/>
             </a:pPr>
             <a:r>
-              <a:rPr lang="en" altLang="zh-CN" sz="2400" dirty="0">
-                <a:latin typeface="+mn-ea"/>
+              <a:rPr lang="en-GB" altLang="zh-CN" sz="2400" dirty="0">
+                <a:latin typeface="Times New Roman" panose="02020503050405090304" charset="0"/>
+                <a:cs typeface="Times New Roman" panose="02020503050405090304" charset="0"/>
               </a:rPr>
               <a:t>Version control — Learned Git/GitHub</a:t>
             </a:r>
+            <a:endParaRPr lang="en-GB" altLang="zh-CN" sz="2400" dirty="0">
+              <a:latin typeface="Times New Roman" panose="02020503050405090304" charset="0"/>
+              <a:cs typeface="Times New Roman" panose="02020503050405090304" charset="0"/>
+            </a:endParaRPr>
           </a:p>
           <a:p>
             <a:pPr marL="342900" indent="-342900">
-              <a:buFont typeface="Arial" panose="020B0604020202020204" pitchFamily="34" charset="0"/>
+              <a:buFont typeface="Arial" panose="020B0604020202090204" pitchFamily="34" charset="0"/>
               <a:buChar char="•"/>
             </a:pPr>
-            <a:endParaRPr lang="en" altLang="zh-CN" sz="2400" dirty="0">
-              <a:latin typeface="+mn-ea"/>
+            <a:endParaRPr lang="en-GB" altLang="zh-CN" sz="2400" dirty="0">
+              <a:latin typeface="Times New Roman" panose="02020503050405090304" charset="0"/>
+              <a:cs typeface="Times New Roman" panose="02020503050405090304" charset="0"/>
             </a:endParaRPr>
           </a:p>
           <a:p>
             <a:pPr marL="342900" indent="-342900">
-              <a:buFont typeface="Arial" panose="020B0604020202020204" pitchFamily="34" charset="0"/>
+              <a:buFont typeface="Arial" panose="020B0604020202090204" pitchFamily="34" charset="0"/>
               <a:buChar char="•"/>
             </a:pPr>
             <a:r>
-              <a:rPr lang="en" altLang="zh-CN" sz="2400" dirty="0">
-                <a:latin typeface="+mn-ea"/>
+              <a:rPr lang="en-GB" altLang="zh-CN" sz="2400" dirty="0">
+                <a:latin typeface="Times New Roman" panose="02020503050405090304" charset="0"/>
+                <a:cs typeface="Times New Roman" panose="02020503050405090304" charset="0"/>
               </a:rPr>
               <a:t>Thesis template ready</a:t>
             </a:r>
+            <a:endParaRPr lang="en-GB" altLang="zh-CN" sz="2400" dirty="0">
+              <a:latin typeface="Times New Roman" panose="02020503050405090304" charset="0"/>
+              <a:cs typeface="Times New Roman" panose="02020503050405090304" charset="0"/>
+            </a:endParaRPr>
           </a:p>
         </p:txBody>
       </p:sp>
     </p:spTree>
-    <p:extLst>
-      <p:ext uri="{BB962C8B-B14F-4D97-AF65-F5344CB8AC3E}">
-        <p14:creationId xmlns:p14="http://schemas.microsoft.com/office/powerpoint/2010/main" val="2183956477"/>
-      </p:ext>
-    </p:extLst>
   </p:cSld>
   <p:clrMapOvr>
     <a:masterClrMapping/>
@@ -3815,13 +3432,7 @@
   <p:cSld>
     <p:spTree>
       <p:nvGrpSpPr>
-        <p:cNvPr id="1" name="">
-          <a:extLst>
-            <a:ext uri="{FF2B5EF4-FFF2-40B4-BE49-F238E27FC236}">
-              <a16:creationId xmlns:a16="http://schemas.microsoft.com/office/drawing/2014/main" id="{E77823D1-42F1-3693-E382-BCE551CF8BA6}"/>
-            </a:ext>
-          </a:extLst>
-        </p:cNvPr>
+        <p:cNvPr id="1" name=""/>
         <p:cNvGrpSpPr/>
         <p:nvPr/>
       </p:nvGrpSpPr>
@@ -3835,20 +3446,14 @@
       </p:grpSpPr>
       <p:sp>
         <p:nvSpPr>
-          <p:cNvPr id="4" name="文本框 3">
-            <a:extLst>
-              <a:ext uri="{FF2B5EF4-FFF2-40B4-BE49-F238E27FC236}">
-                <a16:creationId xmlns:a16="http://schemas.microsoft.com/office/drawing/2014/main" id="{D775D434-6A92-ED01-E9B9-109B2ABFD60F}"/>
-              </a:ext>
-            </a:extLst>
-          </p:cNvPr>
+          <p:cNvPr id="4" name="文本框 3"/>
           <p:cNvSpPr txBox="1"/>
           <p:nvPr/>
         </p:nvSpPr>
         <p:spPr>
           <a:xfrm>
             <a:off x="734289" y="522328"/>
-            <a:ext cx="8548255" cy="523220"/>
+            <a:ext cx="8548255" cy="521970"/>
           </a:xfrm>
           <a:prstGeom prst="rect">
             <a:avLst/>
@@ -3862,47 +3467,54 @@
           <a:lstStyle/>
           <a:p>
             <a:r>
-              <a:rPr lang="en-US" altLang="zh-CN" sz="2800" b="1" dirty="0"/>
+              <a:rPr lang="en-US" altLang="zh-CN" sz="2800" b="1" dirty="0">
+                <a:latin typeface="Times New Roman" panose="02020503050405090304" charset="0"/>
+                <a:cs typeface="Times New Roman" panose="02020503050405090304" charset="0"/>
+              </a:rPr>
               <a:t>1.2</a:t>
             </a:r>
             <a:r>
-              <a:rPr lang="zh-CN" altLang="en-US" sz="2800" b="1" dirty="0"/>
+              <a:rPr lang="zh-CN" altLang="en-US" sz="2800" b="1" dirty="0">
+                <a:latin typeface="Times New Roman" panose="02020503050405090304" charset="0"/>
+                <a:cs typeface="Times New Roman" panose="02020503050405090304" charset="0"/>
+              </a:rPr>
               <a:t> </a:t>
             </a:r>
             <a:r>
-              <a:rPr lang="en" altLang="zh-CN" sz="2800" b="1" dirty="0"/>
+              <a:rPr lang="en-GB" altLang="zh-CN" sz="2800" b="1" dirty="0">
+                <a:latin typeface="Times New Roman" panose="02020503050405090304" charset="0"/>
+                <a:cs typeface="Times New Roman" panose="02020503050405090304" charset="0"/>
+              </a:rPr>
               <a:t>Model Demo (baseline simulation</a:t>
             </a:r>
             <a:r>
-              <a:rPr lang="en-US" altLang="zh-CN" sz="2800" b="1" dirty="0"/>
+              <a:rPr lang="en-US" altLang="zh-CN" sz="2800" b="1" dirty="0">
+                <a:latin typeface="Times New Roman" panose="02020503050405090304" charset="0"/>
+                <a:cs typeface="Times New Roman" panose="02020503050405090304" charset="0"/>
+              </a:rPr>
               <a:t>)</a:t>
             </a:r>
             <a:r>
-              <a:rPr lang="en" altLang="zh-CN" sz="2800" b="1" dirty="0"/>
+              <a:rPr lang="en-GB" altLang="zh-CN" sz="2800" b="1" dirty="0">
+                <a:latin typeface="Times New Roman" panose="02020503050405090304" charset="0"/>
+                <a:cs typeface="Times New Roman" panose="02020503050405090304" charset="0"/>
+              </a:rPr>
               <a:t> </a:t>
             </a:r>
+            <a:endParaRPr lang="en-GB" altLang="zh-CN" sz="2800" b="1" dirty="0">
+              <a:latin typeface="Times New Roman" panose="02020503050405090304" charset="0"/>
+              <a:cs typeface="Times New Roman" panose="02020503050405090304" charset="0"/>
+            </a:endParaRPr>
           </a:p>
         </p:txBody>
       </p:sp>
       <p:graphicFrame>
         <p:nvGraphicFramePr>
-          <p:cNvPr id="5" name="表格 4">
-            <a:extLst>
-              <a:ext uri="{FF2B5EF4-FFF2-40B4-BE49-F238E27FC236}">
-                <a16:creationId xmlns:a16="http://schemas.microsoft.com/office/drawing/2014/main" id="{25454024-EE96-C009-B6B9-00B79E1789AF}"/>
-              </a:ext>
-            </a:extLst>
-          </p:cNvPr>
+          <p:cNvPr id="5" name="表格 4"/>
           <p:cNvGraphicFramePr>
             <a:graphicFrameLocks noGrp="1"/>
           </p:cNvGraphicFramePr>
-          <p:nvPr>
-            <p:extLst>
-              <p:ext uri="{D42A27DB-BD31-4B8C-83A1-F6EECF244321}">
-                <p14:modId xmlns:p14="http://schemas.microsoft.com/office/powerpoint/2010/main" val="102370082"/>
-              </p:ext>
-            </p:extLst>
-          </p:nvPr>
+          <p:nvPr/>
         </p:nvGraphicFramePr>
         <p:xfrm>
           <a:off x="944416" y="1737822"/>
@@ -3915,20 +3527,8 @@
                 <a:tableStyleId>{5C22544A-7EE6-4342-B048-85BDC9FD1C3A}</a:tableStyleId>
               </a:tblPr>
               <a:tblGrid>
-                <a:gridCol w="5090392">
-                  <a:extLst>
-                    <a:ext uri="{9D8B030D-6E8A-4147-A177-3AD203B41FA5}">
-                      <a16:colId xmlns:a16="http://schemas.microsoft.com/office/drawing/2014/main" val="3926177652"/>
-                    </a:ext>
-                  </a:extLst>
-                </a:gridCol>
-                <a:gridCol w="5090392">
-                  <a:extLst>
-                    <a:ext uri="{9D8B030D-6E8A-4147-A177-3AD203B41FA5}">
-                      <a16:colId xmlns:a16="http://schemas.microsoft.com/office/drawing/2014/main" val="2386886406"/>
-                    </a:ext>
-                  </a:extLst>
-                </a:gridCol>
+                <a:gridCol w="5090392"/>
+                <a:gridCol w="5090392"/>
               </a:tblGrid>
               <a:tr h="370840">
                 <a:tc>
@@ -3950,14 +3550,19 @@
                         <a:buSzTx/>
                         <a:buFontTx/>
                         <a:buNone/>
-                        <a:tabLst/>
                         <a:defRPr/>
                       </a:pPr>
                       <a:r>
-                        <a:rPr lang="en" altLang="zh-CN" sz="2800" dirty="0"/>
+                        <a:rPr lang="en-GB" altLang="zh-CN" sz="2800" dirty="0">
+                          <a:latin typeface="Times New Roman Regular" panose="02020503050405090304" charset="0"/>
+                          <a:cs typeface="Times New Roman Regular" panose="02020503050405090304" charset="0"/>
+                        </a:rPr>
                         <a:t>Modified Net1</a:t>
                       </a:r>
-                      <a:endParaRPr lang="zh-CN" altLang="en-US" sz="2800" dirty="0"/>
+                      <a:endParaRPr lang="en-GB" altLang="zh-CN" sz="2800" dirty="0">
+                        <a:latin typeface="Times New Roman Regular" panose="02020503050405090304" charset="0"/>
+                        <a:cs typeface="Times New Roman Regular" panose="02020503050405090304" charset="0"/>
+                      </a:endParaRPr>
                     </a:p>
                   </a:txBody>
                   <a:tcPr/>
@@ -3981,31 +3586,37 @@
                         <a:buSzTx/>
                         <a:buFontTx/>
                         <a:buNone/>
-                        <a:tabLst/>
                         <a:defRPr/>
                       </a:pPr>
                       <a:r>
-                        <a:rPr lang="en" altLang="zh-CN" sz="2800" b="1" dirty="0"/>
+                        <a:rPr lang="en-GB" altLang="zh-CN" sz="2800" b="1" dirty="0">
+                          <a:latin typeface="Times New Roman Regular" panose="02020503050405090304" charset="0"/>
+                          <a:cs typeface="Times New Roman Regular" panose="02020503050405090304" charset="0"/>
+                        </a:rPr>
                         <a:t>Official Net1.inp</a:t>
                       </a:r>
                       <a:r>
-                        <a:rPr lang="zh-CN" altLang="en-US" sz="2800" b="1" dirty="0"/>
+                        <a:rPr lang="zh-CN" altLang="en-US" sz="2800" b="1" dirty="0">
+                          <a:latin typeface="Times New Roman Regular" panose="02020503050405090304" charset="0"/>
+                          <a:cs typeface="Times New Roman Regular" panose="02020503050405090304" charset="0"/>
+                        </a:rPr>
                         <a:t> </a:t>
                       </a:r>
                       <a:r>
-                        <a:rPr lang="en-US" altLang="zh-CN" sz="2800" b="1" dirty="0"/>
+                        <a:rPr lang="en-US" altLang="zh-CN" sz="2800" b="1" dirty="0">
+                          <a:latin typeface="Times New Roman Regular" panose="02020503050405090304" charset="0"/>
+                          <a:cs typeface="Times New Roman Regular" panose="02020503050405090304" charset="0"/>
+                        </a:rPr>
                         <a:t>(original)</a:t>
                       </a:r>
-                      <a:endParaRPr lang="en" altLang="zh-CN" sz="2800" dirty="0"/>
+                      <a:endParaRPr lang="en-GB" altLang="zh-CN" sz="2800" dirty="0">
+                        <a:latin typeface="Times New Roman Regular" panose="02020503050405090304" charset="0"/>
+                        <a:cs typeface="Times New Roman Regular" panose="02020503050405090304" charset="0"/>
+                      </a:endParaRPr>
                     </a:p>
                   </a:txBody>
                   <a:tcPr/>
                 </a:tc>
-                <a:extLst>
-                  <a:ext uri="{0D108BD9-81ED-4DB2-BD59-A6C34878D82A}">
-                    <a16:rowId xmlns:a16="http://schemas.microsoft.com/office/drawing/2014/main" val="4248265970"/>
-                  </a:ext>
-                </a:extLst>
               </a:tr>
               <a:tr h="370840">
                 <a:tc>
@@ -4027,17 +3638,26 @@
                         <a:buSzTx/>
                         <a:buFontTx/>
                         <a:buNone/>
-                        <a:tabLst/>
                         <a:defRPr/>
                       </a:pPr>
                       <a:r>
-                        <a:rPr lang="en-US" altLang="zh-CN" sz="2800" dirty="0"/>
+                        <a:rPr lang="en-US" altLang="zh-CN" sz="2800" dirty="0">
+                          <a:latin typeface="Times New Roman Regular" panose="02020503050405090304" charset="0"/>
+                          <a:cs typeface="Times New Roman Regular" panose="02020503050405090304" charset="0"/>
+                        </a:rPr>
                         <a:t>w</a:t>
                       </a:r>
                       <a:r>
-                        <a:rPr lang="en" altLang="zh-CN" sz="2800" dirty="0"/>
+                        <a:rPr lang="en-GB" altLang="zh-CN" sz="2800" dirty="0">
+                          <a:latin typeface="Times New Roman Regular" panose="02020503050405090304" charset="0"/>
+                          <a:cs typeface="Times New Roman Regular" panose="02020503050405090304" charset="0"/>
+                        </a:rPr>
                         <a:t>all off</a:t>
                       </a:r>
+                      <a:endParaRPr lang="en-GB" altLang="zh-CN" sz="2800" dirty="0">
+                        <a:latin typeface="Times New Roman Regular" panose="02020503050405090304" charset="0"/>
+                        <a:cs typeface="Times New Roman Regular" panose="02020503050405090304" charset="0"/>
+                      </a:endParaRPr>
                     </a:p>
                   </a:txBody>
                   <a:tcPr/>
@@ -4061,22 +3681,23 @@
                         <a:buSzTx/>
                         <a:buFontTx/>
                         <a:buNone/>
-                        <a:tabLst/>
                         <a:defRPr/>
                       </a:pPr>
                       <a:r>
-                        <a:rPr lang="en" altLang="zh-CN" sz="2800" dirty="0"/>
+                        <a:rPr lang="en-GB" altLang="zh-CN" sz="2800" dirty="0">
+                          <a:latin typeface="Times New Roman Regular" panose="02020503050405090304" charset="0"/>
+                          <a:cs typeface="Times New Roman Regular" panose="02020503050405090304" charset="0"/>
+                        </a:rPr>
                         <a:t>bulk + wall on</a:t>
                       </a:r>
+                      <a:endParaRPr lang="en-GB" altLang="zh-CN" sz="2800" dirty="0">
+                        <a:latin typeface="Times New Roman Regular" panose="02020503050405090304" charset="0"/>
+                        <a:cs typeface="Times New Roman Regular" panose="02020503050405090304" charset="0"/>
+                      </a:endParaRPr>
                     </a:p>
                   </a:txBody>
                   <a:tcPr/>
                 </a:tc>
-                <a:extLst>
-                  <a:ext uri="{0D108BD9-81ED-4DB2-BD59-A6C34878D82A}">
-                    <a16:rowId xmlns:a16="http://schemas.microsoft.com/office/drawing/2014/main" val="1584830150"/>
-                  </a:ext>
-                </a:extLst>
               </a:tr>
               <a:tr h="370840">
                 <a:tc>
@@ -4098,17 +3719,26 @@
                         <a:buSzTx/>
                         <a:buFontTx/>
                         <a:buNone/>
-                        <a:tabLst/>
                         <a:defRPr/>
                       </a:pPr>
                       <a:r>
-                        <a:rPr lang="en-US" altLang="zh-CN" sz="2800" dirty="0"/>
+                        <a:rPr lang="en-US" altLang="zh-CN" sz="2800" dirty="0">
+                          <a:latin typeface="Times New Roman Regular" panose="02020503050405090304" charset="0"/>
+                          <a:cs typeface="Times New Roman Regular" panose="02020503050405090304" charset="0"/>
+                        </a:rPr>
                         <a:t>j</a:t>
                       </a:r>
                       <a:r>
-                        <a:rPr lang="en" altLang="zh-CN" sz="2800" dirty="0"/>
+                        <a:rPr lang="en-GB" altLang="zh-CN" sz="2800" dirty="0">
+                          <a:latin typeface="Times New Roman Regular" panose="02020503050405090304" charset="0"/>
+                          <a:cs typeface="Times New Roman Regular" panose="02020503050405090304" charset="0"/>
+                        </a:rPr>
                         <a:t>unction initial Cl = 0</a:t>
                       </a:r>
+                      <a:endParaRPr lang="en-GB" altLang="zh-CN" sz="2800" dirty="0">
+                        <a:latin typeface="Times New Roman Regular" panose="02020503050405090304" charset="0"/>
+                        <a:cs typeface="Times New Roman Regular" panose="02020503050405090304" charset="0"/>
+                      </a:endParaRPr>
                     </a:p>
                   </a:txBody>
                   <a:tcPr/>
@@ -4132,30 +3762,47 @@
                         <a:buSzTx/>
                         <a:buFontTx/>
                         <a:buNone/>
-                        <a:tabLst/>
                         <a:defRPr/>
                       </a:pPr>
                       <a:r>
-                        <a:rPr lang="en" altLang="zh-CN" sz="2800" dirty="0"/>
+                        <a:rPr lang="en-GB" altLang="zh-CN" sz="2800" dirty="0">
+                          <a:latin typeface="Times New Roman Regular" panose="02020503050405090304" charset="0"/>
+                          <a:cs typeface="Times New Roman Regular" panose="02020503050405090304" charset="0"/>
+                        </a:rPr>
                         <a:t>junction initial Cl = 0</a:t>
                       </a:r>
                       <a:r>
-                        <a:rPr lang="en-US" altLang="zh-CN" sz="2800" dirty="0"/>
+                        <a:rPr lang="en-US" altLang="zh-CN" sz="2800" dirty="0">
+                          <a:latin typeface="Times New Roman Regular" panose="02020503050405090304" charset="0"/>
+                          <a:cs typeface="Times New Roman Regular" panose="02020503050405090304" charset="0"/>
+                        </a:rPr>
                         <a:t>.5</a:t>
                       </a:r>
                       <a:r>
-                        <a:rPr lang="zh-CN" altLang="en-US" sz="2800" dirty="0"/>
+                        <a:rPr lang="zh-CN" altLang="en-US" sz="2800" dirty="0">
+                          <a:latin typeface="Times New Roman Regular" panose="02020503050405090304" charset="0"/>
+                          <a:cs typeface="Times New Roman Regular" panose="02020503050405090304" charset="0"/>
+                        </a:rPr>
                         <a:t> </a:t>
                       </a:r>
                       <a:r>
-                        <a:rPr lang="en-US" altLang="zh-CN" sz="2800" dirty="0"/>
+                        <a:rPr lang="en-US" altLang="zh-CN" sz="2800" dirty="0">
+                          <a:latin typeface="Times New Roman Regular" panose="02020503050405090304" charset="0"/>
+                          <a:cs typeface="Times New Roman Regular" panose="02020503050405090304" charset="0"/>
+                        </a:rPr>
                         <a:t>mg/L</a:t>
                       </a:r>
                       <a:r>
-                        <a:rPr lang="zh-CN" altLang="en-US" sz="2800" dirty="0"/>
+                        <a:rPr lang="zh-CN" altLang="en-US" sz="2800" dirty="0">
+                          <a:latin typeface="Times New Roman Regular" panose="02020503050405090304" charset="0"/>
+                          <a:cs typeface="Times New Roman Regular" panose="02020503050405090304" charset="0"/>
+                        </a:rPr>
                         <a:t> </a:t>
                       </a:r>
-                      <a:endParaRPr lang="en-US" altLang="zh-CN" sz="2800" dirty="0"/>
+                      <a:endParaRPr lang="en-US" altLang="zh-CN" sz="2800" dirty="0">
+                        <a:latin typeface="Times New Roman Regular" panose="02020503050405090304" charset="0"/>
+                        <a:cs typeface="Times New Roman Regular" panose="02020503050405090304" charset="0"/>
+                      </a:endParaRPr>
                     </a:p>
                     <a:p>
                       <a:pPr marL="0" marR="0" lvl="0" indent="0" algn="l" defTabSz="914400" rtl="0" eaLnBrk="1" fontAlgn="auto" latinLnBrk="0" hangingPunct="1">
@@ -4172,7 +3819,6 @@
                         <a:buSzTx/>
                         <a:buFontTx/>
                         <a:buNone/>
-                        <a:tabLst/>
                         <a:defRPr/>
                       </a:pPr>
                       <a:r>
@@ -4180,30 +3826,38 @@
                           <a:solidFill>
                             <a:srgbClr val="FF0000"/>
                           </a:solidFill>
+                          <a:latin typeface="Times New Roman Regular" panose="02020503050405090304" charset="0"/>
+                          <a:cs typeface="Times New Roman Regular" panose="02020503050405090304" charset="0"/>
                         </a:rPr>
                         <a:t>(</a:t>
                       </a:r>
                       <a:r>
-                        <a:rPr lang="en" altLang="zh-CN" sz="2000" dirty="0">
+                        <a:rPr lang="en-GB" altLang="zh-CN" sz="2000" dirty="0">
                           <a:solidFill>
                             <a:srgbClr val="FF0000"/>
                           </a:solidFill>
+                          <a:latin typeface="Times New Roman Regular" panose="02020503050405090304" charset="0"/>
+                          <a:cs typeface="Times New Roman Regular" panose="02020503050405090304" charset="0"/>
                         </a:rPr>
                         <a:t>WNTR </a:t>
                       </a:r>
                       <a:r>
-                        <a:rPr lang="en" altLang="zh-CN" sz="2000" dirty="0" err="1">
+                        <a:rPr lang="en-GB" altLang="zh-CN" sz="2000" dirty="0" err="1">
                           <a:solidFill>
                             <a:srgbClr val="FF0000"/>
                           </a:solidFill>
+                          <a:latin typeface="Times New Roman Regular" panose="02020503050405090304" charset="0"/>
+                          <a:cs typeface="Times New Roman Regular" panose="02020503050405090304" charset="0"/>
                         </a:rPr>
                         <a:t>initial_quality</a:t>
                       </a:r>
                       <a:r>
-                        <a:rPr lang="en" altLang="zh-CN" sz="2000" dirty="0">
+                        <a:rPr lang="en-GB" altLang="zh-CN" sz="2000" dirty="0">
                           <a:solidFill>
                             <a:srgbClr val="FF0000"/>
                           </a:solidFill>
+                          <a:latin typeface="Times New Roman Regular" panose="02020503050405090304" charset="0"/>
+                          <a:cs typeface="Times New Roman Regular" panose="02020503050405090304" charset="0"/>
                         </a:rPr>
                         <a:t> units (kg/m³ → mg/L for display</a:t>
                       </a:r>
@@ -4212,6 +3866,8 @@
                           <a:solidFill>
                             <a:srgbClr val="FF0000"/>
                           </a:solidFill>
+                          <a:latin typeface="Times New Roman Regular" panose="02020503050405090304" charset="0"/>
+                          <a:cs typeface="Times New Roman Regular" panose="02020503050405090304" charset="0"/>
                         </a:rPr>
                         <a:t> </a:t>
                       </a:r>
@@ -4220,14 +3876,18 @@
                           <a:solidFill>
                             <a:srgbClr val="FF0000"/>
                           </a:solidFill>
+                          <a:latin typeface="Times New Roman Regular" panose="02020503050405090304" charset="0"/>
+                          <a:cs typeface="Times New Roman Regular" panose="02020503050405090304" charset="0"/>
                         </a:rPr>
                         <a:t>?</a:t>
                       </a:r>
                       <a:r>
-                        <a:rPr lang="en" altLang="zh-CN" sz="2000" dirty="0">
+                        <a:rPr lang="en-GB" altLang="zh-CN" sz="2000" dirty="0">
                           <a:solidFill>
                             <a:srgbClr val="FF0000"/>
                           </a:solidFill>
+                          <a:latin typeface="Times New Roman Regular" panose="02020503050405090304" charset="0"/>
+                          <a:cs typeface="Times New Roman Regular" panose="02020503050405090304" charset="0"/>
                         </a:rPr>
                         <a:t>)</a:t>
                       </a:r>
@@ -4236,34 +3896,28 @@
                           <a:solidFill>
                             <a:srgbClr val="FF0000"/>
                           </a:solidFill>
+                          <a:latin typeface="Times New Roman Regular" panose="02020503050405090304" charset="0"/>
+                          <a:cs typeface="Times New Roman Regular" panose="02020503050405090304" charset="0"/>
                         </a:rPr>
                         <a:t>)</a:t>
                       </a:r>
-                      <a:endParaRPr lang="en" altLang="zh-CN" sz="2000" dirty="0">
+                      <a:endParaRPr lang="en-GB" altLang="zh-CN" sz="2000" dirty="0">
                         <a:solidFill>
                           <a:srgbClr val="FF0000"/>
                         </a:solidFill>
+                        <a:latin typeface="Times New Roman Regular" panose="02020503050405090304" charset="0"/>
+                        <a:cs typeface="Times New Roman Regular" panose="02020503050405090304" charset="0"/>
                       </a:endParaRPr>
                     </a:p>
                   </a:txBody>
                   <a:tcPr/>
                 </a:tc>
-                <a:extLst>
-                  <a:ext uri="{0D108BD9-81ED-4DB2-BD59-A6C34878D82A}">
-                    <a16:rowId xmlns:a16="http://schemas.microsoft.com/office/drawing/2014/main" val="712365724"/>
-                  </a:ext>
-                </a:extLst>
               </a:tr>
             </a:tbl>
           </a:graphicData>
         </a:graphic>
       </p:graphicFrame>
     </p:spTree>
-    <p:extLst>
-      <p:ext uri="{BB962C8B-B14F-4D97-AF65-F5344CB8AC3E}">
-        <p14:creationId xmlns:p14="http://schemas.microsoft.com/office/powerpoint/2010/main" val="704518107"/>
-      </p:ext>
-    </p:extLst>
   </p:cSld>
   <p:clrMapOvr>
     <a:masterClrMapping/>
@@ -4276,13 +3930,7 @@
   <p:cSld>
     <p:spTree>
       <p:nvGrpSpPr>
-        <p:cNvPr id="1" name="">
-          <a:extLst>
-            <a:ext uri="{FF2B5EF4-FFF2-40B4-BE49-F238E27FC236}">
-              <a16:creationId xmlns:a16="http://schemas.microsoft.com/office/drawing/2014/main" id="{E04C09CA-F7B9-20EB-8749-439067B528BA}"/>
-            </a:ext>
-          </a:extLst>
-        </p:cNvPr>
+        <p:cNvPr id="1" name=""/>
         <p:cNvGrpSpPr/>
         <p:nvPr/>
       </p:nvGrpSpPr>
@@ -4296,20 +3944,14 @@
       </p:grpSpPr>
       <p:sp>
         <p:nvSpPr>
-          <p:cNvPr id="6" name="文本框 5">
-            <a:extLst>
-              <a:ext uri="{FF2B5EF4-FFF2-40B4-BE49-F238E27FC236}">
-                <a16:creationId xmlns:a16="http://schemas.microsoft.com/office/drawing/2014/main" id="{59F9D0CE-F651-8600-BE34-8C297D538ABC}"/>
-              </a:ext>
-            </a:extLst>
-          </p:cNvPr>
+          <p:cNvPr id="6" name="文本框 5"/>
           <p:cNvSpPr txBox="1"/>
           <p:nvPr/>
         </p:nvSpPr>
         <p:spPr>
           <a:xfrm>
             <a:off x="110834" y="305351"/>
-            <a:ext cx="8548255" cy="523220"/>
+            <a:ext cx="8548255" cy="521970"/>
           </a:xfrm>
           <a:prstGeom prst="rect">
             <a:avLst/>
@@ -4323,57 +3965,78 @@
           <a:lstStyle/>
           <a:p>
             <a:r>
-              <a:rPr lang="en-US" altLang="zh-CN" sz="2800" b="1" dirty="0"/>
+              <a:rPr lang="en-US" altLang="zh-CN" sz="2800" b="1" dirty="0">
+                <a:latin typeface="Times New Roman" panose="02020503050405090304" charset="0"/>
+                <a:cs typeface="Times New Roman" panose="02020503050405090304" charset="0"/>
+              </a:rPr>
               <a:t>1.2</a:t>
             </a:r>
             <a:r>
-              <a:rPr lang="zh-CN" altLang="en-US" sz="2800" b="1" dirty="0"/>
+              <a:rPr lang="zh-CN" altLang="en-US" sz="2800" b="1" dirty="0">
+                <a:latin typeface="Times New Roman" panose="02020503050405090304" charset="0"/>
+                <a:cs typeface="Times New Roman" panose="02020503050405090304" charset="0"/>
+              </a:rPr>
               <a:t> </a:t>
             </a:r>
             <a:r>
-              <a:rPr lang="en" altLang="zh-CN" sz="2800" b="1" dirty="0"/>
+              <a:rPr lang="en-GB" altLang="zh-CN" sz="2800" b="1" dirty="0">
+                <a:latin typeface="Times New Roman" panose="02020503050405090304" charset="0"/>
+                <a:cs typeface="Times New Roman" panose="02020503050405090304" charset="0"/>
+              </a:rPr>
               <a:t>Model Demo </a:t>
             </a:r>
             <a:r>
-              <a:rPr lang="en-US" altLang="zh-CN" sz="2800" b="1" dirty="0"/>
+              <a:rPr lang="en-US" altLang="zh-CN" sz="2800" b="1" dirty="0">
+                <a:latin typeface="Times New Roman" panose="02020503050405090304" charset="0"/>
+                <a:cs typeface="Times New Roman" panose="02020503050405090304" charset="0"/>
+              </a:rPr>
               <a:t>results</a:t>
             </a:r>
             <a:r>
-              <a:rPr lang="zh-CN" altLang="en-US" sz="2800" b="1" dirty="0"/>
+              <a:rPr lang="zh-CN" altLang="en-US" sz="2800" b="1" dirty="0">
+                <a:latin typeface="Times New Roman" panose="02020503050405090304" charset="0"/>
+                <a:cs typeface="Times New Roman" panose="02020503050405090304" charset="0"/>
+              </a:rPr>
               <a:t> </a:t>
             </a:r>
             <a:r>
-              <a:rPr lang="en-US" altLang="zh-CN" sz="2800" b="1" dirty="0"/>
+              <a:rPr lang="en-US" altLang="zh-CN" sz="2800" b="1" dirty="0">
+                <a:latin typeface="Times New Roman" panose="02020503050405090304" charset="0"/>
+                <a:cs typeface="Times New Roman" panose="02020503050405090304" charset="0"/>
+              </a:rPr>
               <a:t>(</a:t>
             </a:r>
             <a:r>
-              <a:rPr lang="en" altLang="zh-CN" sz="2800" b="1" dirty="0"/>
+              <a:rPr lang="en-GB" altLang="zh-CN" sz="2800" b="1" dirty="0">
+                <a:latin typeface="Times New Roman" panose="02020503050405090304" charset="0"/>
+                <a:cs typeface="Times New Roman" panose="02020503050405090304" charset="0"/>
+              </a:rPr>
               <a:t>Modified Net1</a:t>
             </a:r>
             <a:r>
-              <a:rPr lang="en-US" altLang="zh-CN" sz="2800" b="1" dirty="0"/>
+              <a:rPr lang="en-US" altLang="zh-CN" sz="2800" b="1" dirty="0">
+                <a:latin typeface="Times New Roman" panose="02020503050405090304" charset="0"/>
+                <a:cs typeface="Times New Roman" panose="02020503050405090304" charset="0"/>
+              </a:rPr>
               <a:t>)</a:t>
             </a:r>
-            <a:endParaRPr lang="en" altLang="zh-CN" sz="2800" b="1" dirty="0"/>
+            <a:endParaRPr lang="en-GB" altLang="zh-CN" sz="2800" b="1" dirty="0">
+              <a:latin typeface="Times New Roman" panose="02020503050405090304" charset="0"/>
+              <a:cs typeface="Times New Roman" panose="02020503050405090304" charset="0"/>
+            </a:endParaRPr>
           </a:p>
         </p:txBody>
       </p:sp>
       <p:pic>
         <p:nvPicPr>
-          <p:cNvPr id="11" name="图片 10" descr="图表, 折线图&#10;&#10;AI 生成的内容可能不正确。">
-            <a:extLst>
-              <a:ext uri="{FF2B5EF4-FFF2-40B4-BE49-F238E27FC236}">
-                <a16:creationId xmlns:a16="http://schemas.microsoft.com/office/drawing/2014/main" id="{ED40C2B4-3300-ECC4-D938-57E5F88A2AEF}"/>
-              </a:ext>
-            </a:extLst>
-          </p:cNvPr>
+          <p:cNvPr id="11" name="图片 10" descr="图表, 折线图&#10;&#10;AI 生成的内容可能不正确。"/>
           <p:cNvPicPr>
             <a:picLocks noChangeAspect="1"/>
           </p:cNvPicPr>
           <p:nvPr/>
         </p:nvPicPr>
         <p:blipFill>
-          <a:blip r:embed="rId2"/>
+          <a:blip r:embed="rId1"/>
           <a:stretch>
             <a:fillRect/>
           </a:stretch>
@@ -4390,20 +4053,14 @@
       </p:pic>
       <p:sp>
         <p:nvSpPr>
-          <p:cNvPr id="17" name="文本框 16">
-            <a:extLst>
-              <a:ext uri="{FF2B5EF4-FFF2-40B4-BE49-F238E27FC236}">
-                <a16:creationId xmlns:a16="http://schemas.microsoft.com/office/drawing/2014/main" id="{A4C60791-C04E-0244-9197-3273C42DE3FF}"/>
-              </a:ext>
-            </a:extLst>
-          </p:cNvPr>
+          <p:cNvPr id="17" name="文本框 16"/>
           <p:cNvSpPr txBox="1"/>
           <p:nvPr/>
         </p:nvSpPr>
         <p:spPr>
           <a:xfrm>
             <a:off x="5978240" y="5278031"/>
-            <a:ext cx="6102926" cy="697627"/>
+            <a:ext cx="6102926" cy="683895"/>
           </a:xfrm>
           <a:prstGeom prst="rect">
             <a:avLst/>
@@ -4423,16 +4080,22 @@
               <a:spcAft>
                 <a:spcPts val="150"/>
               </a:spcAft>
-              <a:buFont typeface="Arial" panose="020B0604020202020204" pitchFamily="34" charset="0"/>
+              <a:buFont typeface="Arial" panose="020B0604020202090204" pitchFamily="34" charset="0"/>
               <a:buChar char="•"/>
             </a:pPr>
             <a:r>
-              <a:rPr lang="en" altLang="zh-CN" b="0" i="0" dirty="0">
+              <a:rPr lang="en-GB" altLang="zh-CN" b="0" i="0" dirty="0">
                 <a:effectLst/>
-                <a:latin typeface="-apple-system"/>
+                <a:latin typeface="Times New Roman" panose="02020503050405090304" charset="0"/>
+                <a:cs typeface="Times New Roman" panose="02020503050405090304" charset="0"/>
               </a:rPr>
               <a:t>Around 13 h, node 10 drops ~10 m: pump OFF (tank &gt; 140 ft). </a:t>
             </a:r>
+            <a:endParaRPr lang="en-GB" altLang="zh-CN" b="0" i="0" dirty="0">
+              <a:effectLst/>
+              <a:latin typeface="Times New Roman" panose="02020503050405090304" charset="0"/>
+              <a:cs typeface="Times New Roman" panose="02020503050405090304" charset="0"/>
+            </a:endParaRPr>
           </a:p>
           <a:p>
             <a:pPr algn="l">
@@ -4442,35 +4105,35 @@
               <a:spcAft>
                 <a:spcPts val="150"/>
               </a:spcAft>
-              <a:buFont typeface="Arial" panose="020B0604020202020204" pitchFamily="34" charset="0"/>
+              <a:buFont typeface="Arial" panose="020B0604020202090204" pitchFamily="34" charset="0"/>
               <a:buChar char="•"/>
             </a:pPr>
             <a:r>
-              <a:rPr lang="en" altLang="zh-CN" b="0" i="0" dirty="0">
+              <a:rPr lang="en-GB" altLang="zh-CN" b="0" i="0" dirty="0">
                 <a:effectLst/>
-                <a:latin typeface="-apple-system"/>
+                <a:latin typeface="Times New Roman" panose="02020503050405090304" charset="0"/>
+                <a:cs typeface="Times New Roman" panose="02020503050405090304" charset="0"/>
               </a:rPr>
               <a:t>23 h recovery: pump ON again. </a:t>
             </a:r>
+            <a:endParaRPr lang="en-GB" altLang="zh-CN" b="0" i="0" dirty="0">
+              <a:effectLst/>
+              <a:latin typeface="Times New Roman" panose="02020503050405090304" charset="0"/>
+              <a:cs typeface="Times New Roman" panose="02020503050405090304" charset="0"/>
+            </a:endParaRPr>
           </a:p>
         </p:txBody>
       </p:sp>
       <p:pic>
         <p:nvPicPr>
-          <p:cNvPr id="19" name="图片 18" descr="图示&#10;&#10;AI 生成的内容可能不正确。">
-            <a:extLst>
-              <a:ext uri="{FF2B5EF4-FFF2-40B4-BE49-F238E27FC236}">
-                <a16:creationId xmlns:a16="http://schemas.microsoft.com/office/drawing/2014/main" id="{06D36F2A-6364-A85F-CE8B-48CFEA844F8E}"/>
-              </a:ext>
-            </a:extLst>
-          </p:cNvPr>
+          <p:cNvPr id="19" name="图片 18" descr="图示&#10;&#10;AI 生成的内容可能不正确。"/>
           <p:cNvPicPr>
             <a:picLocks noChangeAspect="1"/>
           </p:cNvPicPr>
           <p:nvPr/>
         </p:nvPicPr>
         <p:blipFill>
-          <a:blip r:embed="rId3"/>
+          <a:blip r:embed="rId2"/>
           <a:stretch>
             <a:fillRect/>
           </a:stretch>
@@ -4487,20 +4150,14 @@
       </p:pic>
       <p:sp>
         <p:nvSpPr>
-          <p:cNvPr id="20" name="文本框 19">
-            <a:extLst>
-              <a:ext uri="{FF2B5EF4-FFF2-40B4-BE49-F238E27FC236}">
-                <a16:creationId xmlns:a16="http://schemas.microsoft.com/office/drawing/2014/main" id="{078B8098-DD09-8A70-2685-46E21AC8AC98}"/>
-              </a:ext>
-            </a:extLst>
-          </p:cNvPr>
+          <p:cNvPr id="20" name="文本框 19"/>
           <p:cNvSpPr txBox="1"/>
           <p:nvPr/>
         </p:nvSpPr>
         <p:spPr>
           <a:xfrm>
             <a:off x="685804" y="5579803"/>
-            <a:ext cx="2445323" cy="697627"/>
+            <a:ext cx="2445323" cy="683895"/>
           </a:xfrm>
           <a:prstGeom prst="rect">
             <a:avLst/>
@@ -4524,38 +4181,48 @@
             <a:r>
               <a:rPr lang="en-US" altLang="zh-CN" b="0" i="0" dirty="0">
                 <a:effectLst/>
-                <a:latin typeface="-apple-system"/>
+                <a:latin typeface="Times New Roman Regular" panose="02020503050405090304" charset="0"/>
+                <a:cs typeface="Times New Roman Regular" panose="02020503050405090304" charset="0"/>
               </a:rPr>
               <a:t>2</a:t>
             </a:r>
             <a:r>
               <a:rPr lang="zh-CN" altLang="en-US" b="0" i="0" dirty="0">
                 <a:effectLst/>
-                <a:latin typeface="-apple-system"/>
+                <a:latin typeface="Times New Roman Regular" panose="02020503050405090304" charset="0"/>
+                <a:cs typeface="Times New Roman Regular" panose="02020503050405090304" charset="0"/>
               </a:rPr>
               <a:t> </a:t>
             </a:r>
             <a:r>
               <a:rPr lang="en-US" altLang="zh-CN" b="0" i="0" dirty="0">
                 <a:effectLst/>
-                <a:latin typeface="-apple-system"/>
+                <a:latin typeface="Times New Roman Regular" panose="02020503050405090304" charset="0"/>
+                <a:cs typeface="Times New Roman Regular" panose="02020503050405090304" charset="0"/>
               </a:rPr>
               <a:t>-</a:t>
             </a:r>
             <a:r>
               <a:rPr lang="zh-CN" altLang="en-US" b="0" i="0" dirty="0">
                 <a:effectLst/>
-                <a:latin typeface="-apple-system"/>
+                <a:latin typeface="Times New Roman Regular" panose="02020503050405090304" charset="0"/>
+                <a:cs typeface="Times New Roman Regular" panose="02020503050405090304" charset="0"/>
               </a:rPr>
               <a:t> </a:t>
             </a:r>
             <a:r>
               <a:rPr lang="en-US" altLang="zh-CN" b="0" i="0" dirty="0">
                 <a:effectLst/>
-                <a:latin typeface="-apple-system"/>
+                <a:latin typeface="Times New Roman Regular" panose="02020503050405090304" charset="0"/>
+                <a:cs typeface="Times New Roman Regular" panose="02020503050405090304" charset="0"/>
               </a:rPr>
               <a:t>tank</a:t>
             </a:r>
+            <a:endParaRPr lang="en-US" altLang="zh-CN" b="0" i="0" dirty="0">
+              <a:effectLst/>
+              <a:latin typeface="Times New Roman Regular" panose="02020503050405090304" charset="0"/>
+              <a:cs typeface="Times New Roman Regular" panose="02020503050405090304" charset="0"/>
+            </a:endParaRPr>
           </a:p>
           <a:p>
             <a:pPr algn="l">
@@ -4568,47 +4235,48 @@
             </a:pPr>
             <a:r>
               <a:rPr lang="en-US" altLang="zh-CN" dirty="0">
-                <a:latin typeface="-apple-system"/>
+                <a:latin typeface="Times New Roman Regular" panose="02020503050405090304" charset="0"/>
+                <a:cs typeface="Times New Roman Regular" panose="02020503050405090304" charset="0"/>
               </a:rPr>
               <a:t>9</a:t>
             </a:r>
             <a:r>
               <a:rPr lang="zh-CN" altLang="en-US" dirty="0">
-                <a:latin typeface="-apple-system"/>
+                <a:latin typeface="Times New Roman Regular" panose="02020503050405090304" charset="0"/>
+                <a:cs typeface="Times New Roman Regular" panose="02020503050405090304" charset="0"/>
               </a:rPr>
               <a:t> </a:t>
             </a:r>
             <a:r>
               <a:rPr lang="en-US" altLang="zh-CN" dirty="0">
-                <a:latin typeface="-apple-system"/>
+                <a:latin typeface="Times New Roman Regular" panose="02020503050405090304" charset="0"/>
+                <a:cs typeface="Times New Roman Regular" panose="02020503050405090304" charset="0"/>
               </a:rPr>
               <a:t>-</a:t>
             </a:r>
             <a:r>
               <a:rPr lang="zh-CN" altLang="en-US" dirty="0">
-                <a:latin typeface="-apple-system"/>
+                <a:latin typeface="Times New Roman Regular" panose="02020503050405090304" charset="0"/>
+                <a:cs typeface="Times New Roman Regular" panose="02020503050405090304" charset="0"/>
               </a:rPr>
               <a:t> </a:t>
             </a:r>
             <a:r>
               <a:rPr lang="en-US" altLang="zh-CN" dirty="0">
-                <a:latin typeface="-apple-system"/>
+                <a:latin typeface="Times New Roman Regular" panose="02020503050405090304" charset="0"/>
+                <a:cs typeface="Times New Roman Regular" panose="02020503050405090304" charset="0"/>
               </a:rPr>
               <a:t>reservoir</a:t>
             </a:r>
-            <a:endParaRPr lang="en" altLang="zh-CN" b="0" i="0" dirty="0">
+            <a:endParaRPr lang="en-GB" altLang="zh-CN" b="0" i="0" dirty="0">
               <a:effectLst/>
-              <a:latin typeface="-apple-system"/>
+              <a:latin typeface="Times New Roman Regular" panose="02020503050405090304" charset="0"/>
+              <a:cs typeface="Times New Roman Regular" panose="02020503050405090304" charset="0"/>
             </a:endParaRPr>
           </a:p>
         </p:txBody>
       </p:sp>
     </p:spTree>
-    <p:extLst>
-      <p:ext uri="{BB962C8B-B14F-4D97-AF65-F5344CB8AC3E}">
-        <p14:creationId xmlns:p14="http://schemas.microsoft.com/office/powerpoint/2010/main" val="1980744634"/>
-      </p:ext>
-    </p:extLst>
   </p:cSld>
   <p:clrMapOvr>
     <a:masterClrMapping/>
@@ -4621,13 +4289,7 @@
   <p:cSld>
     <p:spTree>
       <p:nvGrpSpPr>
-        <p:cNvPr id="1" name="">
-          <a:extLst>
-            <a:ext uri="{FF2B5EF4-FFF2-40B4-BE49-F238E27FC236}">
-              <a16:creationId xmlns:a16="http://schemas.microsoft.com/office/drawing/2014/main" id="{C9BFB3F4-4BDA-93A6-ADFE-01C1221340A6}"/>
-            </a:ext>
-          </a:extLst>
-        </p:cNvPr>
+        <p:cNvPr id="1" name=""/>
         <p:cNvGrpSpPr/>
         <p:nvPr/>
       </p:nvGrpSpPr>
@@ -4641,20 +4303,14 @@
       </p:grpSpPr>
       <p:pic>
         <p:nvPicPr>
-          <p:cNvPr id="4" name="图片 3" descr="图表, 折线图&#10;&#10;AI 生成的内容可能不正确。">
-            <a:extLst>
-              <a:ext uri="{FF2B5EF4-FFF2-40B4-BE49-F238E27FC236}">
-                <a16:creationId xmlns:a16="http://schemas.microsoft.com/office/drawing/2014/main" id="{15C72BED-3B6D-CAE4-7E06-2094C8DBB743}"/>
-              </a:ext>
-            </a:extLst>
-          </p:cNvPr>
+          <p:cNvPr id="4" name="图片 3" descr="图表, 折线图&#10;&#10;AI 生成的内容可能不正确。"/>
           <p:cNvPicPr>
             <a:picLocks noChangeAspect="1"/>
           </p:cNvPicPr>
           <p:nvPr/>
         </p:nvPicPr>
         <p:blipFill>
-          <a:blip r:embed="rId2"/>
+          <a:blip r:embed="rId1"/>
           <a:stretch>
             <a:fillRect/>
           </a:stretch>
@@ -4671,20 +4327,14 @@
       </p:pic>
       <p:sp>
         <p:nvSpPr>
-          <p:cNvPr id="6" name="文本框 5">
-            <a:extLst>
-              <a:ext uri="{FF2B5EF4-FFF2-40B4-BE49-F238E27FC236}">
-                <a16:creationId xmlns:a16="http://schemas.microsoft.com/office/drawing/2014/main" id="{16137DE7-86E3-E5C0-2288-8D4D1404094A}"/>
-              </a:ext>
-            </a:extLst>
-          </p:cNvPr>
+          <p:cNvPr id="6" name="文本框 5"/>
           <p:cNvSpPr txBox="1"/>
           <p:nvPr/>
         </p:nvSpPr>
         <p:spPr>
           <a:xfrm>
             <a:off x="110834" y="305351"/>
-            <a:ext cx="8548255" cy="523220"/>
+            <a:ext cx="8548255" cy="521970"/>
           </a:xfrm>
           <a:prstGeom prst="rect">
             <a:avLst/>
@@ -4698,57 +4348,78 @@
           <a:lstStyle/>
           <a:p>
             <a:r>
-              <a:rPr lang="en-US" altLang="zh-CN" sz="2800" b="1" dirty="0"/>
+              <a:rPr lang="en-US" altLang="zh-CN" sz="2800" b="1" dirty="0">
+                <a:latin typeface="Times New Roman" panose="02020503050405090304" charset="0"/>
+                <a:cs typeface="Times New Roman" panose="02020503050405090304" charset="0"/>
+              </a:rPr>
               <a:t>1.2</a:t>
             </a:r>
             <a:r>
-              <a:rPr lang="zh-CN" altLang="en-US" sz="2800" b="1" dirty="0"/>
+              <a:rPr lang="zh-CN" altLang="en-US" sz="2800" b="1" dirty="0">
+                <a:latin typeface="Times New Roman" panose="02020503050405090304" charset="0"/>
+                <a:cs typeface="Times New Roman" panose="02020503050405090304" charset="0"/>
+              </a:rPr>
               <a:t> </a:t>
             </a:r>
             <a:r>
-              <a:rPr lang="en" altLang="zh-CN" sz="2800" b="1" dirty="0"/>
+              <a:rPr lang="en-GB" altLang="zh-CN" sz="2800" b="1" dirty="0">
+                <a:latin typeface="Times New Roman" panose="02020503050405090304" charset="0"/>
+                <a:cs typeface="Times New Roman" panose="02020503050405090304" charset="0"/>
+              </a:rPr>
               <a:t>Model Demo </a:t>
             </a:r>
             <a:r>
-              <a:rPr lang="en-US" altLang="zh-CN" sz="2800" b="1" dirty="0"/>
+              <a:rPr lang="en-US" altLang="zh-CN" sz="2800" b="1" dirty="0">
+                <a:latin typeface="Times New Roman" panose="02020503050405090304" charset="0"/>
+                <a:cs typeface="Times New Roman" panose="02020503050405090304" charset="0"/>
+              </a:rPr>
               <a:t>results</a:t>
             </a:r>
             <a:r>
-              <a:rPr lang="zh-CN" altLang="en-US" sz="2800" b="1" dirty="0"/>
+              <a:rPr lang="zh-CN" altLang="en-US" sz="2800" b="1" dirty="0">
+                <a:latin typeface="Times New Roman" panose="02020503050405090304" charset="0"/>
+                <a:cs typeface="Times New Roman" panose="02020503050405090304" charset="0"/>
+              </a:rPr>
               <a:t> </a:t>
             </a:r>
             <a:r>
-              <a:rPr lang="en-US" altLang="zh-CN" sz="2800" b="1" dirty="0"/>
+              <a:rPr lang="en-US" altLang="zh-CN" sz="2800" b="1" dirty="0">
+                <a:latin typeface="Times New Roman" panose="02020503050405090304" charset="0"/>
+                <a:cs typeface="Times New Roman" panose="02020503050405090304" charset="0"/>
+              </a:rPr>
               <a:t>(</a:t>
             </a:r>
             <a:r>
-              <a:rPr lang="en" altLang="zh-CN" sz="2800" b="1" dirty="0"/>
+              <a:rPr lang="en-GB" altLang="zh-CN" sz="2800" b="1" dirty="0">
+                <a:latin typeface="Times New Roman" panose="02020503050405090304" charset="0"/>
+                <a:cs typeface="Times New Roman" panose="02020503050405090304" charset="0"/>
+              </a:rPr>
               <a:t>Modified Net1</a:t>
             </a:r>
             <a:r>
-              <a:rPr lang="en-US" altLang="zh-CN" sz="2800" b="1" dirty="0"/>
+              <a:rPr lang="en-US" altLang="zh-CN" sz="2800" b="1" dirty="0">
+                <a:latin typeface="Times New Roman" panose="02020503050405090304" charset="0"/>
+                <a:cs typeface="Times New Roman" panose="02020503050405090304" charset="0"/>
+              </a:rPr>
               <a:t>)</a:t>
             </a:r>
-            <a:endParaRPr lang="en" altLang="zh-CN" sz="2800" b="1" dirty="0"/>
-          </a:p>
-        </p:txBody>
-      </p:sp>
-      <p:sp>
-        <p:nvSpPr>
-          <p:cNvPr id="8" name="文本框 7">
-            <a:extLst>
-              <a:ext uri="{FF2B5EF4-FFF2-40B4-BE49-F238E27FC236}">
-                <a16:creationId xmlns:a16="http://schemas.microsoft.com/office/drawing/2014/main" id="{F085D9A6-85F7-6867-F5C8-429C7DC9ECF8}"/>
-              </a:ext>
-            </a:extLst>
-          </p:cNvPr>
+            <a:endParaRPr lang="en-GB" altLang="zh-CN" sz="2800" b="1" dirty="0">
+              <a:latin typeface="Times New Roman" panose="02020503050405090304" charset="0"/>
+              <a:cs typeface="Times New Roman" panose="02020503050405090304" charset="0"/>
+            </a:endParaRPr>
+          </a:p>
+        </p:txBody>
+      </p:sp>
+      <p:sp>
+        <p:nvSpPr>
+          <p:cNvPr id="8" name="文本框 7"/>
           <p:cNvSpPr txBox="1"/>
           <p:nvPr/>
         </p:nvSpPr>
         <p:spPr>
           <a:xfrm>
             <a:off x="294408" y="4410785"/>
-            <a:ext cx="7020791" cy="1631216"/>
+            <a:ext cx="7020791" cy="1591310"/>
           </a:xfrm>
           <a:prstGeom prst="rect">
             <a:avLst/>
@@ -4770,12 +4441,18 @@
               </a:spcAft>
             </a:pPr>
             <a:r>
-              <a:rPr lang="en" altLang="zh-CN" b="0" i="0" dirty="0">
+              <a:rPr lang="en-GB" altLang="zh-CN" b="0" i="0" dirty="0">
                 <a:effectLst/>
-                <a:latin typeface="-apple-system"/>
+                <a:latin typeface="Times New Roman" panose="02020503050405090304" charset="0"/>
+                <a:cs typeface="Times New Roman" panose="02020503050405090304" charset="0"/>
               </a:rPr>
               <a:t>Chlorine time series</a:t>
             </a:r>
+            <a:endParaRPr lang="en-GB" altLang="zh-CN" b="0" i="0" dirty="0">
+              <a:effectLst/>
+              <a:latin typeface="Times New Roman" panose="02020503050405090304" charset="0"/>
+              <a:cs typeface="Times New Roman" panose="02020503050405090304" charset="0"/>
+            </a:endParaRPr>
           </a:p>
           <a:p>
             <a:pPr marL="285750" indent="-285750" algn="l">
@@ -4785,18 +4462,20 @@
               <a:spcAft>
                 <a:spcPts val="150"/>
               </a:spcAft>
-              <a:buFont typeface="Arial" panose="020B0604020202020204" pitchFamily="34" charset="0"/>
+              <a:buFont typeface="Arial" panose="020B0604020202090204" pitchFamily="34" charset="0"/>
               <a:buChar char="•"/>
             </a:pPr>
             <a:r>
-              <a:rPr lang="en" altLang="zh-CN" b="0" i="0" dirty="0">
+              <a:rPr lang="en-GB" altLang="zh-CN" b="0" i="0" dirty="0">
                 <a:effectLst/>
-                <a:latin typeface="-apple-system"/>
+                <a:latin typeface="Times New Roman" panose="02020503050405090304" charset="0"/>
+                <a:cs typeface="Times New Roman" panose="02020503050405090304" charset="0"/>
               </a:rPr>
               <a:t>Node 10 (first junction after pump): 0 → 1 → 0 → 1 </a:t>
             </a:r>
-            <a:endParaRPr lang="en" altLang="zh-CN" dirty="0">
-              <a:latin typeface="-apple-system"/>
+            <a:endParaRPr lang="en-GB" altLang="zh-CN" dirty="0">
+              <a:latin typeface="Times New Roman" panose="02020503050405090304" charset="0"/>
+              <a:cs typeface="Times New Roman" panose="02020503050405090304" charset="0"/>
             </a:endParaRPr>
           </a:p>
           <a:p>
@@ -4809,12 +4488,18 @@
               </a:spcAft>
             </a:pPr>
             <a:r>
-              <a:rPr lang="en" altLang="zh-CN" b="0" i="0" dirty="0">
+              <a:rPr lang="en-GB" altLang="zh-CN" b="0" i="0" dirty="0">
                 <a:effectLst/>
-                <a:latin typeface="-apple-system"/>
+                <a:latin typeface="Times New Roman" panose="02020503050405090304" charset="0"/>
+                <a:cs typeface="Times New Roman" panose="02020503050405090304" charset="0"/>
               </a:rPr>
               <a:t>1 mg/L when pump ON; zero during OFF (13–22 h); reinjection at 23 h. </a:t>
             </a:r>
+            <a:endParaRPr lang="en-GB" altLang="zh-CN" b="0" i="0" dirty="0">
+              <a:effectLst/>
+              <a:latin typeface="Times New Roman" panose="02020503050405090304" charset="0"/>
+              <a:cs typeface="Times New Roman" panose="02020503050405090304" charset="0"/>
+            </a:endParaRPr>
           </a:p>
           <a:p>
             <a:pPr marL="285750" indent="-285750" algn="l">
@@ -4824,35 +4509,35 @@
               <a:spcAft>
                 <a:spcPts val="150"/>
               </a:spcAft>
-              <a:buFont typeface="Arial" panose="020B0604020202020204" pitchFamily="34" charset="0"/>
+              <a:buFont typeface="Arial" panose="020B0604020202090204" pitchFamily="34" charset="0"/>
               <a:buChar char="•"/>
             </a:pPr>
             <a:r>
-              <a:rPr lang="en" altLang="zh-CN" b="0" i="0" dirty="0">
+              <a:rPr lang="en-GB" altLang="zh-CN" b="0" i="0" dirty="0">
                 <a:effectLst/>
-                <a:latin typeface="-apple-system"/>
+                <a:latin typeface="Times New Roman" panose="02020503050405090304" charset="0"/>
+                <a:cs typeface="Times New Roman" panose="02020503050405090304" charset="0"/>
               </a:rPr>
               <a:t>Nodes 11/12/13/21 etc.: stay ≈ 0 for 24 h — chlorine has not advected downstream.</a:t>
             </a:r>
-          </a:p>
-        </p:txBody>
-      </p:sp>
-      <p:sp>
-        <p:nvSpPr>
-          <p:cNvPr id="10" name="文本框 9">
-            <a:extLst>
-              <a:ext uri="{FF2B5EF4-FFF2-40B4-BE49-F238E27FC236}">
-                <a16:creationId xmlns:a16="http://schemas.microsoft.com/office/drawing/2014/main" id="{904E1E70-A66C-6203-8C33-AF1DAC4090CA}"/>
-              </a:ext>
-            </a:extLst>
-          </p:cNvPr>
+            <a:endParaRPr lang="en-GB" altLang="zh-CN" b="0" i="0" dirty="0">
+              <a:effectLst/>
+              <a:latin typeface="Times New Roman" panose="02020503050405090304" charset="0"/>
+              <a:cs typeface="Times New Roman" panose="02020503050405090304" charset="0"/>
+            </a:endParaRPr>
+          </a:p>
+        </p:txBody>
+      </p:sp>
+      <p:sp>
+        <p:nvSpPr>
+          <p:cNvPr id="10" name="文本框 9"/>
           <p:cNvSpPr txBox="1"/>
           <p:nvPr/>
         </p:nvSpPr>
         <p:spPr>
           <a:xfrm>
             <a:off x="7429996" y="5092628"/>
-            <a:ext cx="4582393" cy="974626"/>
+            <a:ext cx="4582393" cy="960755"/>
           </a:xfrm>
           <a:prstGeom prst="rect">
             <a:avLst/>
@@ -4874,12 +4559,18 @@
               </a:spcAft>
             </a:pPr>
             <a:r>
-              <a:rPr lang="en" altLang="zh-CN" b="0" i="0" dirty="0">
+              <a:rPr lang="en-GB" altLang="zh-CN" b="0" i="0" dirty="0">
                 <a:effectLst/>
-                <a:latin typeface="-apple-system"/>
+                <a:latin typeface="Times New Roman" panose="02020503050405090304" charset="0"/>
+                <a:cs typeface="Times New Roman" panose="02020503050405090304" charset="0"/>
               </a:rPr>
               <a:t>Spatial chlorine</a:t>
             </a:r>
+            <a:endParaRPr lang="en-GB" altLang="zh-CN" b="0" i="0" dirty="0">
+              <a:effectLst/>
+              <a:latin typeface="Times New Roman" panose="02020503050405090304" charset="0"/>
+              <a:cs typeface="Times New Roman" panose="02020503050405090304" charset="0"/>
+            </a:endParaRPr>
           </a:p>
           <a:p>
             <a:pPr marL="285750" indent="-285750" algn="l">
@@ -4889,35 +4580,35 @@
               <a:spcAft>
                 <a:spcPts val="150"/>
               </a:spcAft>
-              <a:buFont typeface="Arial" panose="020B0604020202020204" pitchFamily="34" charset="0"/>
+              <a:buFont typeface="Arial" panose="020B0604020202090204" pitchFamily="34" charset="0"/>
               <a:buChar char="•"/>
             </a:pPr>
             <a:r>
-              <a:rPr lang="en" altLang="zh-CN" b="0" i="0" dirty="0">
+              <a:rPr lang="en-GB" altLang="zh-CN" b="0" i="0" dirty="0">
                 <a:effectLst/>
-                <a:latin typeface="-apple-system"/>
+                <a:latin typeface="Times New Roman" panose="02020503050405090304" charset="0"/>
+                <a:cs typeface="Times New Roman" panose="02020503050405090304" charset="0"/>
               </a:rPr>
               <a:t>Only node 10 is dark (1.0 mg/L); all other junctions near zero. </a:t>
             </a:r>
+            <a:endParaRPr lang="en-GB" altLang="zh-CN" b="0" i="0" dirty="0">
+              <a:effectLst/>
+              <a:latin typeface="Times New Roman" panose="02020503050405090304" charset="0"/>
+              <a:cs typeface="Times New Roman" panose="02020503050405090304" charset="0"/>
+            </a:endParaRPr>
           </a:p>
         </p:txBody>
       </p:sp>
       <p:pic>
         <p:nvPicPr>
-          <p:cNvPr id="12" name="图片 11" descr="图示&#10;&#10;AI 生成的内容可能不正确。">
-            <a:extLst>
-              <a:ext uri="{FF2B5EF4-FFF2-40B4-BE49-F238E27FC236}">
-                <a16:creationId xmlns:a16="http://schemas.microsoft.com/office/drawing/2014/main" id="{AE10AC72-107B-7202-52A3-C92A2CA341EB}"/>
-              </a:ext>
-            </a:extLst>
-          </p:cNvPr>
+          <p:cNvPr id="12" name="图片 11" descr="图示&#10;&#10;AI 生成的内容可能不正确。"/>
           <p:cNvPicPr>
             <a:picLocks noChangeAspect="1"/>
           </p:cNvPicPr>
           <p:nvPr/>
         </p:nvPicPr>
         <p:blipFill>
-          <a:blip r:embed="rId3"/>
+          <a:blip r:embed="rId2"/>
           <a:stretch>
             <a:fillRect/>
           </a:stretch>
@@ -4933,11 +4624,6 @@
         </p:spPr>
       </p:pic>
     </p:spTree>
-    <p:extLst>
-      <p:ext uri="{BB962C8B-B14F-4D97-AF65-F5344CB8AC3E}">
-        <p14:creationId xmlns:p14="http://schemas.microsoft.com/office/powerpoint/2010/main" val="1731904914"/>
-      </p:ext>
-    </p:extLst>
   </p:cSld>
   <p:clrMapOvr>
     <a:masterClrMapping/>
@@ -4950,13 +4636,7 @@
   <p:cSld>
     <p:spTree>
       <p:nvGrpSpPr>
-        <p:cNvPr id="1" name="">
-          <a:extLst>
-            <a:ext uri="{FF2B5EF4-FFF2-40B4-BE49-F238E27FC236}">
-              <a16:creationId xmlns:a16="http://schemas.microsoft.com/office/drawing/2014/main" id="{E5A1E553-BF50-0B1C-8E83-60907AF23FE6}"/>
-            </a:ext>
-          </a:extLst>
-        </p:cNvPr>
+        <p:cNvPr id="1" name=""/>
         <p:cNvGrpSpPr/>
         <p:nvPr/>
       </p:nvGrpSpPr>
@@ -4970,20 +4650,14 @@
       </p:grpSpPr>
       <p:pic>
         <p:nvPicPr>
-          <p:cNvPr id="7" name="图片 6" descr="图表, 折线图&#10;&#10;AI 生成的内容可能不正确。">
-            <a:extLst>
-              <a:ext uri="{FF2B5EF4-FFF2-40B4-BE49-F238E27FC236}">
-                <a16:creationId xmlns:a16="http://schemas.microsoft.com/office/drawing/2014/main" id="{18EF4F01-E302-3532-B279-56DE66671EE8}"/>
-              </a:ext>
-            </a:extLst>
-          </p:cNvPr>
+          <p:cNvPr id="7" name="图片 6" descr="图表, 折线图&#10;&#10;AI 生成的内容可能不正确。"/>
           <p:cNvPicPr>
             <a:picLocks noChangeAspect="1"/>
           </p:cNvPicPr>
           <p:nvPr/>
         </p:nvPicPr>
         <p:blipFill>
-          <a:blip r:embed="rId2"/>
+          <a:blip r:embed="rId1"/>
           <a:stretch>
             <a:fillRect/>
           </a:stretch>
@@ -5000,20 +4674,14 @@
       </p:pic>
       <p:sp>
         <p:nvSpPr>
-          <p:cNvPr id="8" name="文本框 5">
-            <a:extLst>
-              <a:ext uri="{FF2B5EF4-FFF2-40B4-BE49-F238E27FC236}">
-                <a16:creationId xmlns:a16="http://schemas.microsoft.com/office/drawing/2014/main" id="{59F9D0CE-F651-8600-BE34-8C297D538ABC}"/>
-              </a:ext>
-            </a:extLst>
-          </p:cNvPr>
+          <p:cNvPr id="8" name="文本框 5"/>
           <p:cNvSpPr txBox="1"/>
           <p:nvPr/>
         </p:nvSpPr>
         <p:spPr>
           <a:xfrm>
             <a:off x="0" y="160954"/>
-            <a:ext cx="9864436" cy="523220"/>
+            <a:ext cx="9864436" cy="521970"/>
           </a:xfrm>
           <a:prstGeom prst="rect">
             <a:avLst/>
@@ -5121,61 +4789,85 @@
           </a:lstStyle>
           <a:p>
             <a:r>
-              <a:rPr lang="en-US" altLang="zh-CN" sz="2800" b="1" dirty="0"/>
+              <a:rPr lang="en-US" altLang="zh-CN" sz="2800" b="1" dirty="0">
+                <a:latin typeface="Times New Roman" panose="02020503050405090304" charset="0"/>
+                <a:cs typeface="Times New Roman" panose="02020503050405090304" charset="0"/>
+              </a:rPr>
               <a:t>1.2</a:t>
             </a:r>
             <a:r>
-              <a:rPr lang="zh-CN" altLang="en-US" sz="2800" b="1" dirty="0"/>
+              <a:rPr lang="zh-CN" altLang="en-US" sz="2800" b="1" dirty="0">
+                <a:latin typeface="Times New Roman" panose="02020503050405090304" charset="0"/>
+                <a:cs typeface="Times New Roman" panose="02020503050405090304" charset="0"/>
+              </a:rPr>
               <a:t> </a:t>
             </a:r>
             <a:r>
-              <a:rPr lang="en" altLang="zh-CN" sz="2800" b="1" dirty="0"/>
+              <a:rPr lang="en-GB" altLang="zh-CN" sz="2800" b="1" dirty="0">
+                <a:latin typeface="Times New Roman" panose="02020503050405090304" charset="0"/>
+                <a:cs typeface="Times New Roman" panose="02020503050405090304" charset="0"/>
+              </a:rPr>
               <a:t>Model Demo </a:t>
             </a:r>
             <a:r>
-              <a:rPr lang="en-US" altLang="zh-CN" sz="2800" b="1" dirty="0"/>
+              <a:rPr lang="en-US" altLang="zh-CN" sz="2800" b="1" dirty="0">
+                <a:latin typeface="Times New Roman" panose="02020503050405090304" charset="0"/>
+                <a:cs typeface="Times New Roman" panose="02020503050405090304" charset="0"/>
+              </a:rPr>
               <a:t>results</a:t>
             </a:r>
             <a:r>
-              <a:rPr lang="zh-CN" altLang="en-US" sz="2800" b="1" dirty="0"/>
+              <a:rPr lang="zh-CN" altLang="en-US" sz="2800" b="1" dirty="0">
+                <a:latin typeface="Times New Roman" panose="02020503050405090304" charset="0"/>
+                <a:cs typeface="Times New Roman" panose="02020503050405090304" charset="0"/>
+              </a:rPr>
               <a:t> </a:t>
             </a:r>
             <a:r>
-              <a:rPr lang="en-US" altLang="zh-CN" sz="2800" b="1" dirty="0"/>
+              <a:rPr lang="en-US" altLang="zh-CN" sz="2800" b="1" dirty="0">
+                <a:latin typeface="Times New Roman" panose="02020503050405090304" charset="0"/>
+                <a:cs typeface="Times New Roman" panose="02020503050405090304" charset="0"/>
+              </a:rPr>
               <a:t>(</a:t>
             </a:r>
             <a:r>
-              <a:rPr lang="en" altLang="zh-CN" sz="2800" b="1" dirty="0"/>
+              <a:rPr lang="en-GB" altLang="zh-CN" sz="2800" b="1" dirty="0">
+                <a:latin typeface="Times New Roman" panose="02020503050405090304" charset="0"/>
+                <a:cs typeface="Times New Roman" panose="02020503050405090304" charset="0"/>
+              </a:rPr>
               <a:t>Official Net1.inp</a:t>
             </a:r>
             <a:r>
-              <a:rPr lang="zh-CN" altLang="en-US" sz="2800" b="1" dirty="0"/>
+              <a:rPr lang="zh-CN" altLang="en-US" sz="2800" b="1" dirty="0">
+                <a:latin typeface="Times New Roman" panose="02020503050405090304" charset="0"/>
+                <a:cs typeface="Times New Roman" panose="02020503050405090304" charset="0"/>
+              </a:rPr>
               <a:t> </a:t>
             </a:r>
             <a:r>
-              <a:rPr lang="en-US" altLang="zh-CN" sz="2800" b="1" dirty="0"/>
+              <a:rPr lang="en-US" altLang="zh-CN" sz="2800" b="1" dirty="0">
+                <a:latin typeface="Times New Roman" panose="02020503050405090304" charset="0"/>
+                <a:cs typeface="Times New Roman" panose="02020503050405090304" charset="0"/>
+              </a:rPr>
               <a:t>(original))</a:t>
             </a:r>
-            <a:endParaRPr lang="en" altLang="zh-CN" sz="2800" b="1" dirty="0"/>
+            <a:endParaRPr lang="en-GB" altLang="zh-CN" sz="2800" b="1" dirty="0">
+              <a:latin typeface="Times New Roman" panose="02020503050405090304" charset="0"/>
+              <a:cs typeface="Times New Roman" panose="02020503050405090304" charset="0"/>
+            </a:endParaRPr>
           </a:p>
         </p:txBody>
       </p:sp>
       <p:pic>
         <p:nvPicPr>
-          <p:cNvPr id="10" name="图片 9" descr="图示&#10;&#10;AI 生成的内容可能不正确。">
-            <a:extLst>
-              <a:ext uri="{FF2B5EF4-FFF2-40B4-BE49-F238E27FC236}">
-                <a16:creationId xmlns:a16="http://schemas.microsoft.com/office/drawing/2014/main" id="{EE87FDF4-2384-BEE2-D7EB-D74764831FBC}"/>
-              </a:ext>
-            </a:extLst>
-          </p:cNvPr>
+          <p:cNvPr id="10" name="图片 9" descr="图示&#10;&#10;AI 生成的内容可能不正确。"/>
           <p:cNvPicPr>
             <a:picLocks noChangeAspect="1"/>
           </p:cNvPicPr>
           <p:nvPr/>
         </p:nvPicPr>
         <p:blipFill>
-          <a:blip r:embed="rId3"/>
+          <a:blip r:embed="rId2"/>
           <a:stretch>
             <a:fillRect/>
           </a:stretch>
@@ -5191,11 +4883,6 @@
         </p:spPr>
       </p:pic>
     </p:spTree>
-    <p:extLst>
-      <p:ext uri="{BB962C8B-B14F-4D97-AF65-F5344CB8AC3E}">
-        <p14:creationId xmlns:p14="http://schemas.microsoft.com/office/powerpoint/2010/main" val="2076044587"/>
-      </p:ext>
-    </p:extLst>
   </p:cSld>
   <p:clrMapOvr>
     <a:masterClrMapping/>
@@ -5208,13 +4895,7 @@
   <p:cSld>
     <p:spTree>
       <p:nvGrpSpPr>
-        <p:cNvPr id="1" name="">
-          <a:extLst>
-            <a:ext uri="{FF2B5EF4-FFF2-40B4-BE49-F238E27FC236}">
-              <a16:creationId xmlns:a16="http://schemas.microsoft.com/office/drawing/2014/main" id="{15843263-358C-4E6B-F3E9-EFA4E8BE0871}"/>
-            </a:ext>
-          </a:extLst>
-        </p:cNvPr>
+        <p:cNvPr id="1" name=""/>
         <p:cNvGrpSpPr/>
         <p:nvPr/>
       </p:nvGrpSpPr>
@@ -5228,20 +4909,14 @@
       </p:grpSpPr>
       <p:pic>
         <p:nvPicPr>
-          <p:cNvPr id="5" name="图片 4" descr="图表, 折线图&#10;&#10;AI 生成的内容可能不正确。">
-            <a:extLst>
-              <a:ext uri="{FF2B5EF4-FFF2-40B4-BE49-F238E27FC236}">
-                <a16:creationId xmlns:a16="http://schemas.microsoft.com/office/drawing/2014/main" id="{3D2B2683-D811-D545-8B63-66287285D740}"/>
-              </a:ext>
-            </a:extLst>
-          </p:cNvPr>
+          <p:cNvPr id="5" name="图片 4" descr="图表, 折线图&#10;&#10;AI 生成的内容可能不正确。"/>
           <p:cNvPicPr>
             <a:picLocks noChangeAspect="1"/>
           </p:cNvPicPr>
           <p:nvPr/>
         </p:nvPicPr>
         <p:blipFill>
-          <a:blip r:embed="rId2"/>
+          <a:blip r:embed="rId1"/>
           <a:stretch>
             <a:fillRect/>
           </a:stretch>
@@ -5258,20 +4933,14 @@
       </p:pic>
       <p:sp>
         <p:nvSpPr>
-          <p:cNvPr id="8" name="文本框 5">
-            <a:extLst>
-              <a:ext uri="{FF2B5EF4-FFF2-40B4-BE49-F238E27FC236}">
-                <a16:creationId xmlns:a16="http://schemas.microsoft.com/office/drawing/2014/main" id="{0137B822-5FEC-AA45-809F-35F543BBBB25}"/>
-              </a:ext>
-            </a:extLst>
-          </p:cNvPr>
+          <p:cNvPr id="8" name="文本框 5"/>
           <p:cNvSpPr txBox="1"/>
           <p:nvPr/>
         </p:nvSpPr>
         <p:spPr>
           <a:xfrm>
             <a:off x="0" y="160954"/>
-            <a:ext cx="9864436" cy="523220"/>
+            <a:ext cx="9864436" cy="521970"/>
           </a:xfrm>
           <a:prstGeom prst="rect">
             <a:avLst/>
@@ -5379,61 +5048,85 @@
           </a:lstStyle>
           <a:p>
             <a:r>
-              <a:rPr lang="en-US" altLang="zh-CN" sz="2800" b="1" dirty="0"/>
+              <a:rPr lang="en-US" altLang="zh-CN" sz="2800" b="1" dirty="0">
+                <a:latin typeface="Times New Roman" panose="02020503050405090304" charset="0"/>
+                <a:cs typeface="Times New Roman" panose="02020503050405090304" charset="0"/>
+              </a:rPr>
               <a:t>1.2</a:t>
             </a:r>
             <a:r>
-              <a:rPr lang="zh-CN" altLang="en-US" sz="2800" b="1" dirty="0"/>
+              <a:rPr lang="zh-CN" altLang="en-US" sz="2800" b="1" dirty="0">
+                <a:latin typeface="Times New Roman" panose="02020503050405090304" charset="0"/>
+                <a:cs typeface="Times New Roman" panose="02020503050405090304" charset="0"/>
+              </a:rPr>
               <a:t> </a:t>
             </a:r>
             <a:r>
-              <a:rPr lang="en" altLang="zh-CN" sz="2800" b="1" dirty="0"/>
+              <a:rPr lang="en-GB" altLang="zh-CN" sz="2800" b="1" dirty="0">
+                <a:latin typeface="Times New Roman" panose="02020503050405090304" charset="0"/>
+                <a:cs typeface="Times New Roman" panose="02020503050405090304" charset="0"/>
+              </a:rPr>
               <a:t>Model Demo </a:t>
             </a:r>
             <a:r>
-              <a:rPr lang="en-US" altLang="zh-CN" sz="2800" b="1" dirty="0"/>
+              <a:rPr lang="en-US" altLang="zh-CN" sz="2800" b="1" dirty="0">
+                <a:latin typeface="Times New Roman" panose="02020503050405090304" charset="0"/>
+                <a:cs typeface="Times New Roman" panose="02020503050405090304" charset="0"/>
+              </a:rPr>
               <a:t>results</a:t>
             </a:r>
             <a:r>
-              <a:rPr lang="zh-CN" altLang="en-US" sz="2800" b="1" dirty="0"/>
+              <a:rPr lang="zh-CN" altLang="en-US" sz="2800" b="1" dirty="0">
+                <a:latin typeface="Times New Roman" panose="02020503050405090304" charset="0"/>
+                <a:cs typeface="Times New Roman" panose="02020503050405090304" charset="0"/>
+              </a:rPr>
               <a:t> </a:t>
             </a:r>
             <a:r>
-              <a:rPr lang="en-US" altLang="zh-CN" sz="2800" b="1" dirty="0"/>
+              <a:rPr lang="en-US" altLang="zh-CN" sz="2800" b="1" dirty="0">
+                <a:latin typeface="Times New Roman" panose="02020503050405090304" charset="0"/>
+                <a:cs typeface="Times New Roman" panose="02020503050405090304" charset="0"/>
+              </a:rPr>
               <a:t>(</a:t>
             </a:r>
             <a:r>
-              <a:rPr lang="en" altLang="zh-CN" sz="2800" b="1" dirty="0"/>
+              <a:rPr lang="en-GB" altLang="zh-CN" sz="2800" b="1" dirty="0">
+                <a:latin typeface="Times New Roman" panose="02020503050405090304" charset="0"/>
+                <a:cs typeface="Times New Roman" panose="02020503050405090304" charset="0"/>
+              </a:rPr>
               <a:t>Official Net1.inp</a:t>
             </a:r>
             <a:r>
-              <a:rPr lang="zh-CN" altLang="en-US" sz="2800" b="1" dirty="0"/>
+              <a:rPr lang="zh-CN" altLang="en-US" sz="2800" b="1" dirty="0">
+                <a:latin typeface="Times New Roman" panose="02020503050405090304" charset="0"/>
+                <a:cs typeface="Times New Roman" panose="02020503050405090304" charset="0"/>
+              </a:rPr>
               <a:t> </a:t>
             </a:r>
             <a:r>
-              <a:rPr lang="en-US" altLang="zh-CN" sz="2800" b="1" dirty="0"/>
+              <a:rPr lang="en-US" altLang="zh-CN" sz="2800" b="1" dirty="0">
+                <a:latin typeface="Times New Roman" panose="02020503050405090304" charset="0"/>
+                <a:cs typeface="Times New Roman" panose="02020503050405090304" charset="0"/>
+              </a:rPr>
               <a:t>(original))</a:t>
             </a:r>
-            <a:endParaRPr lang="en" altLang="zh-CN" sz="2800" b="1" dirty="0"/>
-          </a:p>
-        </p:txBody>
-      </p:sp>
-      <p:sp>
-        <p:nvSpPr>
-          <p:cNvPr id="11" name="文本框 10">
-            <a:extLst>
-              <a:ext uri="{FF2B5EF4-FFF2-40B4-BE49-F238E27FC236}">
-                <a16:creationId xmlns:a16="http://schemas.microsoft.com/office/drawing/2014/main" id="{34C3F98A-E260-E680-0A5B-40DE92CA91CE}"/>
-              </a:ext>
-            </a:extLst>
-          </p:cNvPr>
+            <a:endParaRPr lang="en-GB" altLang="zh-CN" sz="2800" b="1" dirty="0">
+              <a:latin typeface="Times New Roman" panose="02020503050405090304" charset="0"/>
+              <a:cs typeface="Times New Roman" panose="02020503050405090304" charset="0"/>
+            </a:endParaRPr>
+          </a:p>
+        </p:txBody>
+      </p:sp>
+      <p:sp>
+        <p:nvSpPr>
+          <p:cNvPr id="11" name="文本框 10"/>
           <p:cNvSpPr txBox="1"/>
           <p:nvPr/>
         </p:nvSpPr>
         <p:spPr>
           <a:xfrm>
             <a:off x="614997" y="4234833"/>
-            <a:ext cx="6789103" cy="2462213"/>
+            <a:ext cx="6789103" cy="2422525"/>
           </a:xfrm>
           <a:prstGeom prst="rect">
             <a:avLst/>
@@ -5453,16 +5146,22 @@
               <a:spcAft>
                 <a:spcPts val="150"/>
               </a:spcAft>
-              <a:buFont typeface="Arial" panose="020B0604020202020204" pitchFamily="34" charset="0"/>
+              <a:buFont typeface="Arial" panose="020B0604020202090204" pitchFamily="34" charset="0"/>
               <a:buChar char="•"/>
             </a:pPr>
             <a:r>
-              <a:rPr lang="en" altLang="zh-CN" b="0" i="0" dirty="0">
+              <a:rPr lang="en-GB" altLang="zh-CN" b="0" i="0" dirty="0">
                 <a:effectLst/>
-                <a:latin typeface="-apple-system"/>
+                <a:latin typeface="Times New Roman Regular" panose="02020503050405090304" charset="0"/>
+                <a:cs typeface="Times New Roman Regular" panose="02020503050405090304" charset="0"/>
               </a:rPr>
               <a:t>From 1 h, node 11 is already 0.44 mg/L — junctions start at 0.5 + source at 1.0 mg/L</a:t>
             </a:r>
+            <a:endParaRPr lang="en-GB" altLang="zh-CN" b="0" i="0" dirty="0">
+              <a:effectLst/>
+              <a:latin typeface="Times New Roman Regular" panose="02020503050405090304" charset="0"/>
+              <a:cs typeface="Times New Roman Regular" panose="02020503050405090304" charset="0"/>
+            </a:endParaRPr>
           </a:p>
           <a:p>
             <a:pPr marL="285750" indent="-285750" algn="l">
@@ -5472,25 +5171,28 @@
               <a:spcAft>
                 <a:spcPts val="150"/>
               </a:spcAft>
-              <a:buFont typeface="Arial" panose="020B0604020202020204" pitchFamily="34" charset="0"/>
+              <a:buFont typeface="Arial" panose="020B0604020202090204" pitchFamily="34" charset="0"/>
               <a:buChar char="•"/>
             </a:pPr>
             <a:r>
-              <a:rPr lang="en" altLang="zh-CN" b="0" i="0" dirty="0">
+              <a:rPr lang="en-GB" altLang="zh-CN" b="0" i="0" dirty="0">
                 <a:effectLst/>
-                <a:latin typeface="-apple-system"/>
+                <a:latin typeface="Times New Roman Regular" panose="02020503050405090304" charset="0"/>
+                <a:cs typeface="Times New Roman Regular" panose="02020503050405090304" charset="0"/>
               </a:rPr>
               <a:t>During pump OFF (13–22 h), concentrations gradually decline (bulk + wall decay</a:t>
             </a:r>
             <a:r>
               <a:rPr lang="en-US" altLang="zh-CN" dirty="0">
-                <a:latin typeface="-apple-system"/>
+                <a:latin typeface="Times New Roman Regular" panose="02020503050405090304" charset="0"/>
+                <a:cs typeface="Times New Roman Regular" panose="02020503050405090304" charset="0"/>
               </a:rPr>
               <a:t>)</a:t>
             </a:r>
-            <a:endParaRPr lang="en" altLang="zh-CN" b="0" i="0" dirty="0">
+            <a:endParaRPr lang="en-GB" altLang="zh-CN" b="0" i="0" dirty="0">
               <a:effectLst/>
-              <a:latin typeface="-apple-system"/>
+              <a:latin typeface="Times New Roman Regular" panose="02020503050405090304" charset="0"/>
+              <a:cs typeface="Times New Roman Regular" panose="02020503050405090304" charset="0"/>
             </a:endParaRPr>
           </a:p>
           <a:p>
@@ -5501,30 +5203,38 @@
               <a:spcAft>
                 <a:spcPts val="150"/>
               </a:spcAft>
-              <a:buFont typeface="Arial" panose="020B0604020202020204" pitchFamily="34" charset="0"/>
+              <a:buFont typeface="Arial" panose="020B0604020202090204" pitchFamily="34" charset="0"/>
               <a:buChar char="•"/>
             </a:pPr>
             <a:r>
-              <a:rPr lang="en" altLang="zh-CN" b="0" i="0" dirty="0">
+              <a:rPr lang="en-GB" altLang="zh-CN" b="0" i="0" dirty="0">
                 <a:effectLst/>
-                <a:latin typeface="-apple-system"/>
+                <a:latin typeface="Times New Roman Regular" panose="02020503050405090304" charset="0"/>
+                <a:cs typeface="Times New Roman Regular" panose="02020503050405090304" charset="0"/>
               </a:rPr>
               <a:t>After 23 h pump ON, node 10 returns to 1.0 mg/L</a:t>
             </a:r>
             <a:r>
               <a:rPr lang="zh-CN" altLang="en-US" b="0" i="0" dirty="0">
                 <a:effectLst/>
-                <a:latin typeface="-apple-system"/>
+                <a:latin typeface="Times New Roman Regular" panose="02020503050405090304" charset="0"/>
+                <a:cs typeface="Times New Roman Regular" panose="02020503050405090304" charset="0"/>
               </a:rPr>
               <a:t> </a:t>
             </a:r>
             <a:r>
-              <a:rPr lang="en" altLang="zh-CN" b="0" i="0" dirty="0">
+              <a:rPr lang="en-GB" altLang="zh-CN" b="0" i="0" dirty="0">
                 <a:effectLst/>
-                <a:latin typeface="-apple-system"/>
+                <a:latin typeface="Times New Roman Regular" panose="02020503050405090304" charset="0"/>
+                <a:cs typeface="Times New Roman Regular" panose="02020503050405090304" charset="0"/>
               </a:rPr>
               <a:t>and downstream nodes recover. </a:t>
             </a:r>
+            <a:endParaRPr lang="en-GB" altLang="zh-CN" b="0" i="0" dirty="0">
+              <a:effectLst/>
+              <a:latin typeface="Times New Roman Regular" panose="02020503050405090304" charset="0"/>
+              <a:cs typeface="Times New Roman Regular" panose="02020503050405090304" charset="0"/>
+            </a:endParaRPr>
           </a:p>
           <a:p>
             <a:pPr marL="285750" indent="-285750" algn="l">
@@ -5534,35 +5244,35 @@
               <a:spcAft>
                 <a:spcPts val="150"/>
               </a:spcAft>
-              <a:buFont typeface="Arial" panose="020B0604020202020204" pitchFamily="34" charset="0"/>
+              <a:buFont typeface="Arial" panose="020B0604020202090204" pitchFamily="34" charset="0"/>
               <a:buChar char="•"/>
             </a:pPr>
             <a:r>
-              <a:rPr lang="en" altLang="zh-CN" b="0" i="0" dirty="0">
+              <a:rPr lang="en-GB" altLang="zh-CN" b="0" i="0" dirty="0">
                 <a:effectLst/>
-                <a:latin typeface="-apple-system"/>
+                <a:latin typeface="Times New Roman Regular" panose="02020503050405090304" charset="0"/>
+                <a:cs typeface="Times New Roman Regular" panose="02020503050405090304" charset="0"/>
               </a:rPr>
               <a:t>Terminal nodes 31/32 have the lowest means and occasionally hit the 0.2 mg/L threshold</a:t>
             </a:r>
-          </a:p>
-        </p:txBody>
-      </p:sp>
-      <p:sp>
-        <p:nvSpPr>
-          <p:cNvPr id="13" name="文本框 12">
-            <a:extLst>
-              <a:ext uri="{FF2B5EF4-FFF2-40B4-BE49-F238E27FC236}">
-                <a16:creationId xmlns:a16="http://schemas.microsoft.com/office/drawing/2014/main" id="{54D33063-EA34-6DA7-FF9E-DC0317E1D23E}"/>
-              </a:ext>
-            </a:extLst>
-          </p:cNvPr>
+            <a:endParaRPr lang="en-GB" altLang="zh-CN" b="0" i="0" dirty="0">
+              <a:effectLst/>
+              <a:latin typeface="Times New Roman Regular" panose="02020503050405090304" charset="0"/>
+              <a:cs typeface="Times New Roman Regular" panose="02020503050405090304" charset="0"/>
+            </a:endParaRPr>
+          </a:p>
+        </p:txBody>
+      </p:sp>
+      <p:sp>
+        <p:nvSpPr>
+          <p:cNvPr id="13" name="文本框 12"/>
           <p:cNvSpPr txBox="1"/>
           <p:nvPr/>
         </p:nvSpPr>
         <p:spPr>
           <a:xfrm>
             <a:off x="7720425" y="5134003"/>
-            <a:ext cx="4378952" cy="1251625"/>
+            <a:ext cx="4378952" cy="1237615"/>
           </a:xfrm>
           <a:prstGeom prst="rect">
             <a:avLst/>
@@ -5582,16 +5292,22 @@
               <a:spcAft>
                 <a:spcPts val="150"/>
               </a:spcAft>
-              <a:buFont typeface="Arial" panose="020B0604020202020204" pitchFamily="34" charset="0"/>
+              <a:buFont typeface="Arial" panose="020B0604020202090204" pitchFamily="34" charset="0"/>
               <a:buChar char="•"/>
             </a:pPr>
             <a:r>
-              <a:rPr lang="en" altLang="zh-CN" b="0" i="0" dirty="0">
+              <a:rPr lang="en-GB" altLang="zh-CN" b="0" i="0" dirty="0">
                 <a:effectLst/>
-                <a:latin typeface="-apple-system"/>
+                <a:latin typeface="Times New Roman" panose="02020503050405090304" charset="0"/>
+                <a:cs typeface="Times New Roman" panose="02020503050405090304" charset="0"/>
               </a:rPr>
               <a:t>Network-wide gradient: high near pump, low at far end (node 32 ≈ 0.15 mg/L). </a:t>
             </a:r>
+            <a:endParaRPr lang="en-GB" altLang="zh-CN" b="0" i="0" dirty="0">
+              <a:effectLst/>
+              <a:latin typeface="Times New Roman" panose="02020503050405090304" charset="0"/>
+              <a:cs typeface="Times New Roman" panose="02020503050405090304" charset="0"/>
+            </a:endParaRPr>
           </a:p>
           <a:p>
             <a:pPr marL="285750" indent="-285750" algn="l">
@@ -5601,49 +5317,51 @@
               <a:spcAft>
                 <a:spcPts val="150"/>
               </a:spcAft>
-              <a:buFont typeface="Arial" panose="020B0604020202020204" pitchFamily="34" charset="0"/>
+              <a:buFont typeface="Arial" panose="020B0604020202090204" pitchFamily="34" charset="0"/>
               <a:buChar char="•"/>
             </a:pPr>
             <a:r>
-              <a:rPr lang="en" altLang="zh-CN" b="0" i="0" dirty="0">
+              <a:rPr lang="en-GB" altLang="zh-CN" b="0" i="0" dirty="0">
                 <a:effectLst/>
-                <a:latin typeface="-apple-system"/>
+                <a:latin typeface="Times New Roman" panose="02020503050405090304" charset="0"/>
+                <a:cs typeface="Times New Roman" panose="02020503050405090304" charset="0"/>
               </a:rPr>
               <a:t>Smooth </a:t>
             </a:r>
             <a:r>
-              <a:rPr lang="en" altLang="zh-CN" b="0" i="0" dirty="0" err="1">
+              <a:rPr lang="en-GB" altLang="zh-CN" b="0" i="0" dirty="0" err="1">
                 <a:effectLst/>
-                <a:latin typeface="-apple-system"/>
+                <a:latin typeface="Times New Roman" panose="02020503050405090304" charset="0"/>
+                <a:cs typeface="Times New Roman" panose="02020503050405090304" charset="0"/>
               </a:rPr>
               <a:t>colour</a:t>
             </a:r>
             <a:r>
-              <a:rPr lang="en" altLang="zh-CN" b="0" i="0" dirty="0">
+              <a:rPr lang="en-GB" altLang="zh-CN" b="0" i="0" dirty="0">
                 <a:effectLst/>
-                <a:latin typeface="-apple-system"/>
+                <a:latin typeface="Times New Roman" panose="02020503050405090304" charset="0"/>
+                <a:cs typeface="Times New Roman" panose="02020503050405090304" charset="0"/>
               </a:rPr>
               <a:t> transition consistent with bulk + wall decay and demand dilution.</a:t>
             </a:r>
+            <a:endParaRPr lang="en-GB" altLang="zh-CN" b="0" i="0" dirty="0">
+              <a:effectLst/>
+              <a:latin typeface="Times New Roman" panose="02020503050405090304" charset="0"/>
+              <a:cs typeface="Times New Roman" panose="02020503050405090304" charset="0"/>
+            </a:endParaRPr>
           </a:p>
         </p:txBody>
       </p:sp>
       <p:pic>
         <p:nvPicPr>
-          <p:cNvPr id="15" name="图片 14" descr="图示&#10;&#10;AI 生成的内容可能不正确。">
-            <a:extLst>
-              <a:ext uri="{FF2B5EF4-FFF2-40B4-BE49-F238E27FC236}">
-                <a16:creationId xmlns:a16="http://schemas.microsoft.com/office/drawing/2014/main" id="{0C391867-43F4-DFF0-A670-2F586F1395B4}"/>
-              </a:ext>
-            </a:extLst>
-          </p:cNvPr>
+          <p:cNvPr id="15" name="图片 14" descr="图示&#10;&#10;AI 生成的内容可能不正确。"/>
           <p:cNvPicPr>
             <a:picLocks noChangeAspect="1"/>
           </p:cNvPicPr>
           <p:nvPr/>
         </p:nvPicPr>
         <p:blipFill>
-          <a:blip r:embed="rId3"/>
+          <a:blip r:embed="rId2"/>
           <a:stretch>
             <a:fillRect/>
           </a:stretch>
@@ -5659,11 +5377,6 @@
         </p:spPr>
       </p:pic>
     </p:spTree>
-    <p:extLst>
-      <p:ext uri="{BB962C8B-B14F-4D97-AF65-F5344CB8AC3E}">
-        <p14:creationId xmlns:p14="http://schemas.microsoft.com/office/powerpoint/2010/main" val="1574210351"/>
-      </p:ext>
-    </p:extLst>
   </p:cSld>
   <p:clrMapOvr>
     <a:masterClrMapping/>
@@ -5676,13 +5389,7 @@
   <p:cSld>
     <p:spTree>
       <p:nvGrpSpPr>
-        <p:cNvPr id="1" name="">
-          <a:extLst>
-            <a:ext uri="{FF2B5EF4-FFF2-40B4-BE49-F238E27FC236}">
-              <a16:creationId xmlns:a16="http://schemas.microsoft.com/office/drawing/2014/main" id="{C7AB2B63-42DE-598D-318E-44A32100A5AE}"/>
-            </a:ext>
-          </a:extLst>
-        </p:cNvPr>
+        <p:cNvPr id="1" name=""/>
         <p:cNvGrpSpPr/>
         <p:nvPr/>
       </p:nvGrpSpPr>
@@ -5696,20 +5403,14 @@
       </p:grpSpPr>
       <p:sp>
         <p:nvSpPr>
-          <p:cNvPr id="6" name="文本框 5">
-            <a:extLst>
-              <a:ext uri="{FF2B5EF4-FFF2-40B4-BE49-F238E27FC236}">
-                <a16:creationId xmlns:a16="http://schemas.microsoft.com/office/drawing/2014/main" id="{DCF631D9-FD51-F006-D8B4-721EC6791C4E}"/>
-              </a:ext>
-            </a:extLst>
-          </p:cNvPr>
+          <p:cNvPr id="6" name="文本框 5"/>
           <p:cNvSpPr txBox="1"/>
           <p:nvPr/>
         </p:nvSpPr>
         <p:spPr>
           <a:xfrm>
             <a:off x="277089" y="291496"/>
-            <a:ext cx="8548255" cy="523220"/>
+            <a:ext cx="8548255" cy="521970"/>
           </a:xfrm>
           <a:prstGeom prst="rect">
             <a:avLst/>
@@ -5723,22 +5424,22 @@
           <a:lstStyle/>
           <a:p>
             <a:r>
-              <a:rPr lang="en" altLang="zh-CN" sz="2800" b="1"/>
+              <a:rPr lang="en-GB" altLang="zh-CN" sz="2800" b="1">
+                <a:latin typeface="Times New Roman" panose="02020503050405090304" charset="0"/>
+                <a:cs typeface="Times New Roman" panose="02020503050405090304" charset="0"/>
+              </a:rPr>
               <a:t>1.3 Literature &amp; Background </a:t>
             </a:r>
-            <a:endParaRPr lang="en" altLang="zh-CN" sz="2800" b="1" dirty="0"/>
-          </a:p>
-        </p:txBody>
-      </p:sp>
-      <p:sp>
-        <p:nvSpPr>
-          <p:cNvPr id="2" name="文本框 1">
-            <a:extLst>
-              <a:ext uri="{FF2B5EF4-FFF2-40B4-BE49-F238E27FC236}">
-                <a16:creationId xmlns:a16="http://schemas.microsoft.com/office/drawing/2014/main" id="{6E5AC987-C580-A925-AB30-8A723A4209E4}"/>
-              </a:ext>
-            </a:extLst>
-          </p:cNvPr>
+            <a:endParaRPr lang="en-GB" altLang="zh-CN" sz="2800" b="1" dirty="0">
+              <a:latin typeface="Times New Roman" panose="02020503050405090304" charset="0"/>
+              <a:cs typeface="Times New Roman" panose="02020503050405090304" charset="0"/>
+            </a:endParaRPr>
+          </a:p>
+        </p:txBody>
+      </p:sp>
+      <p:sp>
+        <p:nvSpPr>
+          <p:cNvPr id="2" name="文本框 1"/>
           <p:cNvSpPr txBox="1"/>
           <p:nvPr/>
         </p:nvSpPr>
@@ -5764,20 +5465,14 @@
       </p:sp>
       <p:sp>
         <p:nvSpPr>
-          <p:cNvPr id="12" name="文本框 11">
-            <a:extLst>
-              <a:ext uri="{FF2B5EF4-FFF2-40B4-BE49-F238E27FC236}">
-                <a16:creationId xmlns:a16="http://schemas.microsoft.com/office/drawing/2014/main" id="{949D010E-4470-5173-FA0C-0F6585C74E25}"/>
-              </a:ext>
-            </a:extLst>
-          </p:cNvPr>
+          <p:cNvPr id="12" name="文本框 11"/>
           <p:cNvSpPr txBox="1"/>
           <p:nvPr/>
         </p:nvSpPr>
         <p:spPr>
           <a:xfrm>
             <a:off x="572658" y="1616931"/>
-            <a:ext cx="6096000" cy="3416320"/>
+            <a:ext cx="6096000" cy="3415030"/>
           </a:xfrm>
           <a:prstGeom prst="rect">
             <a:avLst/>
@@ -5791,75 +5486,116 @@
           <a:lstStyle/>
           <a:p>
             <a:pPr marL="285750" indent="-285750">
-              <a:buFont typeface="Arial" panose="020B0604020202020204" pitchFamily="34" charset="0"/>
+              <a:buFont typeface="Arial" panose="020B0604020202090204" pitchFamily="34" charset="0"/>
               <a:buChar char="•"/>
             </a:pPr>
             <a:r>
-              <a:rPr lang="en" altLang="zh-CN" sz="2400" dirty="0"/>
+              <a:rPr lang="en-GB" altLang="zh-CN" sz="2400" dirty="0">
+                <a:latin typeface="Times New Roman" panose="02020503050405090304" charset="0"/>
+                <a:cs typeface="Times New Roman" panose="02020503050405090304" charset="0"/>
+              </a:rPr>
               <a:t>Decay mechanisms</a:t>
             </a:r>
-          </a:p>
-          <a:p>
-            <a:endParaRPr lang="en" altLang="zh-CN" sz="2400" dirty="0"/>
+            <a:endParaRPr lang="en-GB" altLang="zh-CN" sz="2400" dirty="0">
+              <a:latin typeface="Times New Roman" panose="02020503050405090304" charset="0"/>
+              <a:cs typeface="Times New Roman" panose="02020503050405090304" charset="0"/>
+            </a:endParaRPr>
+          </a:p>
+          <a:p>
+            <a:endParaRPr lang="en-GB" altLang="zh-CN" sz="2400" dirty="0">
+              <a:latin typeface="Times New Roman" panose="02020503050405090304" charset="0"/>
+              <a:cs typeface="Times New Roman" panose="02020503050405090304" charset="0"/>
+            </a:endParaRPr>
           </a:p>
           <a:p>
             <a:pPr marL="285750" indent="-285750">
-              <a:buFont typeface="Arial" panose="020B0604020202020204" pitchFamily="34" charset="0"/>
+              <a:buFont typeface="Arial" panose="020B0604020202090204" pitchFamily="34" charset="0"/>
               <a:buChar char="•"/>
             </a:pPr>
             <a:r>
-              <a:rPr lang="en" altLang="zh-CN" sz="2400" dirty="0"/>
+              <a:rPr lang="en-GB" altLang="zh-CN" sz="2400" dirty="0">
+                <a:latin typeface="Times New Roman" panose="02020503050405090304" charset="0"/>
+                <a:cs typeface="Times New Roman" panose="02020503050405090304" charset="0"/>
+              </a:rPr>
               <a:t>Calibration</a:t>
             </a:r>
-          </a:p>
-          <a:p>
-            <a:endParaRPr lang="en" altLang="zh-CN" sz="2400" dirty="0"/>
+            <a:endParaRPr lang="en-GB" altLang="zh-CN" sz="2400" dirty="0">
+              <a:latin typeface="Times New Roman" panose="02020503050405090304" charset="0"/>
+              <a:cs typeface="Times New Roman" panose="02020503050405090304" charset="0"/>
+            </a:endParaRPr>
+          </a:p>
+          <a:p>
+            <a:endParaRPr lang="en-GB" altLang="zh-CN" sz="2400" dirty="0">
+              <a:latin typeface="Times New Roman" panose="02020503050405090304" charset="0"/>
+              <a:cs typeface="Times New Roman" panose="02020503050405090304" charset="0"/>
+            </a:endParaRPr>
           </a:p>
           <a:p>
             <a:pPr marL="285750" indent="-285750">
-              <a:buFont typeface="Arial" panose="020B0604020202020204" pitchFamily="34" charset="0"/>
+              <a:buFont typeface="Arial" panose="020B0604020202090204" pitchFamily="34" charset="0"/>
               <a:buChar char="•"/>
             </a:pPr>
             <a:r>
-              <a:rPr lang="en" altLang="zh-CN" sz="2400" dirty="0"/>
+              <a:rPr lang="en-GB" altLang="zh-CN" sz="2400" dirty="0">
+                <a:latin typeface="Times New Roman" panose="02020503050405090304" charset="0"/>
+                <a:cs typeface="Times New Roman" panose="02020503050405090304" charset="0"/>
+              </a:rPr>
               <a:t>Measurement</a:t>
             </a:r>
-          </a:p>
-          <a:p>
-            <a:endParaRPr lang="en" altLang="zh-CN" sz="2400" dirty="0"/>
+            <a:endParaRPr lang="en-GB" altLang="zh-CN" sz="2400" dirty="0">
+              <a:latin typeface="Times New Roman" panose="02020503050405090304" charset="0"/>
+              <a:cs typeface="Times New Roman" panose="02020503050405090304" charset="0"/>
+            </a:endParaRPr>
+          </a:p>
+          <a:p>
+            <a:endParaRPr lang="en-GB" altLang="zh-CN" sz="2400" dirty="0">
+              <a:latin typeface="Times New Roman" panose="02020503050405090304" charset="0"/>
+              <a:cs typeface="Times New Roman" panose="02020503050405090304" charset="0"/>
+            </a:endParaRPr>
           </a:p>
           <a:p>
             <a:pPr marL="285750" indent="-285750">
-              <a:buFont typeface="Arial" panose="020B0604020202020204" pitchFamily="34" charset="0"/>
+              <a:buFont typeface="Arial" panose="020B0604020202090204" pitchFamily="34" charset="0"/>
               <a:buChar char="•"/>
             </a:pPr>
             <a:r>
-              <a:rPr lang="en" altLang="zh-CN" sz="2400" dirty="0"/>
+              <a:rPr lang="en-GB" altLang="zh-CN" sz="2400" dirty="0">
+                <a:latin typeface="Times New Roman" panose="02020503050405090304" charset="0"/>
+                <a:cs typeface="Times New Roman" panose="02020503050405090304" charset="0"/>
+              </a:rPr>
               <a:t>Uncertainty</a:t>
             </a:r>
-          </a:p>
-          <a:p>
-            <a:endParaRPr lang="en" altLang="zh-CN" sz="2400" dirty="0"/>
+            <a:endParaRPr lang="en-GB" altLang="zh-CN" sz="2400" dirty="0">
+              <a:latin typeface="Times New Roman" panose="02020503050405090304" charset="0"/>
+              <a:cs typeface="Times New Roman" panose="02020503050405090304" charset="0"/>
+            </a:endParaRPr>
+          </a:p>
+          <a:p>
+            <a:endParaRPr lang="en-GB" altLang="zh-CN" sz="2400" dirty="0">
+              <a:latin typeface="Times New Roman" panose="02020503050405090304" charset="0"/>
+              <a:cs typeface="Times New Roman" panose="02020503050405090304" charset="0"/>
+            </a:endParaRPr>
           </a:p>
           <a:p>
             <a:pPr marL="285750" indent="-285750">
-              <a:buFont typeface="Arial" panose="020B0604020202020204" pitchFamily="34" charset="0"/>
+              <a:buFont typeface="Arial" panose="020B0604020202090204" pitchFamily="34" charset="0"/>
               <a:buChar char="•"/>
             </a:pPr>
             <a:r>
-              <a:rPr lang="en" altLang="zh-CN" sz="2400" dirty="0"/>
+              <a:rPr lang="en-GB" altLang="zh-CN" sz="2400" dirty="0">
+                <a:latin typeface="Times New Roman" panose="02020503050405090304" charset="0"/>
+                <a:cs typeface="Times New Roman" panose="02020503050405090304" charset="0"/>
+              </a:rPr>
               <a:t>Regulation</a:t>
             </a:r>
-            <a:endParaRPr lang="zh-CN" altLang="en-US" sz="2400" dirty="0"/>
+            <a:endParaRPr lang="zh-CN" altLang="en-US" sz="2400" dirty="0">
+              <a:latin typeface="Times New Roman" panose="02020503050405090304" charset="0"/>
+              <a:cs typeface="Times New Roman" panose="02020503050405090304" charset="0"/>
+            </a:endParaRPr>
           </a:p>
         </p:txBody>
       </p:sp>
     </p:spTree>
-    <p:extLst>
-      <p:ext uri="{BB962C8B-B14F-4D97-AF65-F5344CB8AC3E}">
-        <p14:creationId xmlns:p14="http://schemas.microsoft.com/office/powerpoint/2010/main" val="528680804"/>
-      </p:ext>
-    </p:extLst>
   </p:cSld>
   <p:clrMapOvr>
     <a:masterClrMapping/>
@@ -5872,13 +5608,7 @@
   <p:cSld>
     <p:spTree>
       <p:nvGrpSpPr>
-        <p:cNvPr id="1" name="">
-          <a:extLst>
-            <a:ext uri="{FF2B5EF4-FFF2-40B4-BE49-F238E27FC236}">
-              <a16:creationId xmlns:a16="http://schemas.microsoft.com/office/drawing/2014/main" id="{896AE76E-582F-B819-FE38-0BBEBDA2C3A7}"/>
-            </a:ext>
-          </a:extLst>
-        </p:cNvPr>
+        <p:cNvPr id="1" name=""/>
         <p:cNvGrpSpPr/>
         <p:nvPr/>
       </p:nvGrpSpPr>
@@ -5892,20 +5622,14 @@
       </p:grpSpPr>
       <p:sp>
         <p:nvSpPr>
-          <p:cNvPr id="6" name="文本框 5">
-            <a:extLst>
-              <a:ext uri="{FF2B5EF4-FFF2-40B4-BE49-F238E27FC236}">
-                <a16:creationId xmlns:a16="http://schemas.microsoft.com/office/drawing/2014/main" id="{F97636BD-4255-EAF3-6289-591E81E78812}"/>
-              </a:ext>
-            </a:extLst>
-          </p:cNvPr>
+          <p:cNvPr id="6" name="文本框 5"/>
           <p:cNvSpPr txBox="1"/>
           <p:nvPr/>
         </p:nvSpPr>
         <p:spPr>
           <a:xfrm>
             <a:off x="277089" y="291496"/>
-            <a:ext cx="8548255" cy="523220"/>
+            <a:ext cx="8548255" cy="521970"/>
           </a:xfrm>
           <a:prstGeom prst="rect">
             <a:avLst/>
@@ -5919,37 +5643,43 @@
           <a:lstStyle/>
           <a:p>
             <a:r>
-              <a:rPr lang="en-US" altLang="zh-CN" sz="2800" b="1" dirty="0"/>
+              <a:rPr lang="en-US" altLang="zh-CN" sz="2800" b="1" dirty="0">
+                <a:latin typeface="Times New Roman" panose="02020503050405090304" charset="0"/>
+                <a:cs typeface="Times New Roman" panose="02020503050405090304" charset="0"/>
+              </a:rPr>
               <a:t>2</a:t>
             </a:r>
             <a:r>
-              <a:rPr lang="zh-CN" altLang="en-US" sz="2800" b="1" dirty="0"/>
+              <a:rPr lang="zh-CN" altLang="en-US" sz="2800" b="1" dirty="0">
+                <a:latin typeface="Times New Roman" panose="02020503050405090304" charset="0"/>
+                <a:cs typeface="Times New Roman" panose="02020503050405090304" charset="0"/>
+              </a:rPr>
               <a:t> </a:t>
             </a:r>
             <a:r>
-              <a:rPr lang="en-US" altLang="zh-CN" sz="2800" b="1" dirty="0"/>
+              <a:rPr lang="en-US" altLang="zh-CN" sz="2800" b="1" dirty="0">
+                <a:latin typeface="Times New Roman" panose="02020503050405090304" charset="0"/>
+                <a:cs typeface="Times New Roman" panose="02020503050405090304" charset="0"/>
+              </a:rPr>
               <a:t>Questions/problems</a:t>
             </a:r>
-            <a:endParaRPr lang="en" altLang="zh-CN" sz="2800" b="1" dirty="0"/>
-          </a:p>
-        </p:txBody>
-      </p:sp>
-      <p:sp>
-        <p:nvSpPr>
-          <p:cNvPr id="3" name="文本框 2">
-            <a:extLst>
-              <a:ext uri="{FF2B5EF4-FFF2-40B4-BE49-F238E27FC236}">
-                <a16:creationId xmlns:a16="http://schemas.microsoft.com/office/drawing/2014/main" id="{74015CF5-018D-1CB6-CE7C-A6F297F5BFAF}"/>
-              </a:ext>
-            </a:extLst>
-          </p:cNvPr>
+            <a:endParaRPr lang="en-GB" altLang="zh-CN" sz="2800" b="1" dirty="0">
+              <a:latin typeface="Times New Roman" panose="02020503050405090304" charset="0"/>
+              <a:cs typeface="Times New Roman" panose="02020503050405090304" charset="0"/>
+            </a:endParaRPr>
+          </a:p>
+        </p:txBody>
+      </p:sp>
+      <p:sp>
+        <p:nvSpPr>
+          <p:cNvPr id="3" name="文本框 2"/>
           <p:cNvSpPr txBox="1"/>
           <p:nvPr/>
         </p:nvSpPr>
         <p:spPr>
           <a:xfrm>
-            <a:off x="581891" y="1494105"/>
-            <a:ext cx="6096000" cy="646331"/>
+            <a:off x="581660" y="1494155"/>
+            <a:ext cx="7576820" cy="645160"/>
           </a:xfrm>
           <a:prstGeom prst="rect">
             <a:avLst/>
@@ -5976,46 +5706,65 @@
               <a:buSzTx/>
               <a:buFontTx/>
               <a:buAutoNum type="arabicPeriod"/>
-              <a:tabLst/>
               <a:defRPr/>
             </a:pPr>
             <a:r>
-              <a:rPr lang="en" altLang="zh-CN" sz="1800" dirty="0">
+              <a:rPr lang="en-GB" altLang="zh-CN" sz="1800" dirty="0">
                 <a:solidFill>
                   <a:srgbClr val="FF0000"/>
                 </a:solidFill>
+                <a:latin typeface="Times New Roman" panose="02020503050405090304" charset="0"/>
+                <a:cs typeface="Times New Roman" panose="02020503050405090304" charset="0"/>
               </a:rPr>
               <a:t>WNTR </a:t>
             </a:r>
             <a:r>
-              <a:rPr lang="en" altLang="zh-CN" sz="1800" dirty="0" err="1">
+              <a:rPr lang="en-GB" altLang="zh-CN" sz="1800" dirty="0" err="1">
                 <a:solidFill>
                   <a:srgbClr val="FF0000"/>
                 </a:solidFill>
+                <a:latin typeface="Times New Roman" panose="02020503050405090304" charset="0"/>
+                <a:cs typeface="Times New Roman" panose="02020503050405090304" charset="0"/>
               </a:rPr>
               <a:t>initial_quality</a:t>
             </a:r>
             <a:r>
-              <a:rPr lang="en" altLang="zh-CN" sz="1800" dirty="0">
+              <a:rPr lang="en-GB" altLang="zh-CN" sz="1800" dirty="0">
                 <a:solidFill>
                   <a:srgbClr val="FF0000"/>
                 </a:solidFill>
-              </a:rPr>
-              <a:t> units (kg/m³ → mg/L for display</a:t>
-            </a:r>
-            <a:r>
-              <a:rPr lang="zh-CN" altLang="en-US" sz="1800" dirty="0">
+                <a:latin typeface="Times New Roman" panose="02020503050405090304" charset="0"/>
+                <a:cs typeface="Times New Roman" panose="02020503050405090304" charset="0"/>
+              </a:rPr>
+              <a:t> units (kg/m</a:t>
+            </a:r>
+            <a:r>
+              <a:rPr lang="en-US" altLang="en-GB" sz="1800" baseline="30000" dirty="0">
                 <a:solidFill>
                   <a:srgbClr val="FF0000"/>
                 </a:solidFill>
-              </a:rPr>
-              <a:t> </a:t>
-            </a:r>
-            <a:r>
-              <a:rPr lang="en-US" altLang="zh-CN" sz="1800" dirty="0">
+                <a:latin typeface="Times New Roman" panose="02020503050405090304" charset="0"/>
+                <a:cs typeface="Times New Roman" panose="02020503050405090304" charset="0"/>
+              </a:rPr>
+              <a:t>3</a:t>
+            </a:r>
+            <a:r>
+              <a:rPr lang="en-GB" altLang="zh-CN" sz="1800" dirty="0">
                 <a:solidFill>
                   <a:srgbClr val="FF0000"/>
                 </a:solidFill>
+                <a:latin typeface="Times New Roman" panose="02020503050405090304" charset="0"/>
+                <a:cs typeface="Times New Roman" panose="02020503050405090304" charset="0"/>
+              </a:rPr>
+              <a:t>→ mg/L for display</a:t>
+            </a:r>
+            <a:r>
+              <a:rPr lang="en-US" altLang="en-GB" sz="1800" dirty="0">
+                <a:solidFill>
+                  <a:srgbClr val="FF0000"/>
+                </a:solidFill>
+                <a:latin typeface="Times New Roman" panose="02020503050405090304" charset="0"/>
+                <a:cs typeface="Times New Roman" panose="02020503050405090304" charset="0"/>
               </a:rPr>
               <a:t>?</a:t>
             </a:r>
@@ -6024,12 +5773,21 @@
                 <a:solidFill>
                   <a:srgbClr val="FF0000"/>
                 </a:solidFill>
+                <a:latin typeface="Times New Roman" panose="02020503050405090304" charset="0"/>
+                <a:cs typeface="Times New Roman" panose="02020503050405090304" charset="0"/>
               </a:rPr>
               <a:t>)</a:t>
             </a:r>
-          </a:p>
-          <a:p>
-            <a:pPr marL="342900" marR="0" lvl="0" indent="-342900" algn="l" defTabSz="914400" rtl="0" eaLnBrk="1" fontAlgn="auto" latinLnBrk="0" hangingPunct="1">
+            <a:endParaRPr lang="en-US" altLang="zh-CN" dirty="0">
+              <a:solidFill>
+                <a:srgbClr val="FF0000"/>
+              </a:solidFill>
+              <a:latin typeface="Times New Roman" panose="02020503050405090304" charset="0"/>
+              <a:cs typeface="Times New Roman" panose="02020503050405090304" charset="0"/>
+            </a:endParaRPr>
+          </a:p>
+          <a:p>
+            <a:pPr marR="0" lvl="0" indent="0" algn="l" defTabSz="914400" rtl="0" eaLnBrk="1" fontAlgn="auto" latinLnBrk="0" hangingPunct="1">
               <a:lnSpc>
                 <a:spcPct val="100000"/>
               </a:lnSpc>
@@ -6042,34 +5800,29 @@
               <a:buClrTx/>
               <a:buSzTx/>
               <a:buFontTx/>
-              <a:buAutoNum type="arabicPeriod"/>
-              <a:tabLst/>
+              <a:buNone/>
               <a:defRPr/>
             </a:pPr>
-            <a:endParaRPr lang="en" altLang="zh-CN" sz="1800" dirty="0">
+            <a:endParaRPr lang="en-GB" altLang="zh-CN" sz="1800" dirty="0">
               <a:solidFill>
                 <a:srgbClr val="FF0000"/>
               </a:solidFill>
+              <a:latin typeface="Times New Roman" panose="02020503050405090304" charset="0"/>
+              <a:cs typeface="Times New Roman" panose="02020503050405090304" charset="0"/>
             </a:endParaRPr>
           </a:p>
         </p:txBody>
       </p:sp>
       <p:sp>
         <p:nvSpPr>
-          <p:cNvPr id="4" name="文本框 3">
-            <a:extLst>
-              <a:ext uri="{FF2B5EF4-FFF2-40B4-BE49-F238E27FC236}">
-                <a16:creationId xmlns:a16="http://schemas.microsoft.com/office/drawing/2014/main" id="{A8C77E65-C777-76CF-C5AE-3A50C359A8B3}"/>
-              </a:ext>
-            </a:extLst>
-          </p:cNvPr>
+          <p:cNvPr id="4" name="文本框 3"/>
           <p:cNvSpPr txBox="1"/>
           <p:nvPr/>
         </p:nvSpPr>
         <p:spPr>
           <a:xfrm>
             <a:off x="581891" y="2681279"/>
-            <a:ext cx="11374582" cy="3524042"/>
+            <a:ext cx="11374582" cy="3484245"/>
           </a:xfrm>
           <a:prstGeom prst="rect">
             <a:avLst/>
@@ -6084,75 +5837,46 @@
           <a:p>
             <a:pPr algn="l"/>
             <a:r>
-              <a:rPr lang="en-US" altLang="zh-CN" b="0" dirty="0">
+              <a:rPr lang="en-US" altLang="zh-CN" dirty="0">
                 <a:solidFill>
                   <a:srgbClr val="FF0000"/>
                 </a:solidFill>
                 <a:effectLst/>
-                <a:latin typeface="+mn-ea"/>
+                <a:latin typeface="Times New Roman" panose="02020503050405090304" charset="0"/>
+                <a:cs typeface="Times New Roman" panose="02020503050405090304" charset="0"/>
               </a:rPr>
               <a:t>2.</a:t>
             </a:r>
             <a:r>
-              <a:rPr lang="zh-CN" altLang="en-US" b="0" dirty="0">
+              <a:rPr lang="zh-CN" altLang="en-US" dirty="0">
                 <a:solidFill>
                   <a:srgbClr val="FF0000"/>
                 </a:solidFill>
                 <a:effectLst/>
-                <a:latin typeface="+mn-ea"/>
+                <a:latin typeface="Times New Roman" panose="02020503050405090304" charset="0"/>
+                <a:cs typeface="Times New Roman" panose="02020503050405090304" charset="0"/>
               </a:rPr>
               <a:t> </a:t>
             </a:r>
             <a:r>
-              <a:rPr lang="en" altLang="zh-CN" b="0" dirty="0">
+              <a:rPr lang="en-GB" altLang="zh-CN" dirty="0">
                 <a:solidFill>
                   <a:srgbClr val="FF0000"/>
                 </a:solidFill>
                 <a:effectLst/>
-                <a:latin typeface="+mn-ea"/>
-              </a:rPr>
-              <a:t>For uncertainty-aware chlorine calibration, we have both </a:t>
-            </a:r>
-            <a:r>
-              <a:rPr lang="en" altLang="zh-CN" b="1" dirty="0">
-                <a:solidFill>
-                  <a:srgbClr val="FF0000"/>
-                </a:solidFill>
-                <a:effectLst/>
-                <a:latin typeface="+mn-ea"/>
-              </a:rPr>
-              <a:t>sensor error</a:t>
-            </a:r>
-            <a:r>
-              <a:rPr lang="en" altLang="zh-CN" b="0" dirty="0">
-                <a:solidFill>
-                  <a:srgbClr val="FF0000"/>
-                </a:solidFill>
-                <a:effectLst/>
-                <a:latin typeface="+mn-ea"/>
-              </a:rPr>
-              <a:t> and unknown </a:t>
-            </a:r>
-            <a:r>
-              <a:rPr lang="en" altLang="zh-CN" b="1" dirty="0">
-                <a:solidFill>
-                  <a:srgbClr val="FF0000"/>
-                </a:solidFill>
-                <a:effectLst/>
-                <a:latin typeface="+mn-ea"/>
-              </a:rPr>
-              <a:t>bulk/wall coefficients</a:t>
-            </a:r>
-            <a:r>
-              <a:rPr lang="en" altLang="zh-CN" b="0" dirty="0">
-                <a:solidFill>
-                  <a:srgbClr val="FF0000"/>
-                </a:solidFill>
-                <a:effectLst/>
-                <a:latin typeface="+mn-ea"/>
-              </a:rPr>
-              <a:t>. </a:t>
-            </a:r>
+                <a:latin typeface="Times New Roman" panose="02020503050405090304" charset="0"/>
+                <a:cs typeface="Times New Roman" panose="02020503050405090304" charset="0"/>
+              </a:rPr>
+              <a:t>For uncertainty-aware chlorine calibration, we have both sensor error and unknown bulk/wall coefficients. </a:t>
+            </a:r>
+            <a:endParaRPr lang="en-GB" altLang="zh-CN" dirty="0">
+              <a:solidFill>
+                <a:srgbClr val="FF0000"/>
+              </a:solidFill>
+              <a:effectLst/>
+              <a:latin typeface="Times New Roman" panose="02020503050405090304" charset="0"/>
+              <a:cs typeface="Times New Roman" panose="02020503050405090304" charset="0"/>
+            </a:endParaRPr>
           </a:p>
           <a:p>
             <a:pPr algn="l">
@@ -6163,9 +5887,10 @@
                 <a:spcPts val="450"/>
               </a:spcAft>
             </a:pPr>
-            <a:endParaRPr lang="en" altLang="zh-CN" b="0" dirty="0">
+            <a:endParaRPr lang="en-GB" altLang="zh-CN" dirty="0">
               <a:effectLst/>
-              <a:latin typeface="+mn-ea"/>
+              <a:latin typeface="Times New Roman" panose="02020503050405090304" charset="0"/>
+              <a:cs typeface="Times New Roman" panose="02020503050405090304" charset="0"/>
             </a:endParaRPr>
           </a:p>
           <a:p>
@@ -6178,29 +5903,33 @@
               </a:spcAft>
             </a:pPr>
             <a:r>
-              <a:rPr lang="en-US" altLang="zh-CN" b="0" dirty="0">
+              <a:rPr lang="en-US" altLang="zh-CN" dirty="0">
                 <a:effectLst/>
-                <a:latin typeface="+mn-ea"/>
+                <a:latin typeface="Times New Roman" panose="02020503050405090304" charset="0"/>
+                <a:cs typeface="Times New Roman" panose="02020503050405090304" charset="0"/>
               </a:rPr>
               <a:t>-</a:t>
             </a:r>
             <a:r>
-              <a:rPr lang="en" altLang="zh-CN" b="0" dirty="0">
+              <a:rPr lang="en-GB" altLang="zh-CN" dirty="0">
                 <a:effectLst/>
-                <a:latin typeface="+mn-ea"/>
+                <a:latin typeface="Times New Roman" panose="02020503050405090304" charset="0"/>
+                <a:cs typeface="Times New Roman" panose="02020503050405090304" charset="0"/>
               </a:rPr>
               <a:t>Include an observation error model from the </a:t>
             </a:r>
             <a:r>
-              <a:rPr lang="en-US" altLang="zh-CN" b="0" dirty="0">
+              <a:rPr lang="en-US" altLang="zh-CN" dirty="0">
                 <a:effectLst/>
-                <a:latin typeface="+mn-ea"/>
+                <a:latin typeface="Times New Roman" panose="02020503050405090304" charset="0"/>
+                <a:cs typeface="Times New Roman" panose="02020503050405090304" charset="0"/>
               </a:rPr>
               <a:t>start?</a:t>
             </a:r>
-            <a:endParaRPr lang="en" altLang="zh-CN" b="0" dirty="0">
+            <a:endParaRPr lang="en-GB" altLang="zh-CN" dirty="0">
               <a:effectLst/>
-              <a:latin typeface="+mn-ea"/>
+              <a:latin typeface="Times New Roman" panose="02020503050405090304" charset="0"/>
+              <a:cs typeface="Times New Roman" panose="02020503050405090304" charset="0"/>
             </a:endParaRPr>
           </a:p>
           <a:p>
@@ -6213,75 +5942,74 @@
               </a:spcAft>
             </a:pPr>
             <a:r>
-              <a:rPr lang="en-US" altLang="zh-CN" b="0" dirty="0">
+              <a:rPr lang="en-US" altLang="zh-CN" dirty="0">
                 <a:effectLst/>
-                <a:latin typeface="+mn-ea"/>
+                <a:latin typeface="Times New Roman" panose="02020503050405090304" charset="0"/>
+                <a:cs typeface="Times New Roman" panose="02020503050405090304" charset="0"/>
               </a:rPr>
               <a:t>-</a:t>
             </a:r>
             <a:r>
-              <a:rPr lang="en" altLang="zh-CN" b="0" dirty="0">
+              <a:rPr lang="en-GB" altLang="zh-CN" dirty="0">
                 <a:effectLst/>
-                <a:latin typeface="+mn-ea"/>
+                <a:latin typeface="Times New Roman" panose="02020503050405090304" charset="0"/>
+                <a:cs typeface="Times New Roman" panose="02020503050405090304" charset="0"/>
               </a:rPr>
               <a:t>Do deterministic calibration first (treat observations as truth), then add sensor uncertainty later</a:t>
             </a:r>
             <a:r>
               <a:rPr lang="en-US" altLang="zh-CN" dirty="0">
-                <a:latin typeface="+mn-ea"/>
+                <a:latin typeface="Times New Roman" panose="02020503050405090304" charset="0"/>
+                <a:cs typeface="Times New Roman" panose="02020503050405090304" charset="0"/>
               </a:rPr>
               <a:t>?</a:t>
             </a:r>
-            <a:endParaRPr lang="en" altLang="zh-CN" b="0" dirty="0">
+            <a:endParaRPr lang="en-GB" altLang="zh-CN" dirty="0">
               <a:effectLst/>
-              <a:latin typeface="+mn-ea"/>
+              <a:latin typeface="Times New Roman" panose="02020503050405090304" charset="0"/>
+              <a:cs typeface="Times New Roman" panose="02020503050405090304" charset="0"/>
             </a:endParaRPr>
           </a:p>
           <a:p>
             <a:pPr algn="l"/>
-            <a:endParaRPr lang="en" altLang="zh-CN" b="0" dirty="0">
+            <a:endParaRPr lang="en-GB" altLang="zh-CN" dirty="0">
               <a:effectLst/>
-              <a:latin typeface="+mn-ea"/>
+              <a:latin typeface="Times New Roman" panose="02020503050405090304" charset="0"/>
+              <a:cs typeface="Times New Roman" panose="02020503050405090304" charset="0"/>
             </a:endParaRPr>
           </a:p>
           <a:p>
             <a:pPr algn="l"/>
             <a:r>
-              <a:rPr lang="en" altLang="zh-CN" b="0" dirty="0">
+              <a:rPr lang="en-GB" altLang="zh-CN" dirty="0">
                 <a:effectLst/>
-                <a:latin typeface="+mn-ea"/>
-              </a:rPr>
-              <a:t>My concern: if sensor data are biased or noisy, and we calibrate bulk/wall against them without modelling sensor error, the fitted decay parameters may </a:t>
-            </a:r>
-            <a:r>
-              <a:rPr lang="en" altLang="zh-CN" b="1" dirty="0">
-                <a:effectLst/>
-                <a:latin typeface="+mn-ea"/>
-              </a:rPr>
-              <a:t>absorb measurement error</a:t>
-            </a:r>
-            <a:r>
-              <a:rPr lang="en" altLang="zh-CN" b="0" dirty="0">
-                <a:effectLst/>
-                <a:latin typeface="+mn-ea"/>
-              </a:rPr>
-              <a:t>. </a:t>
-            </a:r>
+                <a:latin typeface="Times New Roman" panose="02020503050405090304" charset="0"/>
+                <a:cs typeface="Times New Roman" panose="02020503050405090304" charset="0"/>
+              </a:rPr>
+              <a:t>My concern: if sensor data are biased or noisy, and we calibrate bulk/wall against them without modelling sensor error, the fitted decay parameters may absorb measurement error. </a:t>
+            </a:r>
+            <a:endParaRPr lang="en-GB" altLang="zh-CN" dirty="0">
+              <a:effectLst/>
+              <a:latin typeface="Times New Roman" panose="02020503050405090304" charset="0"/>
+              <a:cs typeface="Times New Roman" panose="02020503050405090304" charset="0"/>
+            </a:endParaRPr>
           </a:p>
           <a:p>
             <a:pPr algn="l"/>
-            <a:endParaRPr lang="en" altLang="zh-CN" b="0" dirty="0">
+            <a:endParaRPr lang="en-GB" altLang="zh-CN" dirty="0">
               <a:effectLst/>
-              <a:latin typeface="+mn-ea"/>
+              <a:latin typeface="Times New Roman" panose="02020503050405090304" charset="0"/>
+              <a:cs typeface="Times New Roman" panose="02020503050405090304" charset="0"/>
             </a:endParaRPr>
           </a:p>
           <a:p>
             <a:pPr algn="l"/>
-            <a:endParaRPr lang="en" altLang="zh-CN" dirty="0">
+            <a:endParaRPr lang="en-GB" altLang="zh-CN" dirty="0">
               <a:solidFill>
                 <a:srgbClr val="FF0000"/>
               </a:solidFill>
-              <a:latin typeface="+mn-ea"/>
+              <a:latin typeface="Times New Roman" panose="02020503050405090304" charset="0"/>
+              <a:cs typeface="Times New Roman" panose="02020503050405090304" charset="0"/>
             </a:endParaRPr>
           </a:p>
           <a:p>
@@ -6290,7 +6018,8 @@
                 <a:solidFill>
                   <a:srgbClr val="FF0000"/>
                 </a:solidFill>
-                <a:latin typeface="+mn-ea"/>
+                <a:latin typeface="Times New Roman" panose="02020503050405090304" charset="0"/>
+                <a:cs typeface="Times New Roman" panose="02020503050405090304" charset="0"/>
               </a:rPr>
               <a:t>3. Is the paper using 0.2 mg/L (WHO)</a:t>
             </a:r>
@@ -6299,7 +6028,8 @@
                 <a:solidFill>
                   <a:srgbClr val="FF0000"/>
                 </a:solidFill>
-                <a:latin typeface="+mn-ea"/>
+                <a:latin typeface="Times New Roman" panose="02020503050405090304" charset="0"/>
+                <a:cs typeface="Times New Roman" panose="02020503050405090304" charset="0"/>
               </a:rPr>
               <a:t> </a:t>
             </a:r>
@@ -6308,10 +6038,18 @@
                 <a:solidFill>
                   <a:srgbClr val="FF0000"/>
                 </a:solidFill>
-                <a:latin typeface="+mn-ea"/>
+                <a:latin typeface="Times New Roman" panose="02020503050405090304" charset="0"/>
+                <a:cs typeface="Times New Roman" panose="02020503050405090304" charset="0"/>
               </a:rPr>
               <a:t>as the operational threshold?</a:t>
             </a:r>
+            <a:endParaRPr lang="en-US" altLang="zh-CN" dirty="0">
+              <a:solidFill>
+                <a:srgbClr val="FF0000"/>
+              </a:solidFill>
+              <a:latin typeface="Times New Roman" panose="02020503050405090304" charset="0"/>
+              <a:cs typeface="Times New Roman" panose="02020503050405090304" charset="0"/>
+            </a:endParaRPr>
           </a:p>
           <a:p>
             <a:pPr marR="0" lvl="0" algn="l" defTabSz="914400" rtl="0" eaLnBrk="1" fontAlgn="auto" latinLnBrk="0" hangingPunct="1">
@@ -6326,24 +6064,19 @@
               </a:spcAft>
               <a:buClrTx/>
               <a:buSzTx/>
-              <a:tabLst/>
               <a:defRPr/>
             </a:pPr>
-            <a:endParaRPr lang="en" altLang="zh-CN" sz="1800" dirty="0">
+            <a:endParaRPr lang="en-GB" altLang="zh-CN" sz="1800" dirty="0">
               <a:solidFill>
                 <a:srgbClr val="FF0000"/>
               </a:solidFill>
-              <a:latin typeface="+mn-ea"/>
+              <a:latin typeface="Times New Roman" panose="02020503050405090304" charset="0"/>
+              <a:cs typeface="Times New Roman" panose="02020503050405090304" charset="0"/>
             </a:endParaRPr>
           </a:p>
         </p:txBody>
       </p:sp>
     </p:spTree>
-    <p:extLst>
-      <p:ext uri="{BB962C8B-B14F-4D97-AF65-F5344CB8AC3E}">
-        <p14:creationId xmlns:p14="http://schemas.microsoft.com/office/powerpoint/2010/main" val="3298059243"/>
-      </p:ext>
-    </p:extLst>
   </p:cSld>
   <p:clrMapOvr>
     <a:masterClrMapping/>
@@ -6394,7 +6127,7 @@
     </a:clrScheme>
     <a:fontScheme name="Office">
       <a:majorFont>
-        <a:latin typeface="等线 Light" panose="02110004020202020204"/>
+        <a:latin typeface="等线 Light"/>
         <a:ea typeface=""/>
         <a:cs typeface=""/>
         <a:font script="Jpan" typeface="游ゴシック Light"/>
@@ -6427,26 +6160,9 @@
         <a:font script="Viet" typeface="Times New Roman"/>
         <a:font script="Uigh" typeface="Microsoft Uighur"/>
         <a:font script="Geor" typeface="Sylfaen"/>
-        <a:font script="Armn" typeface="Arial"/>
-        <a:font script="Bugi" typeface="Leelawadee UI"/>
-        <a:font script="Bopo" typeface="Microsoft JhengHei"/>
-        <a:font script="Java" typeface="Javanese Text"/>
-        <a:font script="Lisu" typeface="Segoe UI"/>
-        <a:font script="Mymr" typeface="Myanmar Text"/>
-        <a:font script="Nkoo" typeface="Ebrima"/>
-        <a:font script="Olck" typeface="Nirmala UI"/>
-        <a:font script="Osma" typeface="Ebrima"/>
-        <a:font script="Phag" typeface="Phagspa"/>
-        <a:font script="Syrn" typeface="Estrangelo Edessa"/>
-        <a:font script="Syrj" typeface="Estrangelo Edessa"/>
-        <a:font script="Syre" typeface="Estrangelo Edessa"/>
-        <a:font script="Sora" typeface="Nirmala UI"/>
-        <a:font script="Tale" typeface="Microsoft Tai Le"/>
-        <a:font script="Talu" typeface="Microsoft New Tai Lue"/>
-        <a:font script="Tfng" typeface="Ebrima"/>
       </a:majorFont>
       <a:minorFont>
-        <a:latin typeface="等线" panose="02110004020202020204"/>
+        <a:latin typeface="等线"/>
         <a:ea typeface=""/>
         <a:cs typeface=""/>
         <a:font script="Jpan" typeface="游ゴシック"/>
@@ -6479,23 +6195,6 @@
         <a:font script="Viet" typeface="Arial"/>
         <a:font script="Uigh" typeface="Microsoft Uighur"/>
         <a:font script="Geor" typeface="Sylfaen"/>
-        <a:font script="Armn" typeface="Arial"/>
-        <a:font script="Bugi" typeface="Leelawadee UI"/>
-        <a:font script="Bopo" typeface="Microsoft JhengHei"/>
-        <a:font script="Java" typeface="Javanese Text"/>
-        <a:font script="Lisu" typeface="Segoe UI"/>
-        <a:font script="Mymr" typeface="Myanmar Text"/>
-        <a:font script="Nkoo" typeface="Ebrima"/>
-        <a:font script="Olck" typeface="Nirmala UI"/>
-        <a:font script="Osma" typeface="Ebrima"/>
-        <a:font script="Phag" typeface="Phagspa"/>
-        <a:font script="Syrn" typeface="Estrangelo Edessa"/>
-        <a:font script="Syrj" typeface="Estrangelo Edessa"/>
-        <a:font script="Syre" typeface="Estrangelo Edessa"/>
-        <a:font script="Sora" typeface="Nirmala UI"/>
-        <a:font script="Tale" typeface="Microsoft Tai Le"/>
-        <a:font script="Talu" typeface="Microsoft New Tai Lue"/>
-        <a:font script="Tfng" typeface="Ebrima"/>
       </a:minorFont>
     </a:fontScheme>
     <a:fmtScheme name="Office">
@@ -6657,10 +6356,9 @@
       </a:style>
     </a:lnDef>
   </a:objectDefaults>
-  <a:extraClrSchemeLst/>
   <a:extLst>
     <a:ext uri="{05A4C25C-085E-4340-85A3-A5531E510DB2}">
-      <thm15:themeFamily xmlns:thm15="http://schemas.microsoft.com/office/thememl/2012/main" name="Office Theme" id="{2E142A2C-CD16-42D6-873A-C26D2A0506FA}" vid="{1BDDFF52-6CD6-40A5-AB3C-68EB2F1E4D0A}"/>
+      <thm15:themeFamily xmlns:thm15="http://schemas.microsoft.com/office/thememl/2012/main" name="Office Theme" id="{62F939B6-93AF-4DB8-9C6B-D6C7DFDC589F}" vid="{4A3C46E8-61CC-4603-A589-7422A47A8E4A}"/>
     </a:ext>
   </a:extLst>
 </a:theme>
